--- a/presentation.pptx
+++ b/presentation.pptx
@@ -25,9 +25,10 @@
     <p:sldId id="273" r:id="rId19"/>
     <p:sldId id="274" r:id="rId20"/>
     <p:sldId id="275" r:id="rId21"/>
+    <p:sldId id="276" r:id="rId22"/>
   </p:sldIdLst>
   <p:notesMasterIdLst>
-    <p:notesMasterId r:id="rId22"/>
+    <p:notesMasterId r:id="rId23"/>
   </p:notesMasterIdLst>
   <p:sldSz cx="12192000" cy="6858000"/>
   <p:notesSz cx="6858000" cy="12192000"/>
@@ -521,7 +522,7 @@
           <a:p>
             <a:r>
               <a:rPr lang="en-US" dirty="0"/>
-              <a:t>Opening. We optimized two pyperformance benchmarks and designed a hardware accelerator for the hotspot that survived optimization. Both benchmarks beat the 7% requirement by a wide margin: raytrace 2.98x, pyflate 1.44x. The talk follows the order we actually worked in.</a:t>
+              <a:t>Opening. We optimized two pyperformance benchmarks and designed a hardware accelerator for the hotspot that survived optimization. Both benchmarks beat the 7% requirement by a wide margin: raytrace 2.56x, pyflate 1.48x, measured on the release interpreter. The talk follows the order we actually worked in.</a:t>
             </a:r>
             <a:endParaRPr lang="en-US" dirty="0"/>
           </a:p>
@@ -873,7 +874,7 @@
           <a:p>
             <a:r>
               <a:rPr lang="en-US" dirty="0"/>
-              <a:t>This is the hinge of the talk. Notice the interpreter share goes UP after optimization - that's not a regression, it's the floor becoming visible. We only argue for hardware once software has taken everything it can.</a:t>
+              <a:t>An external review caught this, and it is better told than hidden. We had used the debug interpreter for timing because the project guide requires it for profiling - correct for flame graphs, wrong for a speedup. Own the second half too: we predicted pyflate would drop as well, and it rose. The table is the point - a debug build does not bias speedups in a fixed direction; it depends on whether the optimization removed allocations or replaced Python with C.</a:t>
             </a:r>
             <a:endParaRPr lang="en-US" dirty="0"/>
           </a:p>
@@ -961,7 +962,7 @@
           <a:p>
             <a:r>
               <a:rPr lang="en-US" dirty="0"/>
-              <a:t>Point out the control logic slide-wide: there isn't any. That's deliberate - Lecture 5 says the systolic property is 'inputs processed every cycle, no control circuitry, most efficient silicon utilisation'. The price is that inputs must always be ready, which is what the FIFO guarantees, and Little's Law sizes it.</a:t>
+              <a:t>This is the hinge of the talk. Notice the interpreter share goes UP after optimization - that's not a regression, it's the floor becoming visible. We only argue for hardware once software has taken everything it can.</a:t>
             </a:r>
             <a:endParaRPr lang="en-US" dirty="0"/>
           </a:p>
@@ -1049,7 +1050,7 @@
           <a:p>
             <a:r>
               <a:rPr lang="en-US" dirty="0"/>
-              <a:t>If asked whether we synthesized it: no, and the spec explicitly doesn't require it. What we did do is verify functional correctness and the throughput claim in simulation, against real scene data rather than invented vectors.</a:t>
+              <a:t>Point out the control logic slide-wide: there isn't any. That's deliberate - Lecture 5 says the systolic property is 'inputs processed every cycle, no control circuitry, most efficient silicon utilisation'. The price is that inputs must always be ready, which is what the FIFO guarantees, and Little's Law sizes it.</a:t>
             </a:r>
             <a:endParaRPr lang="en-US" dirty="0"/>
           </a:p>
@@ -1137,7 +1138,7 @@
           <a:p>
             <a:r>
               <a:rPr lang="en-US" dirty="0"/>
-              <a:t>Resist the urge to widen the tolerance until a test passes. We found the mechanism, fixed what was fixable, and can point to a control case that confirms the diagnosis. The Q2.30 observation is the kind of thing they may ask about: choose the fixed-point format per operand from its known range.</a:t>
+              <a:t>If asked whether we synthesized it: no, and the spec explicitly doesn't require it. What we did do is verify functional correctness and the throughput claim in simulation, against real scene data rather than invented vectors.</a:t>
             </a:r>
             <a:endParaRPr lang="en-US" dirty="0"/>
           </a:p>
@@ -1225,7 +1226,7 @@
           <a:p>
             <a:r>
               <a:rPr lang="en-US" dirty="0"/>
-              <a:t>The most valuable slide for a viva. We could have claimed a big speedup; instead we bounded it honestly and explained why building something more impressive would be wasted silicon. Lecture 1's argument applies: verification is the limiting cost, so build the smallest thing that removes the bottleneck.</a:t>
+              <a:t>Resist the urge to widen the tolerance until a test passes. We found the mechanism, fixed what was fixable, and can point to a control case that confirms the diagnosis. The Q2.30 observation is the kind of thing they may ask about: choose the fixed-point format per operand from its known range.</a:t>
             </a:r>
             <a:endParaRPr lang="en-US" dirty="0"/>
           </a:p>
@@ -1313,7 +1314,7 @@
           <a:p>
             <a:r>
               <a:rPr lang="en-US" dirty="0"/>
-              <a:t>If they push on why not floating point - the answer is the scene is bounded, we measured the error at 9e-4 absolute which is 4.8e-5 relative on a value that ends up quantised to 256 colour levels, and FP32 would cost substantially more area for no visible benefit.</a:t>
+              <a:t>The most valuable slide for a viva. We could have claimed a big speedup; instead we bounded it honestly and explained why building something more impressive would be wasted silicon. Lecture 1's argument applies: verification is the limiting cost, so build the smallest thing that removes the bottleneck.</a:t>
             </a:r>
             <a:endParaRPr lang="en-US" dirty="0"/>
           </a:p>
@@ -1401,7 +1402,7 @@
           <a:p>
             <a:r>
               <a:rPr lang="en-US" dirty="0"/>
-              <a:t>Close on point 5 - it's the strongest argument that we understood the material rather than followed a recipe. Same methodology, two workloads, and the honest conclusion for one of them is that the simple accelerator pattern does not apply.</a:t>
+              <a:t>If they push on why not floating point - the answer is the scene is bounded, we measured the error at 9e-4 absolute which is 4.8e-5 relative on a value that ends up quantised to 256 colour levels, and FP32 would cost substantially more area for no visible benefit.</a:t>
             </a:r>
             <a:endParaRPr lang="en-US" dirty="0"/>
           </a:p>
@@ -1577,7 +1578,7 @@
           <a:p>
             <a:r>
               <a:rPr lang="en-US" dirty="0"/>
-              <a:t>Backup facts if asked: 17 commits; measurements all inside the QEMU guest; flame graphs sampled on cpu-clock because PEBS isn't virtualised; the Q16.16 worst-case error is 9.0e-4 absolute, 4.8e-5 relative.</a:t>
+              <a:t>Close on point 5 - it's the strongest argument that we understood the material rather than followed a recipe. Same methodology, two workloads, and the honest conclusion for one of them is that the simple accelerator pattern does not apply.</a:t>
             </a:r>
             <a:endParaRPr lang="en-US" dirty="0"/>
           </a:p>
@@ -1601,6 +1602,94 @@
             <a:fld id="{F7021451-1387-4CA6-816F-3879F97B5CBC}" type="slidenum">
               <a:rPr lang="en-US"/>
               <a:t>20</a:t>
+            </a:fld>
+            <a:endParaRPr lang="en-US"/>
+          </a:p>
+        </p:txBody>
+      </p:sp>
+    </p:spTree>
+    <p:extLst>
+      <p:ext uri="{BB962C8B-B14F-4D97-AF65-F5344CB8AC3E}">
+        <p14:creationId xmlns:p14="http://schemas.microsoft.com/office/powerpoint/2010/main" val="1024086991"/>
+      </p:ext>
+    </p:extLst>
+  </p:cSld>
+  <p:clrMapOvr>
+    <a:masterClrMapping/>
+  </p:clrMapOvr>
+</p:notes>
+</file>
+
+<file path=ppt/notesSlides/notesSlide21.xml><?xml version="1.0" encoding="utf-8"?>
+<p:notes xmlns:a="http://schemas.openxmlformats.org/drawingml/2006/main" xmlns:r="http://schemas.openxmlformats.org/officeDocument/2006/relationships" xmlns:p="http://schemas.openxmlformats.org/presentationml/2006/main">
+  <p:cSld>
+    <p:spTree>
+      <p:nvGrpSpPr>
+        <p:cNvPr id="1" name=""/>
+        <p:cNvGrpSpPr/>
+        <p:nvPr/>
+      </p:nvGrpSpPr>
+      <p:grpSpPr>
+        <a:xfrm>
+          <a:off x="0" y="0"/>
+          <a:ext cx="0" cy="0"/>
+          <a:chOff x="0" y="0"/>
+          <a:chExt cx="0" cy="0"/>
+        </a:xfrm>
+      </p:grpSpPr>
+      <p:sp>
+        <p:nvSpPr>
+          <p:cNvPr id="2" name="Slide Image Placeholder 1"/>
+          <p:cNvSpPr>
+            <a:spLocks noGrp="1" noRot="1" noChangeAspect="1"/>
+          </p:cNvSpPr>
+          <p:nvPr>
+            <p:ph type="sldImg"/>
+          </p:nvPr>
+        </p:nvSpPr>
+        <p:spPr/>
+      </p:sp>
+      <p:sp>
+        <p:nvSpPr>
+          <p:cNvPr id="3" name="Notes Placeholder 2"/>
+          <p:cNvSpPr>
+            <a:spLocks noGrp="1"/>
+          </p:cNvSpPr>
+          <p:nvPr>
+            <p:ph type="body" idx="1"/>
+          </p:nvPr>
+        </p:nvSpPr>
+        <p:spPr/>
+        <p:txBody>
+          <a:bodyPr/>
+          <a:lstStyle/>
+          <a:p>
+            <a:r>
+              <a:rPr lang="en-US" dirty="0"/>
+              <a:t>Backup facts if asked: headline timings on release python3 (2.56x, 1.48x), profiling on python3-dbg (2.98x, 1.44x there); measurements all inside the QEMU guest; flame graphs sampled on cpu-clock because PEBS isn't virtualised; the Q16.16 worst-case error is 9.0e-4 absolute, 4.8e-5 relative.</a:t>
+            </a:r>
+            <a:endParaRPr lang="en-US" dirty="0"/>
+          </a:p>
+        </p:txBody>
+      </p:sp>
+      <p:sp>
+        <p:nvSpPr>
+          <p:cNvPr id="4" name="Slide Number Placeholder 3"/>
+          <p:cNvSpPr>
+            <a:spLocks noGrp="1"/>
+          </p:cNvSpPr>
+          <p:nvPr>
+            <p:ph type="sldNum" sz="quarter" idx="10"/>
+          </p:nvPr>
+        </p:nvSpPr>
+        <p:spPr/>
+        <p:txBody>
+          <a:bodyPr/>
+          <a:lstStyle/>
+          <a:p>
+            <a:fld id="{F7021451-1387-4CA6-816F-3879F97B5CBC}" type="slidenum">
+              <a:rPr lang="en-US"/>
+              <a:t>21</a:t>
             </a:fld>
             <a:endParaRPr lang="en-US"/>
           </a:p>
@@ -2805,7 +2894,7 @@
                 <a:ea typeface="Cambria" pitchFamily="34" charset="-122"/>
                 <a:cs typeface="Cambria" pitchFamily="34" charset="-120"/>
               </a:rPr>
-              <a:t>2.98×</a:t>
+              <a:t>2.56×</a:t>
             </a:r>
             <a:endParaRPr lang="en-US" sz="3400" dirty="0"/>
           </a:p>
@@ -2883,7 +2972,7 @@
                 <a:ea typeface="Cambria" pitchFamily="34" charset="-122"/>
                 <a:cs typeface="Cambria" pitchFamily="34" charset="-120"/>
               </a:rPr>
-              <a:t>1.44×</a:t>
+              <a:t>1.48×</a:t>
             </a:r>
             <a:endParaRPr lang="en-US" sz="2800" dirty="0"/>
           </a:p>
@@ -3650,7 +3739,7 @@
                 <a:ea typeface="Calibri" pitchFamily="34" charset="-122"/>
                 <a:cs typeface="Calibri" pitchFamily="34" charset="-120"/>
               </a:rPr>
-              <a:t>after fixing Huffman only</a:t>
+              <a:t>Huffman only · debug build</a:t>
             </a:r>
             <a:endParaRPr lang="en-US" sz="1200" dirty="0"/>
           </a:p>
@@ -3794,7 +3883,7 @@
                 <a:ea typeface="Calibri" pitchFamily="34" charset="-122"/>
                 <a:cs typeface="Calibri" pitchFamily="34" charset="-120"/>
               </a:rPr>
-              <a:t>after fixing the bzip2 stages</a:t>
+              <a:t>+ bzip2 stages · debug build</a:t>
             </a:r>
             <a:endParaRPr lang="en-US" sz="1200" dirty="0"/>
           </a:p>
@@ -3872,7 +3961,7 @@
                 <a:ea typeface="Calibri" pitchFamily="34" charset="-122"/>
                 <a:cs typeface="Calibri" pitchFamily="34" charset="-120"/>
               </a:rPr>
-              <a:t>The profile disagreed. The file is a .bz2, so Huffman is one of FOUR pipeline stages — and the move-to-front and inverse-BWT stages were still untouched. Re-profiling after the first fix, instead of declaring victory, produced the remaining 19 %.</a:t>
+              <a:t>The profile disagreed. The file is a .bz2, so Huffman is one of FOUR pipeline stages — and the move-to-front and inverse-BWT stages were still untouched. Re-profiling after the first fix, instead of declaring victory, produced the remaining 19 %. (Release-interpreter final: 1.48×.)</a:t>
             </a:r>
             <a:endParaRPr lang="en-US" sz="1400" dirty="0"/>
           </a:p>
@@ -4189,7 +4278,7 @@
                 <a:ea typeface="Cambria" pitchFamily="34" charset="-122"/>
                 <a:cs typeface="Cambria" pitchFamily="34" charset="-120"/>
               </a:rPr>
-              <a:t>pyflate: 1.44× faster, md5-verified</a:t>
+              <a:t>pyflate: 1.48× faster, md5-verified</a:t>
             </a:r>
             <a:endParaRPr lang="en-US" sz="3200" dirty="0"/>
           </a:p>
@@ -4228,7 +4317,7 @@
                 <a:ea typeface="Cambria" pitchFamily="34" charset="-122"/>
                 <a:cs typeface="Cambria" pitchFamily="34" charset="-120"/>
               </a:rPr>
-              <a:t>1.44×</a:t>
+              <a:t>1.48×</a:t>
             </a:r>
             <a:endParaRPr lang="en-US" sz="5200" dirty="0"/>
           </a:p>
@@ -4243,7 +4332,7 @@
         <p:spPr>
           <a:xfrm>
             <a:off x="594360" y="2240280"/>
-            <a:ext cx="2560320" cy="640080"/>
+            <a:ext cx="2560320" cy="868680"/>
           </a:xfrm>
           <a:prstGeom prst="rect">
             <a:avLst/>
@@ -4267,7 +4356,7 @@
                 <a:ea typeface="Calibri" pitchFamily="34" charset="-122"/>
                 <a:cs typeface="Calibri" pitchFamily="34" charset="-120"/>
               </a:rPr>
-              <a:t>3.12 s → 2.18 s</a:t>
+              <a:t>1.12 s → 754 ms, release</a:t>
             </a:r>
             <a:endParaRPr lang="en-US" sz="1300" dirty="0"/>
           </a:p>
@@ -4284,7 +4373,24 @@
                 <a:ea typeface="Calibri" pitchFamily="34" charset="-122"/>
                 <a:cs typeface="Calibri" pitchFamily="34" charset="-120"/>
               </a:rPr>
-              <a:t>30.1 % faster</a:t>
+              <a:t>32.4 % less time</a:t>
+            </a:r>
+            <a:endParaRPr lang="en-US" sz="1300" dirty="0"/>
+          </a:p>
+          <a:p>
+            <a:pPr indent="0" marL="0">
+              <a:buNone/>
+            </a:pPr>
+            <a:r>
+              <a:rPr lang="en-US" sz="1300" dirty="0">
+                <a:solidFill>
+                  <a:srgbClr val="6B7280"/>
+                </a:solidFill>
+                <a:latin typeface="Calibri" pitchFamily="34" charset="0"/>
+                <a:ea typeface="Calibri" pitchFamily="34" charset="-122"/>
+                <a:cs typeface="Calibri" pitchFamily="34" charset="-120"/>
+              </a:rPr>
+              <a:t>debug build said 1.44×</a:t>
             </a:r>
             <a:endParaRPr lang="en-US" sz="1300" dirty="0"/>
           </a:p>
@@ -4336,7 +4442,7 @@
                           <a:ea typeface="Calibri" pitchFamily="34" charset="-122"/>
                           <a:cs typeface="Calibri" pitchFamily="34" charset="-120"/>
                         </a:rPr>
-                        <a:t>metric</a:t>
+                        <a:t>perf counter · dbg</a:t>
                       </a:r>
                       <a:endParaRPr lang="en-US" sz="1150" dirty="0">
                         <a:latin typeface="Calibri" charset="0"/>
@@ -7036,7 +7142,7 @@
                 <a:ea typeface="Calibri" pitchFamily="34" charset="-122"/>
                 <a:cs typeface="Calibri" pitchFamily="34" charset="-120"/>
               </a:rPr>
-              <a:t>THE CASE FOR HARDWARE</a:t>
+              <a:t>A CORRECTION FROM REVIEW</a:t>
             </a:r>
             <a:endParaRPr lang="en-US" sz="1100" dirty="0"/>
           </a:p>
@@ -7075,7 +7181,7 @@
                 <a:ea typeface="Cambria" pitchFamily="34" charset="-122"/>
                 <a:cs typeface="Cambria" pitchFamily="34" charset="-120"/>
               </a:rPr>
-              <a:t>Optimizing changed the shape of the problem</a:t>
+              <a:t>Which Python you measure changes the answer</a:t>
             </a:r>
             <a:endParaRPr lang="en-US" sz="3200" dirty="0"/>
           </a:p>
@@ -7090,7 +7196,7 @@
         <p:spPr>
           <a:xfrm>
             <a:off x="594360" y="1417320"/>
-            <a:ext cx="10881360" cy="365760"/>
+            <a:ext cx="10881360" cy="548640"/>
           </a:xfrm>
           <a:prstGeom prst="rect">
             <a:avLst/>
@@ -7109,7 +7215,7 @@
               <a:buNone/>
             </a:pPr>
             <a:r>
-              <a:rPr lang="en-US" sz="1500" dirty="0">
+              <a:rPr lang="en-US" sz="1400" dirty="0">
                 <a:solidFill>
                   <a:srgbClr val="23272E"/>
                 </a:solidFill>
@@ -7117,328 +7223,880 @@
                 <a:ea typeface="Calibri" pitchFamily="34" charset="-122"/>
                 <a:cs typeface="Calibri" pitchFamily="34" charset="-120"/>
               </a:rPr>
-              <a:t>Software optimization did not just make raytrace faster — it changed what raytrace is made of.</a:t>
-            </a:r>
-            <a:endParaRPr lang="en-US" sz="1500" dirty="0"/>
-          </a:p>
-        </p:txBody>
-      </p:sp>
-      <p:sp>
-        <p:nvSpPr>
-          <p:cNvPr id="5" name="Shape 3"/>
+              <a:t>We timed on python3-dbg because profiling needs its symbols. A reviewer pointed out that a speedup belongs on the release interpreter. Re-timing changed both answers — in opposite directions.</a:t>
+            </a:r>
+            <a:endParaRPr lang="en-US" sz="1400" dirty="0"/>
+          </a:p>
+        </p:txBody>
+      </p:sp>
+      <p:graphicFrame>
+        <p:nvGraphicFramePr>
+          <p:cNvPr id="14" name="Table 0"/>
+          <p:cNvGraphicFramePr>
+            <a:graphicFrameLocks noGrp="1"/>
+          </p:cNvGraphicFramePr>
+          <p:nvPr>
+            <p:extLst>
+              <p:ext uri="{D42A27DB-BD31-4B8C-83A1-F6EECF244321}">
+                <p14:modId xmlns:p14="http://schemas.microsoft.com/office/powerpoint/2010/main" val="1579011935"/>
+              </p:ext>
+            </p:extLst>
+          </p:nvPr>
+        </p:nvGraphicFramePr>
+        <p:xfrm>
+          <a:off x="594360" y="2103120"/>
+          <a:ext cx="10927080" cy="914400"/>
+        </p:xfrm>
+        <a:graphic>
+          <a:graphicData uri="http://schemas.openxmlformats.org/drawingml/2006/table">
+            <a:tbl>
+              <a:tblPr/>
+              <a:tblGrid>
+                <a:gridCol w="2194560"/>
+                <a:gridCol w="2377440"/>
+                <a:gridCol w="2514600"/>
+                <a:gridCol w="3840480"/>
+              </a:tblGrid>
+              <a:tr h="274320">
+                <a:tc>
+                  <a:txBody>
+                    <a:bodyPr/>
+                    <a:lstStyle/>
+                    <a:p>
+                      <a:pPr indent="0" marL="0">
+                        <a:buNone/>
+                      </a:pPr>
+                      <a:r>
+                        <a:rPr lang="en-US" sz="1300" b="1" dirty="0">
+                          <a:solidFill>
+                            <a:srgbClr val="23272E"/>
+                          </a:solidFill>
+                          <a:latin typeface="Calibri" pitchFamily="34" charset="0"/>
+                          <a:ea typeface="Calibri" pitchFamily="34" charset="-122"/>
+                          <a:cs typeface="Calibri" pitchFamily="34" charset="-120"/>
+                        </a:rPr>
+                        <a:t>benchmark</a:t>
+                      </a:r>
+                      <a:endParaRPr lang="en-US" sz="1300" dirty="0">
+                        <a:latin typeface="Calibri" charset="0"/>
+                        <a:ea typeface="Calibri" charset="0"/>
+                        <a:cs typeface="Calibri" charset="0"/>
+                      </a:endParaRPr>
+                    </a:p>
+                  </a:txBody>
+                  <a:tcPr marL="91440" marR="91440" marT="45720" marB="45720" anchor="ctr">
+                    <a:lnL w="12700" cap="flat" cmpd="sng" algn="ctr">
+                      <a:solidFill>
+                        <a:srgbClr val="E3E3DF"/>
+                      </a:solidFill>
+                      <a:prstDash val="solid"/>
+                      <a:round/>
+                      <a:headEnd type="none" w="med" len="med"/>
+                      <a:tailEnd type="none" w="med" len="med"/>
+                    </a:lnL>
+                    <a:lnR w="12700" cap="flat" cmpd="sng" algn="ctr">
+                      <a:solidFill>
+                        <a:srgbClr val="E3E3DF"/>
+                      </a:solidFill>
+                      <a:prstDash val="solid"/>
+                      <a:round/>
+                      <a:headEnd type="none" w="med" len="med"/>
+                      <a:tailEnd type="none" w="med" len="med"/>
+                    </a:lnR>
+                    <a:lnT w="12700" cap="flat" cmpd="sng" algn="ctr">
+                      <a:solidFill>
+                        <a:srgbClr val="E3E3DF"/>
+                      </a:solidFill>
+                      <a:prstDash val="solid"/>
+                      <a:round/>
+                      <a:headEnd type="none" w="med" len="med"/>
+                      <a:tailEnd type="none" w="med" len="med"/>
+                    </a:lnT>
+                    <a:lnB w="12700" cap="flat" cmpd="sng" algn="ctr">
+                      <a:solidFill>
+                        <a:srgbClr val="E3E3DF"/>
+                      </a:solidFill>
+                      <a:prstDash val="solid"/>
+                      <a:round/>
+                      <a:headEnd type="none" w="med" len="med"/>
+                      <a:tailEnd type="none" w="med" len="med"/>
+                    </a:lnB>
+                    <a:solidFill>
+                      <a:srgbClr val="FFFFFF"/>
+                    </a:solidFill>
+                  </a:tcPr>
+                </a:tc>
+                <a:tc>
+                  <a:txBody>
+                    <a:bodyPr/>
+                    <a:lstStyle/>
+                    <a:p>
+                      <a:pPr indent="0" marL="0">
+                        <a:buNone/>
+                      </a:pPr>
+                      <a:r>
+                        <a:rPr lang="en-US" sz="1300" b="1" dirty="0">
+                          <a:solidFill>
+                            <a:srgbClr val="23272E"/>
+                          </a:solidFill>
+                          <a:latin typeface="Calibri" pitchFamily="34" charset="0"/>
+                          <a:ea typeface="Calibri" pitchFamily="34" charset="-122"/>
+                          <a:cs typeface="Calibri" pitchFamily="34" charset="-120"/>
+                        </a:rPr>
+                        <a:t>release python3</a:t>
+                      </a:r>
+                      <a:endParaRPr lang="en-US" sz="1300" dirty="0">
+                        <a:latin typeface="Calibri" charset="0"/>
+                        <a:ea typeface="Calibri" charset="0"/>
+                        <a:cs typeface="Calibri" charset="0"/>
+                      </a:endParaRPr>
+                    </a:p>
+                  </a:txBody>
+                  <a:tcPr marL="91440" marR="91440" marT="45720" marB="45720" anchor="ctr">
+                    <a:lnL w="12700" cap="flat" cmpd="sng" algn="ctr">
+                      <a:solidFill>
+                        <a:srgbClr val="E3E3DF"/>
+                      </a:solidFill>
+                      <a:prstDash val="solid"/>
+                      <a:round/>
+                      <a:headEnd type="none" w="med" len="med"/>
+                      <a:tailEnd type="none" w="med" len="med"/>
+                    </a:lnL>
+                    <a:lnR w="12700" cap="flat" cmpd="sng" algn="ctr">
+                      <a:solidFill>
+                        <a:srgbClr val="E3E3DF"/>
+                      </a:solidFill>
+                      <a:prstDash val="solid"/>
+                      <a:round/>
+                      <a:headEnd type="none" w="med" len="med"/>
+                      <a:tailEnd type="none" w="med" len="med"/>
+                    </a:lnR>
+                    <a:lnT w="12700" cap="flat" cmpd="sng" algn="ctr">
+                      <a:solidFill>
+                        <a:srgbClr val="E3E3DF"/>
+                      </a:solidFill>
+                      <a:prstDash val="solid"/>
+                      <a:round/>
+                      <a:headEnd type="none" w="med" len="med"/>
+                      <a:tailEnd type="none" w="med" len="med"/>
+                    </a:lnT>
+                    <a:lnB w="12700" cap="flat" cmpd="sng" algn="ctr">
+                      <a:solidFill>
+                        <a:srgbClr val="E3E3DF"/>
+                      </a:solidFill>
+                      <a:prstDash val="solid"/>
+                      <a:round/>
+                      <a:headEnd type="none" w="med" len="med"/>
+                      <a:tailEnd type="none" w="med" len="med"/>
+                    </a:lnB>
+                    <a:solidFill>
+                      <a:srgbClr val="FFFFFF"/>
+                    </a:solidFill>
+                  </a:tcPr>
+                </a:tc>
+                <a:tc>
+                  <a:txBody>
+                    <a:bodyPr/>
+                    <a:lstStyle/>
+                    <a:p>
+                      <a:pPr indent="0" marL="0">
+                        <a:buNone/>
+                      </a:pPr>
+                      <a:r>
+                        <a:rPr lang="en-US" sz="1300" b="1" dirty="0">
+                          <a:solidFill>
+                            <a:srgbClr val="23272E"/>
+                          </a:solidFill>
+                          <a:latin typeface="Calibri" pitchFamily="34" charset="0"/>
+                          <a:ea typeface="Calibri" pitchFamily="34" charset="-122"/>
+                          <a:cs typeface="Calibri" pitchFamily="34" charset="-120"/>
+                        </a:rPr>
+                        <a:t>debug python3-dbg</a:t>
+                      </a:r>
+                      <a:endParaRPr lang="en-US" sz="1300" dirty="0">
+                        <a:latin typeface="Calibri" charset="0"/>
+                        <a:ea typeface="Calibri" charset="0"/>
+                        <a:cs typeface="Calibri" charset="0"/>
+                      </a:endParaRPr>
+                    </a:p>
+                  </a:txBody>
+                  <a:tcPr marL="91440" marR="91440" marT="45720" marB="45720" anchor="ctr">
+                    <a:lnL w="12700" cap="flat" cmpd="sng" algn="ctr">
+                      <a:solidFill>
+                        <a:srgbClr val="E3E3DF"/>
+                      </a:solidFill>
+                      <a:prstDash val="solid"/>
+                      <a:round/>
+                      <a:headEnd type="none" w="med" len="med"/>
+                      <a:tailEnd type="none" w="med" len="med"/>
+                    </a:lnL>
+                    <a:lnR w="12700" cap="flat" cmpd="sng" algn="ctr">
+                      <a:solidFill>
+                        <a:srgbClr val="E3E3DF"/>
+                      </a:solidFill>
+                      <a:prstDash val="solid"/>
+                      <a:round/>
+                      <a:headEnd type="none" w="med" len="med"/>
+                      <a:tailEnd type="none" w="med" len="med"/>
+                    </a:lnR>
+                    <a:lnT w="12700" cap="flat" cmpd="sng" algn="ctr">
+                      <a:solidFill>
+                        <a:srgbClr val="E3E3DF"/>
+                      </a:solidFill>
+                      <a:prstDash val="solid"/>
+                      <a:round/>
+                      <a:headEnd type="none" w="med" len="med"/>
+                      <a:tailEnd type="none" w="med" len="med"/>
+                    </a:lnT>
+                    <a:lnB w="12700" cap="flat" cmpd="sng" algn="ctr">
+                      <a:solidFill>
+                        <a:srgbClr val="E3E3DF"/>
+                      </a:solidFill>
+                      <a:prstDash val="solid"/>
+                      <a:round/>
+                      <a:headEnd type="none" w="med" len="med"/>
+                      <a:tailEnd type="none" w="med" len="med"/>
+                    </a:lnB>
+                    <a:solidFill>
+                      <a:srgbClr val="FFFFFF"/>
+                    </a:solidFill>
+                  </a:tcPr>
+                </a:tc>
+                <a:tc>
+                  <a:txBody>
+                    <a:bodyPr/>
+                    <a:lstStyle/>
+                    <a:p>
+                      <a:pPr indent="0" marL="0">
+                        <a:buNone/>
+                      </a:pPr>
+                      <a:r>
+                        <a:rPr lang="en-US" sz="1300" b="1" dirty="0">
+                          <a:solidFill>
+                            <a:srgbClr val="23272E"/>
+                          </a:solidFill>
+                          <a:latin typeface="Calibri" pitchFamily="34" charset="0"/>
+                          <a:ea typeface="Calibri" pitchFamily="34" charset="-122"/>
+                          <a:cs typeface="Calibri" pitchFamily="34" charset="-120"/>
+                        </a:rPr>
+                        <a:t>the debug build…</a:t>
+                      </a:r>
+                      <a:endParaRPr lang="en-US" sz="1300" dirty="0">
+                        <a:latin typeface="Calibri" charset="0"/>
+                        <a:ea typeface="Calibri" charset="0"/>
+                        <a:cs typeface="Calibri" charset="0"/>
+                      </a:endParaRPr>
+                    </a:p>
+                  </a:txBody>
+                  <a:tcPr marL="91440" marR="91440" marT="45720" marB="45720" anchor="ctr">
+                    <a:lnL w="12700" cap="flat" cmpd="sng" algn="ctr">
+                      <a:solidFill>
+                        <a:srgbClr val="E3E3DF"/>
+                      </a:solidFill>
+                      <a:prstDash val="solid"/>
+                      <a:round/>
+                      <a:headEnd type="none" w="med" len="med"/>
+                      <a:tailEnd type="none" w="med" len="med"/>
+                    </a:lnL>
+                    <a:lnR w="12700" cap="flat" cmpd="sng" algn="ctr">
+                      <a:solidFill>
+                        <a:srgbClr val="E3E3DF"/>
+                      </a:solidFill>
+                      <a:prstDash val="solid"/>
+                      <a:round/>
+                      <a:headEnd type="none" w="med" len="med"/>
+                      <a:tailEnd type="none" w="med" len="med"/>
+                    </a:lnR>
+                    <a:lnT w="12700" cap="flat" cmpd="sng" algn="ctr">
+                      <a:solidFill>
+                        <a:srgbClr val="E3E3DF"/>
+                      </a:solidFill>
+                      <a:prstDash val="solid"/>
+                      <a:round/>
+                      <a:headEnd type="none" w="med" len="med"/>
+                      <a:tailEnd type="none" w="med" len="med"/>
+                    </a:lnT>
+                    <a:lnB w="12700" cap="flat" cmpd="sng" algn="ctr">
+                      <a:solidFill>
+                        <a:srgbClr val="E3E3DF"/>
+                      </a:solidFill>
+                      <a:prstDash val="solid"/>
+                      <a:round/>
+                      <a:headEnd type="none" w="med" len="med"/>
+                      <a:tailEnd type="none" w="med" len="med"/>
+                    </a:lnB>
+                    <a:solidFill>
+                      <a:srgbClr val="FFFFFF"/>
+                    </a:solidFill>
+                  </a:tcPr>
+                </a:tc>
+              </a:tr>
+              <a:tr h="274320">
+                <a:tc>
+                  <a:txBody>
+                    <a:bodyPr/>
+                    <a:lstStyle/>
+                    <a:p>
+                      <a:pPr indent="0" marL="0">
+                        <a:buNone/>
+                      </a:pPr>
+                      <a:r>
+                        <a:rPr lang="en-US" sz="1300" dirty="0">
+                          <a:solidFill>
+                            <a:srgbClr val="23272E"/>
+                          </a:solidFill>
+                          <a:latin typeface="Calibri" pitchFamily="34" charset="0"/>
+                          <a:ea typeface="Calibri" pitchFamily="34" charset="-122"/>
+                          <a:cs typeface="Calibri" pitchFamily="34" charset="-120"/>
+                        </a:rPr>
+                        <a:t>raytrace</a:t>
+                      </a:r>
+                      <a:endParaRPr lang="en-US" sz="1300" dirty="0">
+                        <a:latin typeface="Calibri" charset="0"/>
+                        <a:ea typeface="Calibri" charset="0"/>
+                        <a:cs typeface="Calibri" charset="0"/>
+                      </a:endParaRPr>
+                    </a:p>
+                  </a:txBody>
+                  <a:tcPr marL="91440" marR="91440" marT="45720" marB="45720" anchor="ctr">
+                    <a:lnL w="12700" cap="flat" cmpd="sng" algn="ctr">
+                      <a:solidFill>
+                        <a:srgbClr val="E3E3DF"/>
+                      </a:solidFill>
+                      <a:prstDash val="solid"/>
+                      <a:round/>
+                      <a:headEnd type="none" w="med" len="med"/>
+                      <a:tailEnd type="none" w="med" len="med"/>
+                    </a:lnL>
+                    <a:lnR w="12700" cap="flat" cmpd="sng" algn="ctr">
+                      <a:solidFill>
+                        <a:srgbClr val="E3E3DF"/>
+                      </a:solidFill>
+                      <a:prstDash val="solid"/>
+                      <a:round/>
+                      <a:headEnd type="none" w="med" len="med"/>
+                      <a:tailEnd type="none" w="med" len="med"/>
+                    </a:lnR>
+                    <a:lnT w="12700" cap="flat" cmpd="sng" algn="ctr">
+                      <a:solidFill>
+                        <a:srgbClr val="E3E3DF"/>
+                      </a:solidFill>
+                      <a:prstDash val="solid"/>
+                      <a:round/>
+                      <a:headEnd type="none" w="med" len="med"/>
+                      <a:tailEnd type="none" w="med" len="med"/>
+                    </a:lnT>
+                    <a:lnB w="12700" cap="flat" cmpd="sng" algn="ctr">
+                      <a:solidFill>
+                        <a:srgbClr val="E3E3DF"/>
+                      </a:solidFill>
+                      <a:prstDash val="solid"/>
+                      <a:round/>
+                      <a:headEnd type="none" w="med" len="med"/>
+                      <a:tailEnd type="none" w="med" len="med"/>
+                    </a:lnB>
+                    <a:solidFill>
+                      <a:srgbClr val="FFFFFF"/>
+                    </a:solidFill>
+                  </a:tcPr>
+                </a:tc>
+                <a:tc>
+                  <a:txBody>
+                    <a:bodyPr/>
+                    <a:lstStyle/>
+                    <a:p>
+                      <a:pPr indent="0" marL="0">
+                        <a:buNone/>
+                      </a:pPr>
+                      <a:r>
+                        <a:rPr lang="en-US" sz="1300" dirty="0">
+                          <a:solidFill>
+                            <a:srgbClr val="23272E"/>
+                          </a:solidFill>
+                          <a:latin typeface="Calibri" pitchFamily="34" charset="0"/>
+                          <a:ea typeface="Calibri" pitchFamily="34" charset="-122"/>
+                          <a:cs typeface="Calibri" pitchFamily="34" charset="-120"/>
+                        </a:rPr>
+                        <a:t>2.56×</a:t>
+                      </a:r>
+                      <a:endParaRPr lang="en-US" sz="1300" dirty="0">
+                        <a:latin typeface="Calibri" charset="0"/>
+                        <a:ea typeface="Calibri" charset="0"/>
+                        <a:cs typeface="Calibri" charset="0"/>
+                      </a:endParaRPr>
+                    </a:p>
+                  </a:txBody>
+                  <a:tcPr marL="91440" marR="91440" marT="45720" marB="45720" anchor="ctr">
+                    <a:lnL w="12700" cap="flat" cmpd="sng" algn="ctr">
+                      <a:solidFill>
+                        <a:srgbClr val="E3E3DF"/>
+                      </a:solidFill>
+                      <a:prstDash val="solid"/>
+                      <a:round/>
+                      <a:headEnd type="none" w="med" len="med"/>
+                      <a:tailEnd type="none" w="med" len="med"/>
+                    </a:lnL>
+                    <a:lnR w="12700" cap="flat" cmpd="sng" algn="ctr">
+                      <a:solidFill>
+                        <a:srgbClr val="E3E3DF"/>
+                      </a:solidFill>
+                      <a:prstDash val="solid"/>
+                      <a:round/>
+                      <a:headEnd type="none" w="med" len="med"/>
+                      <a:tailEnd type="none" w="med" len="med"/>
+                    </a:lnR>
+                    <a:lnT w="12700" cap="flat" cmpd="sng" algn="ctr">
+                      <a:solidFill>
+                        <a:srgbClr val="E3E3DF"/>
+                      </a:solidFill>
+                      <a:prstDash val="solid"/>
+                      <a:round/>
+                      <a:headEnd type="none" w="med" len="med"/>
+                      <a:tailEnd type="none" w="med" len="med"/>
+                    </a:lnT>
+                    <a:lnB w="12700" cap="flat" cmpd="sng" algn="ctr">
+                      <a:solidFill>
+                        <a:srgbClr val="E3E3DF"/>
+                      </a:solidFill>
+                      <a:prstDash val="solid"/>
+                      <a:round/>
+                      <a:headEnd type="none" w="med" len="med"/>
+                      <a:tailEnd type="none" w="med" len="med"/>
+                    </a:lnB>
+                    <a:solidFill>
+                      <a:srgbClr val="FFFFFF"/>
+                    </a:solidFill>
+                  </a:tcPr>
+                </a:tc>
+                <a:tc>
+                  <a:txBody>
+                    <a:bodyPr/>
+                    <a:lstStyle/>
+                    <a:p>
+                      <a:pPr indent="0" marL="0">
+                        <a:buNone/>
+                      </a:pPr>
+                      <a:r>
+                        <a:rPr lang="en-US" sz="1300" dirty="0">
+                          <a:solidFill>
+                            <a:srgbClr val="23272E"/>
+                          </a:solidFill>
+                          <a:latin typeface="Calibri" pitchFamily="34" charset="0"/>
+                          <a:ea typeface="Calibri" pitchFamily="34" charset="-122"/>
+                          <a:cs typeface="Calibri" pitchFamily="34" charset="-120"/>
+                        </a:rPr>
+                        <a:t>2.98×</a:t>
+                      </a:r>
+                      <a:endParaRPr lang="en-US" sz="1300" dirty="0">
+                        <a:latin typeface="Calibri" charset="0"/>
+                        <a:ea typeface="Calibri" charset="0"/>
+                        <a:cs typeface="Calibri" charset="0"/>
+                      </a:endParaRPr>
+                    </a:p>
+                  </a:txBody>
+                  <a:tcPr marL="91440" marR="91440" marT="45720" marB="45720" anchor="ctr">
+                    <a:lnL w="12700" cap="flat" cmpd="sng" algn="ctr">
+                      <a:solidFill>
+                        <a:srgbClr val="E3E3DF"/>
+                      </a:solidFill>
+                      <a:prstDash val="solid"/>
+                      <a:round/>
+                      <a:headEnd type="none" w="med" len="med"/>
+                      <a:tailEnd type="none" w="med" len="med"/>
+                    </a:lnL>
+                    <a:lnR w="12700" cap="flat" cmpd="sng" algn="ctr">
+                      <a:solidFill>
+                        <a:srgbClr val="E3E3DF"/>
+                      </a:solidFill>
+                      <a:prstDash val="solid"/>
+                      <a:round/>
+                      <a:headEnd type="none" w="med" len="med"/>
+                      <a:tailEnd type="none" w="med" len="med"/>
+                    </a:lnR>
+                    <a:lnT w="12700" cap="flat" cmpd="sng" algn="ctr">
+                      <a:solidFill>
+                        <a:srgbClr val="E3E3DF"/>
+                      </a:solidFill>
+                      <a:prstDash val="solid"/>
+                      <a:round/>
+                      <a:headEnd type="none" w="med" len="med"/>
+                      <a:tailEnd type="none" w="med" len="med"/>
+                    </a:lnT>
+                    <a:lnB w="12700" cap="flat" cmpd="sng" algn="ctr">
+                      <a:solidFill>
+                        <a:srgbClr val="E3E3DF"/>
+                      </a:solidFill>
+                      <a:prstDash val="solid"/>
+                      <a:round/>
+                      <a:headEnd type="none" w="med" len="med"/>
+                      <a:tailEnd type="none" w="med" len="med"/>
+                    </a:lnB>
+                    <a:solidFill>
+                      <a:srgbClr val="FFFFFF"/>
+                    </a:solidFill>
+                  </a:tcPr>
+                </a:tc>
+                <a:tc>
+                  <a:txBody>
+                    <a:bodyPr/>
+                    <a:lstStyle/>
+                    <a:p>
+                      <a:pPr indent="0" marL="0">
+                        <a:buNone/>
+                      </a:pPr>
+                      <a:r>
+                        <a:rPr lang="en-US" sz="1300" dirty="0">
+                          <a:solidFill>
+                            <a:srgbClr val="23272E"/>
+                          </a:solidFill>
+                          <a:latin typeface="Calibri" pitchFamily="34" charset="0"/>
+                          <a:ea typeface="Calibri" pitchFamily="34" charset="-122"/>
+                          <a:cs typeface="Calibri" pitchFamily="34" charset="-120"/>
+                        </a:rPr>
+                        <a:t>INFLATED the speedup</a:t>
+                      </a:r>
+                      <a:endParaRPr lang="en-US" sz="1300" dirty="0">
+                        <a:latin typeface="Calibri" charset="0"/>
+                        <a:ea typeface="Calibri" charset="0"/>
+                        <a:cs typeface="Calibri" charset="0"/>
+                      </a:endParaRPr>
+                    </a:p>
+                  </a:txBody>
+                  <a:tcPr marL="91440" marR="91440" marT="45720" marB="45720" anchor="ctr">
+                    <a:lnL w="12700" cap="flat" cmpd="sng" algn="ctr">
+                      <a:solidFill>
+                        <a:srgbClr val="E3E3DF"/>
+                      </a:solidFill>
+                      <a:prstDash val="solid"/>
+                      <a:round/>
+                      <a:headEnd type="none" w="med" len="med"/>
+                      <a:tailEnd type="none" w="med" len="med"/>
+                    </a:lnL>
+                    <a:lnR w="12700" cap="flat" cmpd="sng" algn="ctr">
+                      <a:solidFill>
+                        <a:srgbClr val="E3E3DF"/>
+                      </a:solidFill>
+                      <a:prstDash val="solid"/>
+                      <a:round/>
+                      <a:headEnd type="none" w="med" len="med"/>
+                      <a:tailEnd type="none" w="med" len="med"/>
+                    </a:lnR>
+                    <a:lnT w="12700" cap="flat" cmpd="sng" algn="ctr">
+                      <a:solidFill>
+                        <a:srgbClr val="E3E3DF"/>
+                      </a:solidFill>
+                      <a:prstDash val="solid"/>
+                      <a:round/>
+                      <a:headEnd type="none" w="med" len="med"/>
+                      <a:tailEnd type="none" w="med" len="med"/>
+                    </a:lnT>
+                    <a:lnB w="12700" cap="flat" cmpd="sng" algn="ctr">
+                      <a:solidFill>
+                        <a:srgbClr val="E3E3DF"/>
+                      </a:solidFill>
+                      <a:prstDash val="solid"/>
+                      <a:round/>
+                      <a:headEnd type="none" w="med" len="med"/>
+                      <a:tailEnd type="none" w="med" len="med"/>
+                    </a:lnB>
+                    <a:solidFill>
+                      <a:srgbClr val="FFFFFF"/>
+                    </a:solidFill>
+                  </a:tcPr>
+                </a:tc>
+              </a:tr>
+              <a:tr h="274320">
+                <a:tc>
+                  <a:txBody>
+                    <a:bodyPr/>
+                    <a:lstStyle/>
+                    <a:p>
+                      <a:pPr indent="0" marL="0">
+                        <a:buNone/>
+                      </a:pPr>
+                      <a:r>
+                        <a:rPr lang="en-US" sz="1300" dirty="0">
+                          <a:solidFill>
+                            <a:srgbClr val="23272E"/>
+                          </a:solidFill>
+                          <a:latin typeface="Calibri" pitchFamily="34" charset="0"/>
+                          <a:ea typeface="Calibri" pitchFamily="34" charset="-122"/>
+                          <a:cs typeface="Calibri" pitchFamily="34" charset="-120"/>
+                        </a:rPr>
+                        <a:t>pyflate</a:t>
+                      </a:r>
+                      <a:endParaRPr lang="en-US" sz="1300" dirty="0">
+                        <a:latin typeface="Calibri" charset="0"/>
+                        <a:ea typeface="Calibri" charset="0"/>
+                        <a:cs typeface="Calibri" charset="0"/>
+                      </a:endParaRPr>
+                    </a:p>
+                  </a:txBody>
+                  <a:tcPr marL="91440" marR="91440" marT="45720" marB="45720" anchor="ctr">
+                    <a:lnL w="12700" cap="flat" cmpd="sng" algn="ctr">
+                      <a:solidFill>
+                        <a:srgbClr val="E3E3DF"/>
+                      </a:solidFill>
+                      <a:prstDash val="solid"/>
+                      <a:round/>
+                      <a:headEnd type="none" w="med" len="med"/>
+                      <a:tailEnd type="none" w="med" len="med"/>
+                    </a:lnL>
+                    <a:lnR w="12700" cap="flat" cmpd="sng" algn="ctr">
+                      <a:solidFill>
+                        <a:srgbClr val="E3E3DF"/>
+                      </a:solidFill>
+                      <a:prstDash val="solid"/>
+                      <a:round/>
+                      <a:headEnd type="none" w="med" len="med"/>
+                      <a:tailEnd type="none" w="med" len="med"/>
+                    </a:lnR>
+                    <a:lnT w="12700" cap="flat" cmpd="sng" algn="ctr">
+                      <a:solidFill>
+                        <a:srgbClr val="E3E3DF"/>
+                      </a:solidFill>
+                      <a:prstDash val="solid"/>
+                      <a:round/>
+                      <a:headEnd type="none" w="med" len="med"/>
+                      <a:tailEnd type="none" w="med" len="med"/>
+                    </a:lnT>
+                    <a:lnB w="12700" cap="flat" cmpd="sng" algn="ctr">
+                      <a:solidFill>
+                        <a:srgbClr val="E3E3DF"/>
+                      </a:solidFill>
+                      <a:prstDash val="solid"/>
+                      <a:round/>
+                      <a:headEnd type="none" w="med" len="med"/>
+                      <a:tailEnd type="none" w="med" len="med"/>
+                    </a:lnB>
+                    <a:solidFill>
+                      <a:srgbClr val="FFFFFF"/>
+                    </a:solidFill>
+                  </a:tcPr>
+                </a:tc>
+                <a:tc>
+                  <a:txBody>
+                    <a:bodyPr/>
+                    <a:lstStyle/>
+                    <a:p>
+                      <a:pPr indent="0" marL="0">
+                        <a:buNone/>
+                      </a:pPr>
+                      <a:r>
+                        <a:rPr lang="en-US" sz="1300" dirty="0">
+                          <a:solidFill>
+                            <a:srgbClr val="23272E"/>
+                          </a:solidFill>
+                          <a:latin typeface="Calibri" pitchFamily="34" charset="0"/>
+                          <a:ea typeface="Calibri" pitchFamily="34" charset="-122"/>
+                          <a:cs typeface="Calibri" pitchFamily="34" charset="-120"/>
+                        </a:rPr>
+                        <a:t>1.48×</a:t>
+                      </a:r>
+                      <a:endParaRPr lang="en-US" sz="1300" dirty="0">
+                        <a:latin typeface="Calibri" charset="0"/>
+                        <a:ea typeface="Calibri" charset="0"/>
+                        <a:cs typeface="Calibri" charset="0"/>
+                      </a:endParaRPr>
+                    </a:p>
+                  </a:txBody>
+                  <a:tcPr marL="91440" marR="91440" marT="45720" marB="45720" anchor="ctr">
+                    <a:lnL w="12700" cap="flat" cmpd="sng" algn="ctr">
+                      <a:solidFill>
+                        <a:srgbClr val="E3E3DF"/>
+                      </a:solidFill>
+                      <a:prstDash val="solid"/>
+                      <a:round/>
+                      <a:headEnd type="none" w="med" len="med"/>
+                      <a:tailEnd type="none" w="med" len="med"/>
+                    </a:lnL>
+                    <a:lnR w="12700" cap="flat" cmpd="sng" algn="ctr">
+                      <a:solidFill>
+                        <a:srgbClr val="E3E3DF"/>
+                      </a:solidFill>
+                      <a:prstDash val="solid"/>
+                      <a:round/>
+                      <a:headEnd type="none" w="med" len="med"/>
+                      <a:tailEnd type="none" w="med" len="med"/>
+                    </a:lnR>
+                    <a:lnT w="12700" cap="flat" cmpd="sng" algn="ctr">
+                      <a:solidFill>
+                        <a:srgbClr val="E3E3DF"/>
+                      </a:solidFill>
+                      <a:prstDash val="solid"/>
+                      <a:round/>
+                      <a:headEnd type="none" w="med" len="med"/>
+                      <a:tailEnd type="none" w="med" len="med"/>
+                    </a:lnT>
+                    <a:lnB w="12700" cap="flat" cmpd="sng" algn="ctr">
+                      <a:solidFill>
+                        <a:srgbClr val="E3E3DF"/>
+                      </a:solidFill>
+                      <a:prstDash val="solid"/>
+                      <a:round/>
+                      <a:headEnd type="none" w="med" len="med"/>
+                      <a:tailEnd type="none" w="med" len="med"/>
+                    </a:lnB>
+                    <a:solidFill>
+                      <a:srgbClr val="FFFFFF"/>
+                    </a:solidFill>
+                  </a:tcPr>
+                </a:tc>
+                <a:tc>
+                  <a:txBody>
+                    <a:bodyPr/>
+                    <a:lstStyle/>
+                    <a:p>
+                      <a:pPr indent="0" marL="0">
+                        <a:buNone/>
+                      </a:pPr>
+                      <a:r>
+                        <a:rPr lang="en-US" sz="1300" dirty="0">
+                          <a:solidFill>
+                            <a:srgbClr val="23272E"/>
+                          </a:solidFill>
+                          <a:latin typeface="Calibri" pitchFamily="34" charset="0"/>
+                          <a:ea typeface="Calibri" pitchFamily="34" charset="-122"/>
+                          <a:cs typeface="Calibri" pitchFamily="34" charset="-120"/>
+                        </a:rPr>
+                        <a:t>1.44×</a:t>
+                      </a:r>
+                      <a:endParaRPr lang="en-US" sz="1300" dirty="0">
+                        <a:latin typeface="Calibri" charset="0"/>
+                        <a:ea typeface="Calibri" charset="0"/>
+                        <a:cs typeface="Calibri" charset="0"/>
+                      </a:endParaRPr>
+                    </a:p>
+                  </a:txBody>
+                  <a:tcPr marL="91440" marR="91440" marT="45720" marB="45720" anchor="ctr">
+                    <a:lnL w="12700" cap="flat" cmpd="sng" algn="ctr">
+                      <a:solidFill>
+                        <a:srgbClr val="E3E3DF"/>
+                      </a:solidFill>
+                      <a:prstDash val="solid"/>
+                      <a:round/>
+                      <a:headEnd type="none" w="med" len="med"/>
+                      <a:tailEnd type="none" w="med" len="med"/>
+                    </a:lnL>
+                    <a:lnR w="12700" cap="flat" cmpd="sng" algn="ctr">
+                      <a:solidFill>
+                        <a:srgbClr val="E3E3DF"/>
+                      </a:solidFill>
+                      <a:prstDash val="solid"/>
+                      <a:round/>
+                      <a:headEnd type="none" w="med" len="med"/>
+                      <a:tailEnd type="none" w="med" len="med"/>
+                    </a:lnR>
+                    <a:lnT w="12700" cap="flat" cmpd="sng" algn="ctr">
+                      <a:solidFill>
+                        <a:srgbClr val="E3E3DF"/>
+                      </a:solidFill>
+                      <a:prstDash val="solid"/>
+                      <a:round/>
+                      <a:headEnd type="none" w="med" len="med"/>
+                      <a:tailEnd type="none" w="med" len="med"/>
+                    </a:lnT>
+                    <a:lnB w="12700" cap="flat" cmpd="sng" algn="ctr">
+                      <a:solidFill>
+                        <a:srgbClr val="E3E3DF"/>
+                      </a:solidFill>
+                      <a:prstDash val="solid"/>
+                      <a:round/>
+                      <a:headEnd type="none" w="med" len="med"/>
+                      <a:tailEnd type="none" w="med" len="med"/>
+                    </a:lnB>
+                    <a:solidFill>
+                      <a:srgbClr val="FFFFFF"/>
+                    </a:solidFill>
+                  </a:tcPr>
+                </a:tc>
+                <a:tc>
+                  <a:txBody>
+                    <a:bodyPr/>
+                    <a:lstStyle/>
+                    <a:p>
+                      <a:pPr indent="0" marL="0">
+                        <a:buNone/>
+                      </a:pPr>
+                      <a:r>
+                        <a:rPr lang="en-US" sz="1300" dirty="0">
+                          <a:solidFill>
+                            <a:srgbClr val="23272E"/>
+                          </a:solidFill>
+                          <a:latin typeface="Calibri" pitchFamily="34" charset="0"/>
+                          <a:ea typeface="Calibri" pitchFamily="34" charset="-122"/>
+                          <a:cs typeface="Calibri" pitchFamily="34" charset="-120"/>
+                        </a:rPr>
+                        <a:t>UNDERSTATED the speedup</a:t>
+                      </a:r>
+                      <a:endParaRPr lang="en-US" sz="1300" dirty="0">
+                        <a:latin typeface="Calibri" charset="0"/>
+                        <a:ea typeface="Calibri" charset="0"/>
+                        <a:cs typeface="Calibri" charset="0"/>
+                      </a:endParaRPr>
+                    </a:p>
+                  </a:txBody>
+                  <a:tcPr marL="91440" marR="91440" marT="45720" marB="45720" anchor="ctr">
+                    <a:lnL w="12700" cap="flat" cmpd="sng" algn="ctr">
+                      <a:solidFill>
+                        <a:srgbClr val="E3E3DF"/>
+                      </a:solidFill>
+                      <a:prstDash val="solid"/>
+                      <a:round/>
+                      <a:headEnd type="none" w="med" len="med"/>
+                      <a:tailEnd type="none" w="med" len="med"/>
+                    </a:lnL>
+                    <a:lnR w="12700" cap="flat" cmpd="sng" algn="ctr">
+                      <a:solidFill>
+                        <a:srgbClr val="E3E3DF"/>
+                      </a:solidFill>
+                      <a:prstDash val="solid"/>
+                      <a:round/>
+                      <a:headEnd type="none" w="med" len="med"/>
+                      <a:tailEnd type="none" w="med" len="med"/>
+                    </a:lnR>
+                    <a:lnT w="12700" cap="flat" cmpd="sng" algn="ctr">
+                      <a:solidFill>
+                        <a:srgbClr val="E3E3DF"/>
+                      </a:solidFill>
+                      <a:prstDash val="solid"/>
+                      <a:round/>
+                      <a:headEnd type="none" w="med" len="med"/>
+                      <a:tailEnd type="none" w="med" len="med"/>
+                    </a:lnT>
+                    <a:lnB w="12700" cap="flat" cmpd="sng" algn="ctr">
+                      <a:solidFill>
+                        <a:srgbClr val="E3E3DF"/>
+                      </a:solidFill>
+                      <a:prstDash val="solid"/>
+                      <a:round/>
+                      <a:headEnd type="none" w="med" len="med"/>
+                      <a:tailEnd type="none" w="med" len="med"/>
+                    </a:lnB>
+                    <a:solidFill>
+                      <a:srgbClr val="FFFFFF"/>
+                    </a:solidFill>
+                  </a:tcPr>
+                </a:tc>
+              </a:tr>
+            </a:tbl>
+          </a:graphicData>
+        </a:graphic>
+      </p:graphicFrame>
+      <p:sp>
+        <p:nvSpPr>
+          <p:cNvPr id="6" name="Shape 3"/>
           <p:cNvSpPr/>
           <p:nvPr/>
         </p:nvSpPr>
         <p:spPr>
           <a:xfrm>
-            <a:off x="594360" y="1965960"/>
-            <a:ext cx="5257800" cy="2286000"/>
+            <a:off x="594360" y="3154680"/>
+            <a:ext cx="5303520" cy="1783080"/>
           </a:xfrm>
           <a:prstGeom prst="roundRect">
             <a:avLst>
-              <a:gd name="adj" fmla="val 2400"/>
-            </a:avLst>
-          </a:prstGeom>
-          <a:solidFill>
-            <a:srgbClr val="FFFFFF"/>
-          </a:solidFill>
-          <a:ln w="12700">
-            <a:solidFill>
-              <a:srgbClr val="E3E3DF"/>
-            </a:solidFill>
-            <a:prstDash val="solid"/>
-          </a:ln>
-          <a:effectLst>
-            <a:outerShdw sx="100000" sy="100000" kx="0" ky="0" algn="bl" rotWithShape="0" blurRad="76200" dist="12700" dir="5400000">
-              <a:srgbClr val="9A9A95">
-                <a:alpha val="18000"/>
-              </a:srgbClr>
-            </a:outerShdw>
-          </a:effectLst>
-        </p:spPr>
-      </p:sp>
-      <p:sp>
-        <p:nvSpPr>
-          <p:cNvPr id="6" name="Text 4"/>
-          <p:cNvSpPr txBox="1"/>
-          <p:nvPr/>
-        </p:nvSpPr>
-        <p:spPr>
-          <a:xfrm>
-            <a:off x="868680" y="2148840"/>
-            <a:ext cx="4663440" cy="274320"/>
-          </a:xfrm>
-          <a:prstGeom prst="rect">
-            <a:avLst/>
-          </a:prstGeom>
-          <a:noFill/>
-          <a:ln/>
-        </p:spPr>
-        <p:txBody>
-          <a:bodyPr wrap="square" lIns="0" tIns="0" rIns="0" bIns="0" rtlCol="0" anchor="ctr"/>
-          <a:lstStyle/>
-          <a:p>
-            <a:pPr indent="0" marL="0">
-              <a:buNone/>
-            </a:pPr>
-            <a:r>
-              <a:rPr lang="en-US" sz="1200" b="1" spc="100" kern="0" dirty="0">
-                <a:solidFill>
-                  <a:srgbClr val="6B7280"/>
-                </a:solidFill>
-                <a:latin typeface="Calibri" pitchFamily="34" charset="0"/>
-                <a:ea typeface="Calibri" pitchFamily="34" charset="-122"/>
-                <a:cs typeface="Calibri" pitchFamily="34" charset="-120"/>
-              </a:rPr>
-              <a:t>Sphere.intersectionTime</a:t>
-            </a:r>
-            <a:endParaRPr lang="en-US" sz="1200" dirty="0"/>
-          </a:p>
-        </p:txBody>
-      </p:sp>
-      <p:sp>
-        <p:nvSpPr>
-          <p:cNvPr id="7" name="Text 5"/>
-          <p:cNvSpPr txBox="1"/>
-          <p:nvPr/>
-        </p:nvSpPr>
-        <p:spPr>
-          <a:xfrm>
-            <a:off x="868680" y="2468880"/>
-            <a:ext cx="4663440" cy="640080"/>
-          </a:xfrm>
-          <a:prstGeom prst="rect">
-            <a:avLst/>
-          </a:prstGeom>
-          <a:noFill/>
-          <a:ln/>
-        </p:spPr>
-        <p:txBody>
-          <a:bodyPr wrap="square" lIns="0" tIns="0" rIns="0" bIns="0" rtlCol="0" anchor="ctr"/>
-          <a:lstStyle/>
-          <a:p>
-            <a:pPr indent="0" marL="0">
-              <a:buNone/>
-            </a:pPr>
-            <a:r>
-              <a:rPr lang="en-US" sz="2800" b="1" dirty="0">
-                <a:solidFill>
-                  <a:srgbClr val="E8552D"/>
-                </a:solidFill>
-                <a:latin typeface="Cambria" pitchFamily="34" charset="0"/>
-                <a:ea typeface="Cambria" pitchFamily="34" charset="-122"/>
-                <a:cs typeface="Cambria" pitchFamily="34" charset="-120"/>
-              </a:rPr>
-              <a:t>11.8 %   →   28.1 %</a:t>
-            </a:r>
-            <a:endParaRPr lang="en-US" sz="2800" dirty="0"/>
-          </a:p>
-        </p:txBody>
-      </p:sp>
-      <p:sp>
-        <p:nvSpPr>
-          <p:cNvPr id="8" name="Text 6"/>
-          <p:cNvSpPr txBox="1"/>
-          <p:nvPr/>
-        </p:nvSpPr>
-        <p:spPr>
-          <a:xfrm>
-            <a:off x="868680" y="3108960"/>
-            <a:ext cx="4663440" cy="914400"/>
-          </a:xfrm>
-          <a:prstGeom prst="rect">
-            <a:avLst/>
-          </a:prstGeom>
-          <a:noFill/>
-          <a:ln/>
-        </p:spPr>
-        <p:txBody>
-          <a:bodyPr wrap="square" lIns="0" tIns="0" rIns="0" bIns="0" rtlCol="0" anchor="ctr"/>
-          <a:lstStyle/>
-          <a:p>
-            <a:pPr indent="0" marL="0">
-              <a:buNone/>
-            </a:pPr>
-            <a:r>
-              <a:rPr lang="en-US" sz="1250" dirty="0">
-                <a:solidFill>
-                  <a:srgbClr val="23272E"/>
-                </a:solidFill>
-                <a:latin typeface="Calibri" pitchFamily="34" charset="0"/>
-                <a:ea typeface="Calibri" pitchFamily="34" charset="-122"/>
-                <a:cs typeface="Calibri" pitchFamily="34" charset="-120"/>
-              </a:rPr>
-              <a:t>of runtime, before → after. It is now the single largest consumer, at 179,457 calls per frame.</a:t>
-            </a:r>
-            <a:endParaRPr lang="en-US" sz="1250" dirty="0"/>
-          </a:p>
-        </p:txBody>
-      </p:sp>
-      <p:sp>
-        <p:nvSpPr>
-          <p:cNvPr id="9" name="Shape 7"/>
-          <p:cNvSpPr/>
-          <p:nvPr/>
-        </p:nvSpPr>
-        <p:spPr>
-          <a:xfrm>
-            <a:off x="6309360" y="1965960"/>
-            <a:ext cx="5257800" cy="2286000"/>
-          </a:xfrm>
-          <a:prstGeom prst="roundRect">
-            <a:avLst>
-              <a:gd name="adj" fmla="val 2400"/>
-            </a:avLst>
-          </a:prstGeom>
-          <a:solidFill>
-            <a:srgbClr val="FFFFFF"/>
-          </a:solidFill>
-          <a:ln w="12700">
-            <a:solidFill>
-              <a:srgbClr val="E3E3DF"/>
-            </a:solidFill>
-            <a:prstDash val="solid"/>
-          </a:ln>
-          <a:effectLst>
-            <a:outerShdw sx="100000" sy="100000" kx="0" ky="0" algn="bl" rotWithShape="0" blurRad="76200" dist="12700" dir="5400000">
-              <a:srgbClr val="9A9A95">
-                <a:alpha val="18000"/>
-              </a:srgbClr>
-            </a:outerShdw>
-          </a:effectLst>
-        </p:spPr>
-      </p:sp>
-      <p:sp>
-        <p:nvSpPr>
-          <p:cNvPr id="10" name="Text 8"/>
-          <p:cNvSpPr txBox="1"/>
-          <p:nvPr/>
-        </p:nvSpPr>
-        <p:spPr>
-          <a:xfrm>
-            <a:off x="6583680" y="2148840"/>
-            <a:ext cx="4663440" cy="274320"/>
-          </a:xfrm>
-          <a:prstGeom prst="rect">
-            <a:avLst/>
-          </a:prstGeom>
-          <a:noFill/>
-          <a:ln/>
-        </p:spPr>
-        <p:txBody>
-          <a:bodyPr wrap="square" lIns="0" tIns="0" rIns="0" bIns="0" rtlCol="0" anchor="ctr"/>
-          <a:lstStyle/>
-          <a:p>
-            <a:pPr indent="0" marL="0">
-              <a:buNone/>
-            </a:pPr>
-            <a:r>
-              <a:rPr lang="en-US" sz="1200" b="1" spc="100" kern="0" dirty="0">
-                <a:solidFill>
-                  <a:srgbClr val="6B7280"/>
-                </a:solidFill>
-                <a:latin typeface="Calibri" pitchFamily="34" charset="0"/>
-                <a:ea typeface="Calibri" pitchFamily="34" charset="-122"/>
-                <a:cs typeface="Calibri" pitchFamily="34" charset="-120"/>
-              </a:rPr>
-              <a:t>_PyEval_EvalFrameDefault</a:t>
-            </a:r>
-            <a:endParaRPr lang="en-US" sz="1200" dirty="0"/>
-          </a:p>
-        </p:txBody>
-      </p:sp>
-      <p:sp>
-        <p:nvSpPr>
-          <p:cNvPr id="11" name="Text 9"/>
-          <p:cNvSpPr txBox="1"/>
-          <p:nvPr/>
-        </p:nvSpPr>
-        <p:spPr>
-          <a:xfrm>
-            <a:off x="6583680" y="2468880"/>
-            <a:ext cx="4663440" cy="640080"/>
-          </a:xfrm>
-          <a:prstGeom prst="rect">
-            <a:avLst/>
-          </a:prstGeom>
-          <a:noFill/>
-          <a:ln/>
-        </p:spPr>
-        <p:txBody>
-          <a:bodyPr wrap="square" lIns="0" tIns="0" rIns="0" bIns="0" rtlCol="0" anchor="ctr"/>
-          <a:lstStyle/>
-          <a:p>
-            <a:pPr indent="0" marL="0">
-              <a:buNone/>
-            </a:pPr>
-            <a:r>
-              <a:rPr lang="en-US" sz="2800" b="1" dirty="0">
-                <a:solidFill>
-                  <a:srgbClr val="2D9596"/>
-                </a:solidFill>
-                <a:latin typeface="Cambria" pitchFamily="34" charset="0"/>
-                <a:ea typeface="Cambria" pitchFamily="34" charset="-122"/>
-                <a:cs typeface="Cambria" pitchFamily="34" charset="-120"/>
-              </a:rPr>
-              <a:t>28.1 %   →   34.1 %</a:t>
-            </a:r>
-            <a:endParaRPr lang="en-US" sz="2800" dirty="0"/>
-          </a:p>
-        </p:txBody>
-      </p:sp>
-      <p:sp>
-        <p:nvSpPr>
-          <p:cNvPr id="12" name="Text 10"/>
-          <p:cNvSpPr txBox="1"/>
-          <p:nvPr/>
-        </p:nvSpPr>
-        <p:spPr>
-          <a:xfrm>
-            <a:off x="6583680" y="3108960"/>
-            <a:ext cx="4663440" cy="914400"/>
-          </a:xfrm>
-          <a:prstGeom prst="rect">
-            <a:avLst/>
-          </a:prstGeom>
-          <a:noFill/>
-          <a:ln/>
-        </p:spPr>
-        <p:txBody>
-          <a:bodyPr wrap="square" lIns="0" tIns="0" rIns="0" bIns="0" rtlCol="0" anchor="ctr"/>
-          <a:lstStyle/>
-          <a:p>
-            <a:pPr indent="0" marL="0">
-              <a:buNone/>
-            </a:pPr>
-            <a:r>
-              <a:rPr lang="en-US" sz="1250" dirty="0">
-                <a:solidFill>
-                  <a:srgbClr val="23272E"/>
-                </a:solidFill>
-                <a:latin typeface="Calibri" pitchFamily="34" charset="0"/>
-                <a:ea typeface="Calibri" pitchFamily="34" charset="-122"/>
-                <a:cs typeface="Calibri" pitchFamily="34" charset="-120"/>
-              </a:rPr>
-              <a:t>of samples. Its absolute cost fell with everything else — but of what remains, a larger fraction is raw interpreter dispatch.</a:t>
-            </a:r>
-            <a:endParaRPr lang="en-US" sz="1250" dirty="0"/>
-          </a:p>
-        </p:txBody>
-      </p:sp>
-      <p:sp>
-        <p:nvSpPr>
-          <p:cNvPr id="13" name="Shape 11"/>
-          <p:cNvSpPr/>
-          <p:nvPr/>
-        </p:nvSpPr>
-        <p:spPr>
-          <a:xfrm>
-            <a:off x="594360" y="4480560"/>
-            <a:ext cx="10927080" cy="1371600"/>
-          </a:xfrm>
-          <a:prstGeom prst="roundRect">
-            <a:avLst>
-              <a:gd name="adj" fmla="val 4000"/>
+              <a:gd name="adj" fmla="val 3077"/>
             </a:avLst>
           </a:prstGeom>
           <a:solidFill>
@@ -7461,14 +8119,14 @@
       </p:sp>
       <p:sp>
         <p:nvSpPr>
-          <p:cNvPr id="14" name="Text 12"/>
+          <p:cNvPr id="7" name="Text 4"/>
           <p:cNvSpPr txBox="1"/>
           <p:nvPr/>
         </p:nvSpPr>
         <p:spPr>
           <a:xfrm>
-            <a:off x="914400" y="4663440"/>
-            <a:ext cx="10241280" cy="320040"/>
+            <a:off x="868680" y="3310128"/>
+            <a:ext cx="4754880" cy="292608"/>
           </a:xfrm>
           <a:prstGeom prst="rect">
             <a:avLst/>
@@ -7484,30 +8142,30 @@
               <a:buNone/>
             </a:pPr>
             <a:r>
-              <a:rPr lang="en-US" sz="1700" b="1" dirty="0">
-                <a:solidFill>
-                  <a:srgbClr val="23272E"/>
+              <a:rPr lang="en-US" sz="1450" b="1" dirty="0">
+                <a:solidFill>
+                  <a:srgbClr val="E8552D"/>
                 </a:solidFill>
                 <a:latin typeface="Cambria" pitchFamily="34" charset="0"/>
                 <a:ea typeface="Cambria" pitchFamily="34" charset="-122"/>
                 <a:cs typeface="Cambria" pitchFamily="34" charset="-120"/>
               </a:rPr>
-              <a:t>Once the removable software overhead is gone, what is left is irreducible in software.</a:t>
-            </a:r>
-            <a:endParaRPr lang="en-US" sz="1700" dirty="0"/>
-          </a:p>
-        </p:txBody>
-      </p:sp>
-      <p:sp>
-        <p:nvSpPr>
-          <p:cNvPr id="15" name="Text 13"/>
+              <a:t>raytrace — we removed allocations</a:t>
+            </a:r>
+            <a:endParaRPr lang="en-US" sz="1450" dirty="0"/>
+          </a:p>
+        </p:txBody>
+      </p:sp>
+      <p:sp>
+        <p:nvSpPr>
+          <p:cNvPr id="8" name="Text 5"/>
           <p:cNvSpPr txBox="1"/>
           <p:nvPr/>
         </p:nvSpPr>
         <p:spPr>
           <a:xfrm>
-            <a:off x="914400" y="5029200"/>
-            <a:ext cx="10241280" cy="640080"/>
+            <a:off x="868680" y="3639312"/>
+            <a:ext cx="4754880" cy="1188720"/>
           </a:xfrm>
           <a:prstGeom prst="rect">
             <a:avLst/>
@@ -7520,13 +8178,10 @@
           <a:lstStyle/>
           <a:p>
             <a:pPr indent="0" marL="0">
-              <a:lnSpc>
-                <a:spcPct val="115000"/>
-              </a:lnSpc>
-              <a:buNone/>
-            </a:pPr>
-            <a:r>
-              <a:rPr lang="en-US" sz="1350" dirty="0">
+              <a:buNone/>
+            </a:pPr>
+            <a:r>
+              <a:rPr lang="en-US" sz="1150" dirty="0">
                 <a:solidFill>
                   <a:srgbClr val="23272E"/>
                 </a:solidFill>
@@ -7534,9 +8189,199 @@
                 <a:ea typeface="Calibri" pitchFamily="34" charset="-122"/>
                 <a:cs typeface="Calibri" pitchFamily="34" charset="-120"/>
               </a:rPr>
-              <a:t>That residue is fixed-shape, control-free arithmetic executed 179,457 times per frame — which is precisely the shape of problem a small fixed-function accelerator is good at. This is where hardware earns its place, and not before.</a:t>
-            </a:r>
-            <a:endParaRPr lang="en-US" sz="1350" dirty="0"/>
+              <a:t>In a debug build every allocation goes through a guard-byte allocator plus extra reference-count checks. We deleted ~330,000 Vector allocations per frame, so each one saved more there than it does in the release build.</a:t>
+            </a:r>
+            <a:endParaRPr lang="en-US" sz="1150" dirty="0"/>
+          </a:p>
+        </p:txBody>
+      </p:sp>
+      <p:sp>
+        <p:nvSpPr>
+          <p:cNvPr id="9" name="Shape 6"/>
+          <p:cNvSpPr/>
+          <p:nvPr/>
+        </p:nvSpPr>
+        <p:spPr>
+          <a:xfrm>
+            <a:off x="6263640" y="3154680"/>
+            <a:ext cx="5303520" cy="1783080"/>
+          </a:xfrm>
+          <a:prstGeom prst="roundRect">
+            <a:avLst>
+              <a:gd name="adj" fmla="val 3077"/>
+            </a:avLst>
+          </a:prstGeom>
+          <a:solidFill>
+            <a:srgbClr val="EAF5F5"/>
+          </a:solidFill>
+          <a:ln w="12700">
+            <a:solidFill>
+              <a:srgbClr val="E3E3DF"/>
+            </a:solidFill>
+            <a:prstDash val="solid"/>
+          </a:ln>
+          <a:effectLst>
+            <a:outerShdw sx="100000" sy="100000" kx="0" ky="0" algn="bl" rotWithShape="0" blurRad="76200" dist="12700" dir="5400000">
+              <a:srgbClr val="9A9A95">
+                <a:alpha val="18000"/>
+              </a:srgbClr>
+            </a:outerShdw>
+          </a:effectLst>
+        </p:spPr>
+      </p:sp>
+      <p:sp>
+        <p:nvSpPr>
+          <p:cNvPr id="10" name="Text 7"/>
+          <p:cNvSpPr txBox="1"/>
+          <p:nvPr/>
+        </p:nvSpPr>
+        <p:spPr>
+          <a:xfrm>
+            <a:off x="6537960" y="3310128"/>
+            <a:ext cx="4754880" cy="292608"/>
+          </a:xfrm>
+          <a:prstGeom prst="rect">
+            <a:avLst/>
+          </a:prstGeom>
+          <a:noFill/>
+          <a:ln/>
+        </p:spPr>
+        <p:txBody>
+          <a:bodyPr wrap="square" lIns="0" tIns="0" rIns="0" bIns="0" rtlCol="0" anchor="ctr"/>
+          <a:lstStyle/>
+          <a:p>
+            <a:pPr indent="0" marL="0">
+              <a:buNone/>
+            </a:pPr>
+            <a:r>
+              <a:rPr lang="en-US" sz="1450" b="1" dirty="0">
+                <a:solidFill>
+                  <a:srgbClr val="2D9596"/>
+                </a:solidFill>
+                <a:latin typeface="Cambria" pitchFamily="34" charset="0"/>
+                <a:ea typeface="Cambria" pitchFamily="34" charset="-122"/>
+                <a:cs typeface="Cambria" pitchFamily="34" charset="-120"/>
+              </a:rPr>
+              <a:t>pyflate — we swapped Python for C</a:t>
+            </a:r>
+            <a:endParaRPr lang="en-US" sz="1450" dirty="0"/>
+          </a:p>
+        </p:txBody>
+      </p:sp>
+      <p:sp>
+        <p:nvSpPr>
+          <p:cNvPr id="11" name="Text 8"/>
+          <p:cNvSpPr txBox="1"/>
+          <p:nvPr/>
+        </p:nvSpPr>
+        <p:spPr>
+          <a:xfrm>
+            <a:off x="6537960" y="3639312"/>
+            <a:ext cx="4754880" cy="1188720"/>
+          </a:xfrm>
+          <a:prstGeom prst="rect">
+            <a:avLst/>
+          </a:prstGeom>
+          <a:noFill/>
+          <a:ln/>
+        </p:spPr>
+        <p:txBody>
+          <a:bodyPr wrap="square" lIns="0" tIns="0" rIns="0" bIns="0" rtlCol="0" anchor="ctr"/>
+          <a:lstStyle/>
+          <a:p>
+            <a:pPr indent="0" marL="0">
+              <a:buNone/>
+            </a:pPr>
+            <a:r>
+              <a:rPr lang="en-US" sz="1150" dirty="0">
+                <a:solidFill>
+                  <a:srgbClr val="23272E"/>
+                </a:solidFill>
+                <a:latin typeface="Calibri" pitchFamily="34" charset="0"/>
+                <a:ea typeface="Calibri" pitchFamily="34" charset="-122"/>
+                <a:cs typeface="Calibri" pitchFamily="34" charset="-120"/>
+              </a:rPr>
+              <a:t>We replaced interpreted loops with dict.get, Counter and list.pop. A debug build compiles that C with assertions and little optimisation, so the code we switched TO is slower there. (Our best explanation of a 3 % gap.)</a:t>
+            </a:r>
+            <a:endParaRPr lang="en-US" sz="1150" dirty="0"/>
+          </a:p>
+        </p:txBody>
+      </p:sp>
+      <p:sp>
+        <p:nvSpPr>
+          <p:cNvPr id="12" name="Text 9"/>
+          <p:cNvSpPr txBox="1"/>
+          <p:nvPr/>
+        </p:nvSpPr>
+        <p:spPr>
+          <a:xfrm>
+            <a:off x="594360" y="5120640"/>
+            <a:ext cx="10881360" cy="457200"/>
+          </a:xfrm>
+          <a:prstGeom prst="rect">
+            <a:avLst/>
+          </a:prstGeom>
+          <a:noFill/>
+          <a:ln/>
+        </p:spPr>
+        <p:txBody>
+          <a:bodyPr wrap="square" lIns="0" tIns="0" rIns="0" bIns="0" rtlCol="0" anchor="ctr"/>
+          <a:lstStyle/>
+          <a:p>
+            <a:pPr indent="0" marL="0">
+              <a:buNone/>
+            </a:pPr>
+            <a:r>
+              <a:rPr lang="en-US" sz="1250" dirty="0">
+                <a:solidFill>
+                  <a:srgbClr val="6B7280"/>
+                </a:solidFill>
+                <a:latin typeface="Calibri" pitchFamily="34" charset="0"/>
+                <a:ea typeface="Calibri" pitchFamily="34" charset="-122"/>
+                <a:cs typeface="Calibri" pitchFamily="34" charset="-120"/>
+              </a:rPr>
+              <a:t>The fingerprint was in our profiles all along: unresolved frames such as 0xfdfdfdfdfd000053 are built from 0xFD — FORBIDDENBYTE, the debug allocator's guard byte.</a:t>
+            </a:r>
+            <a:endParaRPr lang="en-US" sz="1250" dirty="0"/>
+          </a:p>
+        </p:txBody>
+      </p:sp>
+      <p:sp>
+        <p:nvSpPr>
+          <p:cNvPr id="13" name="Text 10"/>
+          <p:cNvSpPr txBox="1"/>
+          <p:nvPr/>
+        </p:nvSpPr>
+        <p:spPr>
+          <a:xfrm>
+            <a:off x="594360" y="5669280"/>
+            <a:ext cx="10881360" cy="411480"/>
+          </a:xfrm>
+          <a:prstGeom prst="rect">
+            <a:avLst/>
+          </a:prstGeom>
+          <a:noFill/>
+          <a:ln/>
+        </p:spPr>
+        <p:txBody>
+          <a:bodyPr wrap="square" lIns="0" tIns="0" rIns="0" bIns="0" rtlCol="0" anchor="ctr"/>
+          <a:lstStyle/>
+          <a:p>
+            <a:pPr indent="0" marL="0">
+              <a:buNone/>
+            </a:pPr>
+            <a:r>
+              <a:rPr lang="en-US" sz="1900" b="1" dirty="0">
+                <a:solidFill>
+                  <a:srgbClr val="23272E"/>
+                </a:solidFill>
+                <a:latin typeface="Cambria" pitchFamily="34" charset="0"/>
+                <a:ea typeface="Cambria" pitchFamily="34" charset="-122"/>
+                <a:cs typeface="Cambria" pitchFamily="34" charset="-120"/>
+              </a:rPr>
+              <a:t>Profile with symbols. Measure with the interpreter you ship.</a:t>
+            </a:r>
+            <a:endParaRPr lang="en-US" sz="1900" dirty="0"/>
           </a:p>
         </p:txBody>
       </p:sp>
@@ -7605,7 +8450,7 @@
                 <a:ea typeface="Calibri" pitchFamily="34" charset="-122"/>
                 <a:cs typeface="Calibri" pitchFamily="34" charset="-120"/>
               </a:rPr>
-              <a:t>THE ACCELERATOR</a:t>
+              <a:t>THE CASE FOR HARDWARE</a:t>
             </a:r>
             <a:endParaRPr lang="en-US" sz="1100" dirty="0"/>
           </a:p>
@@ -7644,7 +8489,7 @@
                 <a:ea typeface="Cambria" pitchFamily="34" charset="-122"/>
                 <a:cs typeface="Cambria" pitchFamily="34" charset="-120"/>
               </a:rPr>
-              <a:t>Ray–Sphere Intersection Unit</a:t>
+              <a:t>Optimizing changed the shape of the problem</a:t>
             </a:r>
             <a:endParaRPr lang="en-US" sz="3200" dirty="0"/>
           </a:p>
@@ -7658,8 +8503,8 @@
         </p:nvSpPr>
         <p:spPr>
           <a:xfrm>
-            <a:off x="594360" y="1371600"/>
-            <a:ext cx="10881360" cy="320040"/>
+            <a:off x="594360" y="1417320"/>
+            <a:ext cx="10881360" cy="365760"/>
           </a:xfrm>
           <a:prstGeom prst="rect">
             <a:avLst/>
@@ -7672,10 +8517,13 @@
           <a:lstStyle/>
           <a:p>
             <a:pPr indent="0" marL="0">
-              <a:buNone/>
-            </a:pPr>
-            <a:r>
-              <a:rPr lang="en-US" sz="1350" dirty="0">
+              <a:lnSpc>
+                <a:spcPct val="115000"/>
+              </a:lnSpc>
+              <a:buNone/>
+            </a:pPr>
+            <a:r>
+              <a:rPr lang="en-US" sz="1500" dirty="0">
                 <a:solidFill>
                   <a:srgbClr val="23272E"/>
                 </a:solidFill>
@@ -7683,22 +8531,56 @@
                 <a:ea typeface="Calibri" pitchFamily="34" charset="-122"/>
                 <a:cs typeface="Calibri" pitchFamily="34" charset="-120"/>
               </a:rPr>
-              <a:t>The render loop is  for (o, s) in self.objects: o.intersectionTime(ray)  — ONE ray against MANY spheres.</a:t>
-            </a:r>
-            <a:endParaRPr lang="en-US" sz="1350" dirty="0"/>
-          </a:p>
-        </p:txBody>
-      </p:sp>
-      <p:sp>
-        <p:nvSpPr>
-          <p:cNvPr id="5" name="Text 3"/>
+              <a:t>Software optimization did not just make raytrace faster — it changed what raytrace is made of.</a:t>
+            </a:r>
+            <a:endParaRPr lang="en-US" sz="1500" dirty="0"/>
+          </a:p>
+        </p:txBody>
+      </p:sp>
+      <p:sp>
+        <p:nvSpPr>
+          <p:cNvPr id="5" name="Shape 3"/>
+          <p:cNvSpPr/>
+          <p:nvPr/>
+        </p:nvSpPr>
+        <p:spPr>
+          <a:xfrm>
+            <a:off x="594360" y="1965960"/>
+            <a:ext cx="5257800" cy="2286000"/>
+          </a:xfrm>
+          <a:prstGeom prst="roundRect">
+            <a:avLst>
+              <a:gd name="adj" fmla="val 2400"/>
+            </a:avLst>
+          </a:prstGeom>
+          <a:solidFill>
+            <a:srgbClr val="FFFFFF"/>
+          </a:solidFill>
+          <a:ln w="12700">
+            <a:solidFill>
+              <a:srgbClr val="E3E3DF"/>
+            </a:solidFill>
+            <a:prstDash val="solid"/>
+          </a:ln>
+          <a:effectLst>
+            <a:outerShdw sx="100000" sy="100000" kx="0" ky="0" algn="bl" rotWithShape="0" blurRad="76200" dist="12700" dir="5400000">
+              <a:srgbClr val="9A9A95">
+                <a:alpha val="18000"/>
+              </a:srgbClr>
+            </a:outerShdw>
+          </a:effectLst>
+        </p:spPr>
+      </p:sp>
+      <p:sp>
+        <p:nvSpPr>
+          <p:cNvPr id="6" name="Text 4"/>
           <p:cNvSpPr txBox="1"/>
           <p:nvPr/>
         </p:nvSpPr>
         <p:spPr>
           <a:xfrm>
-            <a:off x="594360" y="1691640"/>
-            <a:ext cx="10881360" cy="457200"/>
+            <a:off x="868680" y="2148840"/>
+            <a:ext cx="4663440" cy="274320"/>
           </a:xfrm>
           <a:prstGeom prst="rect">
             <a:avLst/>
@@ -7714,7 +8596,7 @@
               <a:buNone/>
             </a:pPr>
             <a:r>
-              <a:rPr lang="en-US" sz="1350" dirty="0">
+              <a:rPr lang="en-US" sz="1200" b="1" spc="100" kern="0" dirty="0">
                 <a:solidFill>
                   <a:srgbClr val="6B7280"/>
                 </a:solidFill>
@@ -7722,49 +8604,134 @@
                 <a:ea typeface="Calibri" pitchFamily="34" charset="-122"/>
                 <a:cs typeface="Calibri" pitchFamily="34" charset="-120"/>
               </a:rPr>
-              <a:t>So we hold the ray stationary in registers and stream spheres past it, one per cycle — the same weight-stationary dataflow the TPU uses. Ray operands are fetched once per ray instead of once per sphere.</a:t>
-            </a:r>
-            <a:endParaRPr lang="en-US" sz="1350" dirty="0"/>
-          </a:p>
-        </p:txBody>
-      </p:sp>
-      <p:sp>
-        <p:nvSpPr>
-          <p:cNvPr id="6" name="Shape 4"/>
+              <a:t>Sphere.intersectionTime</a:t>
+            </a:r>
+            <a:endParaRPr lang="en-US" sz="1200" dirty="0"/>
+          </a:p>
+        </p:txBody>
+      </p:sp>
+      <p:sp>
+        <p:nvSpPr>
+          <p:cNvPr id="7" name="Text 5"/>
+          <p:cNvSpPr txBox="1"/>
+          <p:nvPr/>
+        </p:nvSpPr>
+        <p:spPr>
+          <a:xfrm>
+            <a:off x="868680" y="2468880"/>
+            <a:ext cx="4663440" cy="640080"/>
+          </a:xfrm>
+          <a:prstGeom prst="rect">
+            <a:avLst/>
+          </a:prstGeom>
+          <a:noFill/>
+          <a:ln/>
+        </p:spPr>
+        <p:txBody>
+          <a:bodyPr wrap="square" lIns="0" tIns="0" rIns="0" bIns="0" rtlCol="0" anchor="ctr"/>
+          <a:lstStyle/>
+          <a:p>
+            <a:pPr indent="0" marL="0">
+              <a:buNone/>
+            </a:pPr>
+            <a:r>
+              <a:rPr lang="en-US" sz="2800" b="1" dirty="0">
+                <a:solidFill>
+                  <a:srgbClr val="E8552D"/>
+                </a:solidFill>
+                <a:latin typeface="Cambria" pitchFamily="34" charset="0"/>
+                <a:ea typeface="Cambria" pitchFamily="34" charset="-122"/>
+                <a:cs typeface="Cambria" pitchFamily="34" charset="-120"/>
+              </a:rPr>
+              <a:t>11.8 %   →   28.1 %</a:t>
+            </a:r>
+            <a:endParaRPr lang="en-US" sz="2800" dirty="0"/>
+          </a:p>
+        </p:txBody>
+      </p:sp>
+      <p:sp>
+        <p:nvSpPr>
+          <p:cNvPr id="8" name="Text 6"/>
+          <p:cNvSpPr txBox="1"/>
+          <p:nvPr/>
+        </p:nvSpPr>
+        <p:spPr>
+          <a:xfrm>
+            <a:off x="868680" y="3108960"/>
+            <a:ext cx="4663440" cy="914400"/>
+          </a:xfrm>
+          <a:prstGeom prst="rect">
+            <a:avLst/>
+          </a:prstGeom>
+          <a:noFill/>
+          <a:ln/>
+        </p:spPr>
+        <p:txBody>
+          <a:bodyPr wrap="square" lIns="0" tIns="0" rIns="0" bIns="0" rtlCol="0" anchor="ctr"/>
+          <a:lstStyle/>
+          <a:p>
+            <a:pPr indent="0" marL="0">
+              <a:buNone/>
+            </a:pPr>
+            <a:r>
+              <a:rPr lang="en-US" sz="1250" dirty="0">
+                <a:solidFill>
+                  <a:srgbClr val="23272E"/>
+                </a:solidFill>
+                <a:latin typeface="Calibri" pitchFamily="34" charset="0"/>
+                <a:ea typeface="Calibri" pitchFamily="34" charset="-122"/>
+                <a:cs typeface="Calibri" pitchFamily="34" charset="-120"/>
+              </a:rPr>
+              <a:t>of runtime, before → after. It is now the single largest consumer, at 179,457 calls per frame.</a:t>
+            </a:r>
+            <a:endParaRPr lang="en-US" sz="1250" dirty="0"/>
+          </a:p>
+        </p:txBody>
+      </p:sp>
+      <p:sp>
+        <p:nvSpPr>
+          <p:cNvPr id="9" name="Shape 7"/>
           <p:cNvSpPr/>
           <p:nvPr/>
         </p:nvSpPr>
         <p:spPr>
           <a:xfrm>
-            <a:off x="594360" y="2377440"/>
-            <a:ext cx="3017520" cy="2926080"/>
+            <a:off x="6309360" y="1965960"/>
+            <a:ext cx="5257800" cy="2286000"/>
           </a:xfrm>
           <a:prstGeom prst="roundRect">
             <a:avLst>
-              <a:gd name="adj" fmla="val 1875"/>
+              <a:gd name="adj" fmla="val 2400"/>
             </a:avLst>
           </a:prstGeom>
           <a:solidFill>
             <a:srgbClr val="FFFFFF"/>
           </a:solidFill>
-          <a:ln w="15875">
+          <a:ln w="12700">
             <a:solidFill>
-              <a:srgbClr val="C9CCD1"/>
+              <a:srgbClr val="E3E3DF"/>
             </a:solidFill>
             <a:prstDash val="solid"/>
           </a:ln>
-        </p:spPr>
-      </p:sp>
-      <p:sp>
-        <p:nvSpPr>
-          <p:cNvPr id="7" name="Text 5"/>
+          <a:effectLst>
+            <a:outerShdw sx="100000" sy="100000" kx="0" ky="0" algn="bl" rotWithShape="0" blurRad="76200" dist="12700" dir="5400000">
+              <a:srgbClr val="9A9A95">
+                <a:alpha val="18000"/>
+              </a:srgbClr>
+            </a:outerShdw>
+          </a:effectLst>
+        </p:spPr>
+      </p:sp>
+      <p:sp>
+        <p:nvSpPr>
+          <p:cNvPr id="10" name="Text 8"/>
           <p:cNvSpPr txBox="1"/>
           <p:nvPr/>
         </p:nvSpPr>
         <p:spPr>
           <a:xfrm>
-            <a:off x="777240" y="2542032"/>
-            <a:ext cx="2651760" cy="274320"/>
+            <a:off x="6583680" y="2148840"/>
+            <a:ext cx="4663440" cy="274320"/>
           </a:xfrm>
           <a:prstGeom prst="rect">
             <a:avLst/>
@@ -7780,7 +8747,7 @@
               <a:buNone/>
             </a:pPr>
             <a:r>
-              <a:rPr lang="en-US" sz="1100" b="1" spc="100" kern="0" dirty="0">
+              <a:rPr lang="en-US" sz="1200" b="1" spc="100" kern="0" dirty="0">
                 <a:solidFill>
                   <a:srgbClr val="6B7280"/>
                 </a:solidFill>
@@ -7788,22 +8755,22 @@
                 <a:ea typeface="Calibri" pitchFamily="34" charset="-122"/>
                 <a:cs typeface="Calibri" pitchFamily="34" charset="-120"/>
               </a:rPr>
-              <a:t>HOST  (CPython)</a:t>
-            </a:r>
-            <a:endParaRPr lang="en-US" sz="1100" dirty="0"/>
-          </a:p>
-        </p:txBody>
-      </p:sp>
-      <p:sp>
-        <p:nvSpPr>
-          <p:cNvPr id="8" name="Text 6"/>
+              <a:t>_PyEval_EvalFrameDefault</a:t>
+            </a:r>
+            <a:endParaRPr lang="en-US" sz="1200" dirty="0"/>
+          </a:p>
+        </p:txBody>
+      </p:sp>
+      <p:sp>
+        <p:nvSpPr>
+          <p:cNvPr id="11" name="Text 9"/>
           <p:cNvSpPr txBox="1"/>
           <p:nvPr/>
         </p:nvSpPr>
         <p:spPr>
           <a:xfrm>
-            <a:off x="777240" y="2880360"/>
-            <a:ext cx="2697480" cy="2194560"/>
+            <a:off x="6583680" y="2468880"/>
+            <a:ext cx="4663440" cy="640080"/>
           </a:xfrm>
           <a:prstGeom prst="rect">
             <a:avLst/>
@@ -7816,13 +8783,49 @@
           <a:lstStyle/>
           <a:p>
             <a:pPr indent="0" marL="0">
-              <a:lnSpc>
-                <a:spcPct val="125000"/>
-              </a:lnSpc>
-              <a:buNone/>
-            </a:pPr>
-            <a:r>
-              <a:rPr lang="en-US" sz="1150" dirty="0">
+              <a:buNone/>
+            </a:pPr>
+            <a:r>
+              <a:rPr lang="en-US" sz="2800" b="1" dirty="0">
+                <a:solidFill>
+                  <a:srgbClr val="2D9596"/>
+                </a:solidFill>
+                <a:latin typeface="Cambria" pitchFamily="34" charset="0"/>
+                <a:ea typeface="Cambria" pitchFamily="34" charset="-122"/>
+                <a:cs typeface="Cambria" pitchFamily="34" charset="-120"/>
+              </a:rPr>
+              <a:t>28.1 %   →   34.1 %</a:t>
+            </a:r>
+            <a:endParaRPr lang="en-US" sz="2800" dirty="0"/>
+          </a:p>
+        </p:txBody>
+      </p:sp>
+      <p:sp>
+        <p:nvSpPr>
+          <p:cNvPr id="12" name="Text 10"/>
+          <p:cNvSpPr txBox="1"/>
+          <p:nvPr/>
+        </p:nvSpPr>
+        <p:spPr>
+          <a:xfrm>
+            <a:off x="6583680" y="3108960"/>
+            <a:ext cx="4663440" cy="914400"/>
+          </a:xfrm>
+          <a:prstGeom prst="rect">
+            <a:avLst/>
+          </a:prstGeom>
+          <a:noFill/>
+          <a:ln/>
+        </p:spPr>
+        <p:txBody>
+          <a:bodyPr wrap="square" lIns="0" tIns="0" rIns="0" bIns="0" rtlCol="0" anchor="ctr"/>
+          <a:lstStyle/>
+          <a:p>
+            <a:pPr indent="0" marL="0">
+              <a:buNone/>
+            </a:pPr>
+            <a:r>
+              <a:rPr lang="en-US" sz="1250" dirty="0">
                 <a:solidFill>
                   <a:srgbClr val="23272E"/>
                 </a:solidFill>
@@ -7830,28 +8833,114 @@
                 <a:ea typeface="Calibri" pitchFamily="34" charset="-122"/>
                 <a:cs typeface="Calibri" pitchFamily="34" charset="-120"/>
               </a:rPr>
-              <a:t>Scene.rayColour</a:t>
-            </a:r>
-            <a:endParaRPr lang="en-US" sz="1150" dirty="0"/>
-          </a:p>
+              <a:t>of samples. Its absolute cost fell with everything else — but of what remains, a larger fraction is raw interpreter dispatch.</a:t>
+            </a:r>
+            <a:endParaRPr lang="en-US" sz="1250" dirty="0"/>
+          </a:p>
+        </p:txBody>
+      </p:sp>
+      <p:sp>
+        <p:nvSpPr>
+          <p:cNvPr id="13" name="Shape 11"/>
+          <p:cNvSpPr/>
+          <p:nvPr/>
+        </p:nvSpPr>
+        <p:spPr>
+          <a:xfrm>
+            <a:off x="594360" y="4480560"/>
+            <a:ext cx="10927080" cy="1371600"/>
+          </a:xfrm>
+          <a:prstGeom prst="roundRect">
+            <a:avLst>
+              <a:gd name="adj" fmla="val 4000"/>
+            </a:avLst>
+          </a:prstGeom>
+          <a:solidFill>
+            <a:srgbClr val="FDF1EC"/>
+          </a:solidFill>
+          <a:ln w="12700">
+            <a:solidFill>
+              <a:srgbClr val="E3E3DF"/>
+            </a:solidFill>
+            <a:prstDash val="solid"/>
+          </a:ln>
+          <a:effectLst>
+            <a:outerShdw sx="100000" sy="100000" kx="0" ky="0" algn="bl" rotWithShape="0" blurRad="76200" dist="12700" dir="5400000">
+              <a:srgbClr val="9A9A95">
+                <a:alpha val="18000"/>
+              </a:srgbClr>
+            </a:outerShdw>
+          </a:effectLst>
+        </p:spPr>
+      </p:sp>
+      <p:sp>
+        <p:nvSpPr>
+          <p:cNvPr id="14" name="Text 12"/>
+          <p:cNvSpPr txBox="1"/>
+          <p:nvPr/>
+        </p:nvSpPr>
+        <p:spPr>
+          <a:xfrm>
+            <a:off x="914400" y="4663440"/>
+            <a:ext cx="10241280" cy="320040"/>
+          </a:xfrm>
+          <a:prstGeom prst="rect">
+            <a:avLst/>
+          </a:prstGeom>
+          <a:noFill/>
+          <a:ln/>
+        </p:spPr>
+        <p:txBody>
+          <a:bodyPr wrap="square" lIns="0" tIns="0" rIns="0" bIns="0" rtlCol="0" anchor="ctr"/>
+          <a:lstStyle/>
+          <a:p>
+            <a:pPr indent="0" marL="0">
+              <a:buNone/>
+            </a:pPr>
+            <a:r>
+              <a:rPr lang="en-US" sz="1700" b="1" dirty="0">
+                <a:solidFill>
+                  <a:srgbClr val="23272E"/>
+                </a:solidFill>
+                <a:latin typeface="Cambria" pitchFamily="34" charset="0"/>
+                <a:ea typeface="Cambria" pitchFamily="34" charset="-122"/>
+                <a:cs typeface="Cambria" pitchFamily="34" charset="-120"/>
+              </a:rPr>
+              <a:t>Once the removable software overhead is gone, what is left is irreducible in software.</a:t>
+            </a:r>
+            <a:endParaRPr lang="en-US" sz="1700" dirty="0"/>
+          </a:p>
+        </p:txBody>
+      </p:sp>
+      <p:sp>
+        <p:nvSpPr>
+          <p:cNvPr id="15" name="Text 13"/>
+          <p:cNvSpPr txBox="1"/>
+          <p:nvPr/>
+        </p:nvSpPr>
+        <p:spPr>
+          <a:xfrm>
+            <a:off x="914400" y="5029200"/>
+            <a:ext cx="10241280" cy="640080"/>
+          </a:xfrm>
+          <a:prstGeom prst="rect">
+            <a:avLst/>
+          </a:prstGeom>
+          <a:noFill/>
+          <a:ln/>
+        </p:spPr>
+        <p:txBody>
+          <a:bodyPr wrap="square" lIns="0" tIns="0" rIns="0" bIns="0" rtlCol="0" anchor="ctr"/>
+          <a:lstStyle/>
           <a:p>
             <a:pPr indent="0" marL="0">
               <a:lnSpc>
-                <a:spcPct val="125000"/>
+                <a:spcPct val="115000"/>
               </a:lnSpc>
               <a:buNone/>
             </a:pPr>
-            <a:endParaRPr lang="en-US" sz="1150" dirty="0"/>
-          </a:p>
-          <a:p>
-            <a:pPr indent="0" marL="0">
-              <a:lnSpc>
-                <a:spcPct val="125000"/>
-              </a:lnSpc>
-              <a:buNone/>
-            </a:pPr>
-            <a:r>
-              <a:rPr lang="en-US" sz="1150" dirty="0">
+            <a:r>
+              <a:rPr lang="en-US" sz="1350" dirty="0">
                 <a:solidFill>
                   <a:srgbClr val="23272E"/>
                 </a:solidFill>
@@ -7859,781 +8948,9 @@
                 <a:ea typeface="Calibri" pitchFamily="34" charset="-122"/>
                 <a:cs typeface="Calibri" pitchFamily="34" charset="-120"/>
               </a:rPr>
-              <a:t>① set_ray()  → MMIO BAR0</a:t>
-            </a:r>
-            <a:endParaRPr lang="en-US" sz="1150" dirty="0"/>
-          </a:p>
-          <a:p>
-            <a:pPr indent="0" marL="0">
-              <a:lnSpc>
-                <a:spcPct val="125000"/>
-              </a:lnSpc>
-              <a:buNone/>
-            </a:pPr>
-            <a:r>
-              <a:rPr lang="en-US" sz="1150" dirty="0">
-                <a:solidFill>
-                  <a:srgbClr val="23272E"/>
-                </a:solidFill>
-                <a:latin typeface="Calibri" pitchFamily="34" charset="0"/>
-                <a:ea typeface="Calibri" pitchFamily="34" charset="-122"/>
-                <a:cs typeface="Calibri" pitchFamily="34" charset="-120"/>
-              </a:rPr>
-              <a:t>② spheres    → DMA</a:t>
-            </a:r>
-            <a:endParaRPr lang="en-US" sz="1150" dirty="0"/>
-          </a:p>
-          <a:p>
-            <a:pPr indent="0" marL="0">
-              <a:lnSpc>
-                <a:spcPct val="125000"/>
-              </a:lnSpc>
-              <a:buNone/>
-            </a:pPr>
-            <a:r>
-              <a:rPr lang="en-US" sz="1150" dirty="0">
-                <a:solidFill>
-                  <a:srgbClr val="23272E"/>
-                </a:solidFill>
-                <a:latin typeface="Calibri" pitchFamily="34" charset="0"/>
-                <a:ea typeface="Calibri" pitchFamily="34" charset="-122"/>
-                <a:cs typeface="Calibri" pitchFamily="34" charset="-120"/>
-              </a:rPr>
-              <a:t>③ doorbell   → GO bit</a:t>
-            </a:r>
-            <a:endParaRPr lang="en-US" sz="1150" dirty="0"/>
-          </a:p>
-          <a:p>
-            <a:pPr indent="0" marL="0">
-              <a:lnSpc>
-                <a:spcPct val="125000"/>
-              </a:lnSpc>
-              <a:buNone/>
-            </a:pPr>
-            <a:r>
-              <a:rPr lang="en-US" sz="1150" dirty="0">
-                <a:solidFill>
-                  <a:srgbClr val="23272E"/>
-                </a:solidFill>
-                <a:latin typeface="Calibri" pitchFamily="34" charset="0"/>
-                <a:ea typeface="Calibri" pitchFamily="34" charset="-122"/>
-                <a:cs typeface="Calibri" pitchFamily="34" charset="-120"/>
-              </a:rPr>
-              <a:t>④ results    ← DMA</a:t>
-            </a:r>
-            <a:endParaRPr lang="en-US" sz="1150" dirty="0"/>
-          </a:p>
-          <a:p>
-            <a:pPr indent="0" marL="0">
-              <a:lnSpc>
-                <a:spcPct val="125000"/>
-              </a:lnSpc>
-              <a:buNone/>
-            </a:pPr>
-            <a:r>
-              <a:rPr lang="en-US" sz="1150" dirty="0">
-                <a:solidFill>
-                  <a:srgbClr val="23272E"/>
-                </a:solidFill>
-                <a:latin typeface="Calibri" pitchFamily="34" charset="0"/>
-                <a:ea typeface="Calibri" pitchFamily="34" charset="-122"/>
-                <a:cs typeface="Calibri" pitchFamily="34" charset="-120"/>
-              </a:rPr>
-              <a:t>⑤ poll done  ← MMIO</a:t>
-            </a:r>
-            <a:endParaRPr lang="en-US" sz="1150" dirty="0"/>
-          </a:p>
-        </p:txBody>
-      </p:sp>
-      <p:sp>
-        <p:nvSpPr>
-          <p:cNvPr id="9" name="Shape 7"/>
-          <p:cNvSpPr/>
-          <p:nvPr/>
-        </p:nvSpPr>
-        <p:spPr>
-          <a:xfrm>
-            <a:off x="3703320" y="3657600"/>
-            <a:ext cx="777240" cy="384048"/>
-          </a:xfrm>
-          <a:prstGeom prst="rightArrow">
-            <a:avLst/>
-          </a:prstGeom>
-          <a:solidFill>
-            <a:srgbClr val="2D9596"/>
-          </a:solidFill>
-          <a:ln/>
-        </p:spPr>
-      </p:sp>
-      <p:sp>
-        <p:nvSpPr>
-          <p:cNvPr id="10" name="Text 8"/>
-          <p:cNvSpPr txBox="1"/>
-          <p:nvPr/>
-        </p:nvSpPr>
-        <p:spPr>
-          <a:xfrm>
-            <a:off x="3657600" y="3310128"/>
-            <a:ext cx="868680" cy="274320"/>
-          </a:xfrm>
-          <a:prstGeom prst="rect">
-            <a:avLst/>
-          </a:prstGeom>
-          <a:noFill/>
-          <a:ln/>
-        </p:spPr>
-        <p:txBody>
-          <a:bodyPr wrap="square" lIns="0" tIns="0" rIns="0" bIns="0" rtlCol="0" anchor="ctr"/>
-          <a:lstStyle/>
-          <a:p>
-            <a:pPr algn="ctr" indent="0" marL="0">
-              <a:buNone/>
-            </a:pPr>
-            <a:r>
-              <a:rPr lang="en-US" sz="1000" b="1" dirty="0">
-                <a:solidFill>
-                  <a:srgbClr val="2D9596"/>
-                </a:solidFill>
-                <a:latin typeface="Calibri" pitchFamily="34" charset="0"/>
-                <a:ea typeface="Calibri" pitchFamily="34" charset="-122"/>
-                <a:cs typeface="Calibri" pitchFamily="34" charset="-120"/>
-              </a:rPr>
-              <a:t>PCIe</a:t>
-            </a:r>
-            <a:endParaRPr lang="en-US" sz="1000" dirty="0"/>
-          </a:p>
-        </p:txBody>
-      </p:sp>
-      <p:sp>
-        <p:nvSpPr>
-          <p:cNvPr id="11" name="Shape 9"/>
-          <p:cNvSpPr/>
-          <p:nvPr/>
-        </p:nvSpPr>
-        <p:spPr>
-          <a:xfrm>
-            <a:off x="4617720" y="2377440"/>
-            <a:ext cx="6949440" cy="2926080"/>
-          </a:xfrm>
-          <a:prstGeom prst="roundRect">
-            <a:avLst>
-              <a:gd name="adj" fmla="val 1875"/>
-            </a:avLst>
-          </a:prstGeom>
-          <a:solidFill>
-            <a:srgbClr val="EAF5F5"/>
-          </a:solidFill>
-          <a:ln w="15875">
-            <a:solidFill>
-              <a:srgbClr val="2D9596"/>
-            </a:solidFill>
-            <a:prstDash val="solid"/>
-          </a:ln>
-        </p:spPr>
-      </p:sp>
-      <p:sp>
-        <p:nvSpPr>
-          <p:cNvPr id="12" name="Text 10"/>
-          <p:cNvSpPr txBox="1"/>
-          <p:nvPr/>
-        </p:nvSpPr>
-        <p:spPr>
-          <a:xfrm>
-            <a:off x="4800600" y="2542032"/>
-            <a:ext cx="3657600" cy="274320"/>
-          </a:xfrm>
-          <a:prstGeom prst="rect">
-            <a:avLst/>
-          </a:prstGeom>
-          <a:noFill/>
-          <a:ln/>
-        </p:spPr>
-        <p:txBody>
-          <a:bodyPr wrap="square" lIns="0" tIns="0" rIns="0" bIns="0" rtlCol="0" anchor="ctr"/>
-          <a:lstStyle/>
-          <a:p>
-            <a:pPr indent="0" marL="0">
-              <a:buNone/>
-            </a:pPr>
-            <a:r>
-              <a:rPr lang="en-US" sz="1100" b="1" spc="100" kern="0" dirty="0">
-                <a:solidFill>
-                  <a:srgbClr val="2D9596"/>
-                </a:solidFill>
-                <a:latin typeface="Calibri" pitchFamily="34" charset="0"/>
-                <a:ea typeface="Calibri" pitchFamily="34" charset="-122"/>
-                <a:cs typeface="Calibri" pitchFamily="34" charset="-120"/>
-              </a:rPr>
-              <a:t>RSIU ACCELERATOR</a:t>
-            </a:r>
-            <a:endParaRPr lang="en-US" sz="1100" dirty="0"/>
-          </a:p>
-        </p:txBody>
-      </p:sp>
-      <p:sp>
-        <p:nvSpPr>
-          <p:cNvPr id="13" name="Shape 11"/>
-          <p:cNvSpPr/>
-          <p:nvPr/>
-        </p:nvSpPr>
-        <p:spPr>
-          <a:xfrm>
-            <a:off x="4846320" y="2880360"/>
-            <a:ext cx="6492240" cy="256032"/>
-          </a:xfrm>
-          <a:prstGeom prst="roundRect">
-            <a:avLst>
-              <a:gd name="adj" fmla="val 10714"/>
-            </a:avLst>
-          </a:prstGeom>
-          <a:solidFill>
-            <a:srgbClr val="D6EBEB"/>
-          </a:solidFill>
-          <a:ln w="9525">
-            <a:solidFill>
-              <a:srgbClr val="BBD8D8"/>
-            </a:solidFill>
-            <a:prstDash val="solid"/>
-          </a:ln>
-        </p:spPr>
-      </p:sp>
-      <p:sp>
-        <p:nvSpPr>
-          <p:cNvPr id="14" name="Text 12"/>
-          <p:cNvSpPr txBox="1"/>
-          <p:nvPr/>
-        </p:nvSpPr>
-        <p:spPr>
-          <a:xfrm>
-            <a:off x="4983480" y="2880360"/>
-            <a:ext cx="6217920" cy="256032"/>
-          </a:xfrm>
-          <a:prstGeom prst="rect">
-            <a:avLst/>
-          </a:prstGeom>
-          <a:noFill/>
-          <a:ln/>
-        </p:spPr>
-        <p:txBody>
-          <a:bodyPr wrap="square" lIns="0" tIns="0" rIns="0" bIns="0" rtlCol="0" anchor="ctr"/>
-          <a:lstStyle/>
-          <a:p>
-            <a:pPr indent="0" marL="0">
-              <a:buNone/>
-            </a:pPr>
-            <a:r>
-              <a:rPr lang="en-US" sz="1000" dirty="0">
-                <a:solidFill>
-                  <a:srgbClr val="23272E"/>
-                </a:solidFill>
-                <a:latin typeface="Courier New" pitchFamily="34" charset="0"/>
-                <a:ea typeface="Courier New" pitchFamily="34" charset="-122"/>
-                <a:cs typeface="Courier New" pitchFamily="34" charset="-120"/>
-              </a:rPr>
-              <a:t>Ray registers (stationary)</a:t>
-            </a:r>
-            <a:endParaRPr lang="en-US" sz="1000" dirty="0"/>
-          </a:p>
-        </p:txBody>
-      </p:sp>
-      <p:sp>
-        <p:nvSpPr>
-          <p:cNvPr id="15" name="Shape 13"/>
-          <p:cNvSpPr/>
-          <p:nvPr/>
-        </p:nvSpPr>
-        <p:spPr>
-          <a:xfrm>
-            <a:off x="4846320" y="3177540"/>
-            <a:ext cx="6492240" cy="256032"/>
-          </a:xfrm>
-          <a:prstGeom prst="roundRect">
-            <a:avLst>
-              <a:gd name="adj" fmla="val 10714"/>
-            </a:avLst>
-          </a:prstGeom>
-          <a:solidFill>
-            <a:srgbClr val="D6EBEB"/>
-          </a:solidFill>
-          <a:ln w="9525">
-            <a:solidFill>
-              <a:srgbClr val="BBD8D8"/>
-            </a:solidFill>
-            <a:prstDash val="solid"/>
-          </a:ln>
-        </p:spPr>
-      </p:sp>
-      <p:sp>
-        <p:nvSpPr>
-          <p:cNvPr id="16" name="Text 14"/>
-          <p:cNvSpPr txBox="1"/>
-          <p:nvPr/>
-        </p:nvSpPr>
-        <p:spPr>
-          <a:xfrm>
-            <a:off x="4983480" y="3177540"/>
-            <a:ext cx="6217920" cy="256032"/>
-          </a:xfrm>
-          <a:prstGeom prst="rect">
-            <a:avLst/>
-          </a:prstGeom>
-          <a:noFill/>
-          <a:ln/>
-        </p:spPr>
-        <p:txBody>
-          <a:bodyPr wrap="square" lIns="0" tIns="0" rIns="0" bIns="0" rtlCol="0" anchor="ctr"/>
-          <a:lstStyle/>
-          <a:p>
-            <a:pPr indent="0" marL="0">
-              <a:buNone/>
-            </a:pPr>
-            <a:r>
-              <a:rPr lang="en-US" sz="1000" dirty="0">
-                <a:solidFill>
-                  <a:srgbClr val="23272E"/>
-                </a:solidFill>
-                <a:latin typeface="Courier New" pitchFamily="34" charset="0"/>
-                <a:ea typeface="Courier New" pitchFamily="34" charset="-122"/>
-                <a:cs typeface="Courier New" pitchFamily="34" charset="-120"/>
-              </a:rPr>
-              <a:t>Sphere FIFO — 32 deep</a:t>
-            </a:r>
-            <a:endParaRPr lang="en-US" sz="1000" dirty="0"/>
-          </a:p>
-        </p:txBody>
-      </p:sp>
-      <p:sp>
-        <p:nvSpPr>
-          <p:cNvPr id="17" name="Shape 15"/>
-          <p:cNvSpPr/>
-          <p:nvPr/>
-        </p:nvSpPr>
-        <p:spPr>
-          <a:xfrm>
-            <a:off x="4846320" y="3474720"/>
-            <a:ext cx="6492240" cy="256032"/>
-          </a:xfrm>
-          <a:prstGeom prst="roundRect">
-            <a:avLst>
-              <a:gd name="adj" fmla="val 10714"/>
-            </a:avLst>
-          </a:prstGeom>
-          <a:solidFill>
-            <a:srgbClr val="FFFFFF"/>
-          </a:solidFill>
-          <a:ln w="9525">
-            <a:solidFill>
-              <a:srgbClr val="BBD8D8"/>
-            </a:solidFill>
-            <a:prstDash val="solid"/>
-          </a:ln>
-        </p:spPr>
-      </p:sp>
-      <p:sp>
-        <p:nvSpPr>
-          <p:cNvPr id="18" name="Text 16"/>
-          <p:cNvSpPr txBox="1"/>
-          <p:nvPr/>
-        </p:nvSpPr>
-        <p:spPr>
-          <a:xfrm>
-            <a:off x="4983480" y="3474720"/>
-            <a:ext cx="6217920" cy="256032"/>
-          </a:xfrm>
-          <a:prstGeom prst="rect">
-            <a:avLst/>
-          </a:prstGeom>
-          <a:noFill/>
-          <a:ln/>
-        </p:spPr>
-        <p:txBody>
-          <a:bodyPr wrap="square" lIns="0" tIns="0" rIns="0" bIns="0" rtlCol="0" anchor="ctr"/>
-          <a:lstStyle/>
-          <a:p>
-            <a:pPr indent="0" marL="0">
-              <a:buNone/>
-            </a:pPr>
-            <a:r>
-              <a:rPr lang="en-US" sz="1000" dirty="0">
-                <a:solidFill>
-                  <a:srgbClr val="23272E"/>
-                </a:solidFill>
-                <a:latin typeface="Courier New" pitchFamily="34" charset="0"/>
-                <a:ea typeface="Courier New" pitchFamily="34" charset="-122"/>
-                <a:cs typeface="Courier New" pitchFamily="34" charset="-120"/>
-              </a:rPr>
-              <a:t>S1  cp = C − P            3 sub</a:t>
-            </a:r>
-            <a:endParaRPr lang="en-US" sz="1000" dirty="0"/>
-          </a:p>
-        </p:txBody>
-      </p:sp>
-      <p:sp>
-        <p:nvSpPr>
-          <p:cNvPr id="19" name="Shape 17"/>
-          <p:cNvSpPr/>
-          <p:nvPr/>
-        </p:nvSpPr>
-        <p:spPr>
-          <a:xfrm>
-            <a:off x="4846320" y="3771900"/>
-            <a:ext cx="6492240" cy="256032"/>
-          </a:xfrm>
-          <a:prstGeom prst="roundRect">
-            <a:avLst>
-              <a:gd name="adj" fmla="val 10714"/>
-            </a:avLst>
-          </a:prstGeom>
-          <a:solidFill>
-            <a:srgbClr val="FFFFFF"/>
-          </a:solidFill>
-          <a:ln w="9525">
-            <a:solidFill>
-              <a:srgbClr val="BBD8D8"/>
-            </a:solidFill>
-            <a:prstDash val="solid"/>
-          </a:ln>
-        </p:spPr>
-      </p:sp>
-      <p:sp>
-        <p:nvSpPr>
-          <p:cNvPr id="20" name="Text 18"/>
-          <p:cNvSpPr txBox="1"/>
-          <p:nvPr/>
-        </p:nvSpPr>
-        <p:spPr>
-          <a:xfrm>
-            <a:off x="4983480" y="3771900"/>
-            <a:ext cx="6217920" cy="256032"/>
-          </a:xfrm>
-          <a:prstGeom prst="rect">
-            <a:avLst/>
-          </a:prstGeom>
-          <a:noFill/>
-          <a:ln/>
-        </p:spPr>
-        <p:txBody>
-          <a:bodyPr wrap="square" lIns="0" tIns="0" rIns="0" bIns="0" rtlCol="0" anchor="ctr"/>
-          <a:lstStyle/>
-          <a:p>
-            <a:pPr indent="0" marL="0">
-              <a:buNone/>
-            </a:pPr>
-            <a:r>
-              <a:rPr lang="en-US" sz="1000" dirty="0">
-                <a:solidFill>
-                  <a:srgbClr val="23272E"/>
-                </a:solidFill>
-                <a:latin typeface="Courier New" pitchFamily="34" charset="0"/>
-                <a:ea typeface="Courier New" pitchFamily="34" charset="-122"/>
-                <a:cs typeface="Courier New" pitchFamily="34" charset="-120"/>
-              </a:rPr>
-              <a:t>S2  8 × multiply</a:t>
-            </a:r>
-            <a:endParaRPr lang="en-US" sz="1000" dirty="0"/>
-          </a:p>
-        </p:txBody>
-      </p:sp>
-      <p:sp>
-        <p:nvSpPr>
-          <p:cNvPr id="21" name="Shape 19"/>
-          <p:cNvSpPr/>
-          <p:nvPr/>
-        </p:nvSpPr>
-        <p:spPr>
-          <a:xfrm>
-            <a:off x="4846320" y="4069080"/>
-            <a:ext cx="6492240" cy="256032"/>
-          </a:xfrm>
-          <a:prstGeom prst="roundRect">
-            <a:avLst>
-              <a:gd name="adj" fmla="val 10714"/>
-            </a:avLst>
-          </a:prstGeom>
-          <a:solidFill>
-            <a:srgbClr val="FFFFFF"/>
-          </a:solidFill>
-          <a:ln w="9525">
-            <a:solidFill>
-              <a:srgbClr val="BBD8D8"/>
-            </a:solidFill>
-            <a:prstDash val="solid"/>
-          </a:ln>
-        </p:spPr>
-      </p:sp>
-      <p:sp>
-        <p:nvSpPr>
-          <p:cNvPr id="22" name="Text 20"/>
-          <p:cNvSpPr txBox="1"/>
-          <p:nvPr/>
-        </p:nvSpPr>
-        <p:spPr>
-          <a:xfrm>
-            <a:off x="4983480" y="4069080"/>
-            <a:ext cx="6217920" cy="256032"/>
-          </a:xfrm>
-          <a:prstGeom prst="rect">
-            <a:avLst/>
-          </a:prstGeom>
-          <a:noFill/>
-          <a:ln/>
-        </p:spPr>
-        <p:txBody>
-          <a:bodyPr wrap="square" lIns="0" tIns="0" rIns="0" bIns="0" rtlCol="0" anchor="ctr"/>
-          <a:lstStyle/>
-          <a:p>
-            <a:pPr indent="0" marL="0">
-              <a:buNone/>
-            </a:pPr>
-            <a:r>
-              <a:rPr lang="en-US" sz="1000" dirty="0">
-                <a:solidFill>
-                  <a:srgbClr val="23272E"/>
-                </a:solidFill>
-                <a:latin typeface="Courier New" pitchFamily="34" charset="0"/>
-                <a:ea typeface="Courier New" pitchFamily="34" charset="-122"/>
-                <a:cs typeface="Courier New" pitchFamily="34" charset="-120"/>
-              </a:rPr>
-              <a:t>S3  adder trees (Q32.32)</a:t>
-            </a:r>
-            <a:endParaRPr lang="en-US" sz="1000" dirty="0"/>
-          </a:p>
-        </p:txBody>
-      </p:sp>
-      <p:sp>
-        <p:nvSpPr>
-          <p:cNvPr id="23" name="Shape 21"/>
-          <p:cNvSpPr/>
-          <p:nvPr/>
-        </p:nvSpPr>
-        <p:spPr>
-          <a:xfrm>
-            <a:off x="4846320" y="4366260"/>
-            <a:ext cx="6492240" cy="256032"/>
-          </a:xfrm>
-          <a:prstGeom prst="roundRect">
-            <a:avLst>
-              <a:gd name="adj" fmla="val 10714"/>
-            </a:avLst>
-          </a:prstGeom>
-          <a:solidFill>
-            <a:srgbClr val="FFFFFF"/>
-          </a:solidFill>
-          <a:ln w="9525">
-            <a:solidFill>
-              <a:srgbClr val="BBD8D8"/>
-            </a:solidFill>
-            <a:prstDash val="solid"/>
-          </a:ln>
-        </p:spPr>
-      </p:sp>
-      <p:sp>
-        <p:nvSpPr>
-          <p:cNvPr id="24" name="Text 22"/>
-          <p:cNvSpPr txBox="1"/>
-          <p:nvPr/>
-        </p:nvSpPr>
-        <p:spPr>
-          <a:xfrm>
-            <a:off x="4983480" y="4366260"/>
-            <a:ext cx="6217920" cy="256032"/>
-          </a:xfrm>
-          <a:prstGeom prst="rect">
-            <a:avLst/>
-          </a:prstGeom>
-          <a:noFill/>
-          <a:ln/>
-        </p:spPr>
-        <p:txBody>
-          <a:bodyPr wrap="square" lIns="0" tIns="0" rIns="0" bIns="0" rtlCol="0" anchor="ctr"/>
-          <a:lstStyle/>
-          <a:p>
-            <a:pPr indent="0" marL="0">
-              <a:buNone/>
-            </a:pPr>
-            <a:r>
-              <a:rPr lang="en-US" sz="1000" dirty="0">
-                <a:solidFill>
-                  <a:srgbClr val="23272E"/>
-                </a:solidFill>
-                <a:latin typeface="Courier New" pitchFamily="34" charset="0"/>
-                <a:ea typeface="Courier New" pitchFamily="34" charset="-122"/>
-                <a:cs typeface="Courier New" pitchFamily="34" charset="-120"/>
-              </a:rPr>
-              <a:t>S4  disc + hit test</a:t>
-            </a:r>
-            <a:endParaRPr lang="en-US" sz="1000" dirty="0"/>
-          </a:p>
-        </p:txBody>
-      </p:sp>
-      <p:sp>
-        <p:nvSpPr>
-          <p:cNvPr id="25" name="Shape 23"/>
-          <p:cNvSpPr/>
-          <p:nvPr/>
-        </p:nvSpPr>
-        <p:spPr>
-          <a:xfrm>
-            <a:off x="4846320" y="4663440"/>
-            <a:ext cx="6492240" cy="256032"/>
-          </a:xfrm>
-          <a:prstGeom prst="roundRect">
-            <a:avLst>
-              <a:gd name="adj" fmla="val 10714"/>
-            </a:avLst>
-          </a:prstGeom>
-          <a:solidFill>
-            <a:srgbClr val="FFFFFF"/>
-          </a:solidFill>
-          <a:ln w="9525">
-            <a:solidFill>
-              <a:srgbClr val="BBD8D8"/>
-            </a:solidFill>
-            <a:prstDash val="solid"/>
-          </a:ln>
-        </p:spPr>
-      </p:sp>
-      <p:sp>
-        <p:nvSpPr>
-          <p:cNvPr id="26" name="Text 24"/>
-          <p:cNvSpPr txBox="1"/>
-          <p:nvPr/>
-        </p:nvSpPr>
-        <p:spPr>
-          <a:xfrm>
-            <a:off x="4983480" y="4663440"/>
-            <a:ext cx="6217920" cy="256032"/>
-          </a:xfrm>
-          <a:prstGeom prst="rect">
-            <a:avLst/>
-          </a:prstGeom>
-          <a:noFill/>
-          <a:ln/>
-        </p:spPr>
-        <p:txBody>
-          <a:bodyPr wrap="square" lIns="0" tIns="0" rIns="0" bIns="0" rtlCol="0" anchor="ctr"/>
-          <a:lstStyle/>
-          <a:p>
-            <a:pPr indent="0" marL="0">
-              <a:buNone/>
-            </a:pPr>
-            <a:r>
-              <a:rPr lang="en-US" sz="1000" dirty="0">
-                <a:solidFill>
-                  <a:srgbClr val="23272E"/>
-                </a:solidFill>
-                <a:latin typeface="Courier New" pitchFamily="34" charset="0"/>
-                <a:ea typeface="Courier New" pitchFamily="34" charset="-122"/>
-                <a:cs typeface="Courier New" pitchFamily="34" charset="-120"/>
-              </a:rPr>
-              <a:t>S5–S28  pipelined sqrt</a:t>
-            </a:r>
-            <a:endParaRPr lang="en-US" sz="1000" dirty="0"/>
-          </a:p>
-        </p:txBody>
-      </p:sp>
-      <p:sp>
-        <p:nvSpPr>
-          <p:cNvPr id="27" name="Shape 25"/>
-          <p:cNvSpPr/>
-          <p:nvPr/>
-        </p:nvSpPr>
-        <p:spPr>
-          <a:xfrm>
-            <a:off x="4846320" y="4960620"/>
-            <a:ext cx="6492240" cy="256032"/>
-          </a:xfrm>
-          <a:prstGeom prst="roundRect">
-            <a:avLst>
-              <a:gd name="adj" fmla="val 10714"/>
-            </a:avLst>
-          </a:prstGeom>
-          <a:solidFill>
-            <a:srgbClr val="FFFFFF"/>
-          </a:solidFill>
-          <a:ln w="9525">
-            <a:solidFill>
-              <a:srgbClr val="BBD8D8"/>
-            </a:solidFill>
-            <a:prstDash val="solid"/>
-          </a:ln>
-        </p:spPr>
-      </p:sp>
-      <p:sp>
-        <p:nvSpPr>
-          <p:cNvPr id="28" name="Text 26"/>
-          <p:cNvSpPr txBox="1"/>
-          <p:nvPr/>
-        </p:nvSpPr>
-        <p:spPr>
-          <a:xfrm>
-            <a:off x="4983480" y="4960620"/>
-            <a:ext cx="6217920" cy="256032"/>
-          </a:xfrm>
-          <a:prstGeom prst="rect">
-            <a:avLst/>
-          </a:prstGeom>
-          <a:noFill/>
-          <a:ln/>
-        </p:spPr>
-        <p:txBody>
-          <a:bodyPr wrap="square" lIns="0" tIns="0" rIns="0" bIns="0" rtlCol="0" anchor="ctr"/>
-          <a:lstStyle/>
-          <a:p>
-            <a:pPr indent="0" marL="0">
-              <a:buNone/>
-            </a:pPr>
-            <a:r>
-              <a:rPr lang="en-US" sz="1000" dirty="0">
-                <a:solidFill>
-                  <a:srgbClr val="23272E"/>
-                </a:solidFill>
-                <a:latin typeface="Courier New" pitchFamily="34" charset="0"/>
-                <a:ea typeface="Courier New" pitchFamily="34" charset="-122"/>
-                <a:cs typeface="Courier New" pitchFamily="34" charset="-120"/>
-              </a:rPr>
-              <a:t>S29  t = v − √disc</a:t>
-            </a:r>
-            <a:endParaRPr lang="en-US" sz="1000" dirty="0"/>
-          </a:p>
-        </p:txBody>
-      </p:sp>
-      <p:sp>
-        <p:nvSpPr>
-          <p:cNvPr id="29" name="Text 27"/>
-          <p:cNvSpPr txBox="1"/>
-          <p:nvPr/>
-        </p:nvSpPr>
-        <p:spPr>
-          <a:xfrm>
-            <a:off x="594360" y="5486400"/>
-            <a:ext cx="10881360" cy="548640"/>
-          </a:xfrm>
-          <a:prstGeom prst="rect">
-            <a:avLst/>
-          </a:prstGeom>
-          <a:noFill/>
-          <a:ln/>
-        </p:spPr>
-        <p:txBody>
-          <a:bodyPr wrap="square" lIns="0" tIns="0" rIns="0" bIns="0" rtlCol="0" anchor="ctr"/>
-          <a:lstStyle/>
-          <a:p>
-            <a:pPr indent="0" marL="0">
-              <a:buNone/>
-            </a:pPr>
-            <a:r>
-              <a:rPr lang="en-US" sz="1250" dirty="0">
-                <a:solidFill>
-                  <a:srgbClr val="23272E"/>
-                </a:solidFill>
-                <a:latin typeface="Calibri" pitchFamily="34" charset="0"/>
-                <a:ea typeface="Calibri" pitchFamily="34" charset="-122"/>
-                <a:cs typeface="Calibri" pitchFamily="34" charset="-120"/>
-              </a:rPr>
-              <a:t>No FSM · no stalls · no branches — a miss is a flag on the result, not a branch.  Little's Law: λ=1/cycle × W=30 cycles ⇒ 30 in flight, so the FIFOs are 32 deep.</a:t>
-            </a:r>
-            <a:endParaRPr lang="en-US" sz="1250" dirty="0"/>
+              <a:t>That residue is fixed-shape, control-free arithmetic executed 179,457 times per frame — which is precisely the shape of problem a small fixed-function accelerator is good at. This is where hardware earns its place, and not before.</a:t>
+            </a:r>
+            <a:endParaRPr lang="en-US" sz="1350" dirty="0"/>
           </a:p>
         </p:txBody>
       </p:sp>
@@ -8702,6 +9019,1103 @@
                 <a:ea typeface="Calibri" pitchFamily="34" charset="-122"/>
                 <a:cs typeface="Calibri" pitchFamily="34" charset="-120"/>
               </a:rPr>
+              <a:t>THE ACCELERATOR</a:t>
+            </a:r>
+            <a:endParaRPr lang="en-US" sz="1100" dirty="0"/>
+          </a:p>
+        </p:txBody>
+      </p:sp>
+      <p:sp>
+        <p:nvSpPr>
+          <p:cNvPr id="3" name="Text 1"/>
+          <p:cNvSpPr txBox="1"/>
+          <p:nvPr/>
+        </p:nvSpPr>
+        <p:spPr>
+          <a:xfrm>
+            <a:off x="594360" y="566928"/>
+            <a:ext cx="10972800" cy="640080"/>
+          </a:xfrm>
+          <a:prstGeom prst="rect">
+            <a:avLst/>
+          </a:prstGeom>
+          <a:noFill/>
+          <a:ln/>
+        </p:spPr>
+        <p:txBody>
+          <a:bodyPr wrap="square" lIns="0" tIns="0" rIns="0" bIns="0" rtlCol="0" anchor="ctr"/>
+          <a:lstStyle/>
+          <a:p>
+            <a:pPr indent="0" marL="0">
+              <a:buNone/>
+            </a:pPr>
+            <a:r>
+              <a:rPr lang="en-US" sz="3200" b="1" dirty="0">
+                <a:solidFill>
+                  <a:srgbClr val="23272E"/>
+                </a:solidFill>
+                <a:latin typeface="Cambria" pitchFamily="34" charset="0"/>
+                <a:ea typeface="Cambria" pitchFamily="34" charset="-122"/>
+                <a:cs typeface="Cambria" pitchFamily="34" charset="-120"/>
+              </a:rPr>
+              <a:t>Ray–Sphere Intersection Unit</a:t>
+            </a:r>
+            <a:endParaRPr lang="en-US" sz="3200" dirty="0"/>
+          </a:p>
+        </p:txBody>
+      </p:sp>
+      <p:sp>
+        <p:nvSpPr>
+          <p:cNvPr id="4" name="Text 2"/>
+          <p:cNvSpPr txBox="1"/>
+          <p:nvPr/>
+        </p:nvSpPr>
+        <p:spPr>
+          <a:xfrm>
+            <a:off x="594360" y="1371600"/>
+            <a:ext cx="10881360" cy="320040"/>
+          </a:xfrm>
+          <a:prstGeom prst="rect">
+            <a:avLst/>
+          </a:prstGeom>
+          <a:noFill/>
+          <a:ln/>
+        </p:spPr>
+        <p:txBody>
+          <a:bodyPr wrap="square" lIns="0" tIns="0" rIns="0" bIns="0" rtlCol="0" anchor="ctr"/>
+          <a:lstStyle/>
+          <a:p>
+            <a:pPr indent="0" marL="0">
+              <a:buNone/>
+            </a:pPr>
+            <a:r>
+              <a:rPr lang="en-US" sz="1350" dirty="0">
+                <a:solidFill>
+                  <a:srgbClr val="23272E"/>
+                </a:solidFill>
+                <a:latin typeface="Calibri" pitchFamily="34" charset="0"/>
+                <a:ea typeface="Calibri" pitchFamily="34" charset="-122"/>
+                <a:cs typeface="Calibri" pitchFamily="34" charset="-120"/>
+              </a:rPr>
+              <a:t>The render loop is  for (o, s) in self.objects: o.intersectionTime(ray)  — ONE ray against MANY spheres.</a:t>
+            </a:r>
+            <a:endParaRPr lang="en-US" sz="1350" dirty="0"/>
+          </a:p>
+        </p:txBody>
+      </p:sp>
+      <p:sp>
+        <p:nvSpPr>
+          <p:cNvPr id="5" name="Text 3"/>
+          <p:cNvSpPr txBox="1"/>
+          <p:nvPr/>
+        </p:nvSpPr>
+        <p:spPr>
+          <a:xfrm>
+            <a:off x="594360" y="1691640"/>
+            <a:ext cx="10881360" cy="457200"/>
+          </a:xfrm>
+          <a:prstGeom prst="rect">
+            <a:avLst/>
+          </a:prstGeom>
+          <a:noFill/>
+          <a:ln/>
+        </p:spPr>
+        <p:txBody>
+          <a:bodyPr wrap="square" lIns="0" tIns="0" rIns="0" bIns="0" rtlCol="0" anchor="ctr"/>
+          <a:lstStyle/>
+          <a:p>
+            <a:pPr indent="0" marL="0">
+              <a:buNone/>
+            </a:pPr>
+            <a:r>
+              <a:rPr lang="en-US" sz="1350" dirty="0">
+                <a:solidFill>
+                  <a:srgbClr val="6B7280"/>
+                </a:solidFill>
+                <a:latin typeface="Calibri" pitchFamily="34" charset="0"/>
+                <a:ea typeface="Calibri" pitchFamily="34" charset="-122"/>
+                <a:cs typeface="Calibri" pitchFamily="34" charset="-120"/>
+              </a:rPr>
+              <a:t>So we hold the ray stationary in registers and stream spheres past it, one per cycle — the same weight-stationary dataflow the TPU uses. Ray operands are fetched once per ray instead of once per sphere.</a:t>
+            </a:r>
+            <a:endParaRPr lang="en-US" sz="1350" dirty="0"/>
+          </a:p>
+        </p:txBody>
+      </p:sp>
+      <p:sp>
+        <p:nvSpPr>
+          <p:cNvPr id="6" name="Shape 4"/>
+          <p:cNvSpPr/>
+          <p:nvPr/>
+        </p:nvSpPr>
+        <p:spPr>
+          <a:xfrm>
+            <a:off x="594360" y="2377440"/>
+            <a:ext cx="3017520" cy="2926080"/>
+          </a:xfrm>
+          <a:prstGeom prst="roundRect">
+            <a:avLst>
+              <a:gd name="adj" fmla="val 1875"/>
+            </a:avLst>
+          </a:prstGeom>
+          <a:solidFill>
+            <a:srgbClr val="FFFFFF"/>
+          </a:solidFill>
+          <a:ln w="15875">
+            <a:solidFill>
+              <a:srgbClr val="C9CCD1"/>
+            </a:solidFill>
+            <a:prstDash val="solid"/>
+          </a:ln>
+        </p:spPr>
+      </p:sp>
+      <p:sp>
+        <p:nvSpPr>
+          <p:cNvPr id="7" name="Text 5"/>
+          <p:cNvSpPr txBox="1"/>
+          <p:nvPr/>
+        </p:nvSpPr>
+        <p:spPr>
+          <a:xfrm>
+            <a:off x="777240" y="2542032"/>
+            <a:ext cx="2651760" cy="274320"/>
+          </a:xfrm>
+          <a:prstGeom prst="rect">
+            <a:avLst/>
+          </a:prstGeom>
+          <a:noFill/>
+          <a:ln/>
+        </p:spPr>
+        <p:txBody>
+          <a:bodyPr wrap="square" lIns="0" tIns="0" rIns="0" bIns="0" rtlCol="0" anchor="ctr"/>
+          <a:lstStyle/>
+          <a:p>
+            <a:pPr indent="0" marL="0">
+              <a:buNone/>
+            </a:pPr>
+            <a:r>
+              <a:rPr lang="en-US" sz="1100" b="1" spc="100" kern="0" dirty="0">
+                <a:solidFill>
+                  <a:srgbClr val="6B7280"/>
+                </a:solidFill>
+                <a:latin typeface="Calibri" pitchFamily="34" charset="0"/>
+                <a:ea typeface="Calibri" pitchFamily="34" charset="-122"/>
+                <a:cs typeface="Calibri" pitchFamily="34" charset="-120"/>
+              </a:rPr>
+              <a:t>HOST  (CPython)</a:t>
+            </a:r>
+            <a:endParaRPr lang="en-US" sz="1100" dirty="0"/>
+          </a:p>
+        </p:txBody>
+      </p:sp>
+      <p:sp>
+        <p:nvSpPr>
+          <p:cNvPr id="8" name="Text 6"/>
+          <p:cNvSpPr txBox="1"/>
+          <p:nvPr/>
+        </p:nvSpPr>
+        <p:spPr>
+          <a:xfrm>
+            <a:off x="777240" y="2880360"/>
+            <a:ext cx="2697480" cy="2194560"/>
+          </a:xfrm>
+          <a:prstGeom prst="rect">
+            <a:avLst/>
+          </a:prstGeom>
+          <a:noFill/>
+          <a:ln/>
+        </p:spPr>
+        <p:txBody>
+          <a:bodyPr wrap="square" lIns="0" tIns="0" rIns="0" bIns="0" rtlCol="0" anchor="ctr"/>
+          <a:lstStyle/>
+          <a:p>
+            <a:pPr indent="0" marL="0">
+              <a:lnSpc>
+                <a:spcPct val="125000"/>
+              </a:lnSpc>
+              <a:buNone/>
+            </a:pPr>
+            <a:r>
+              <a:rPr lang="en-US" sz="1150" dirty="0">
+                <a:solidFill>
+                  <a:srgbClr val="23272E"/>
+                </a:solidFill>
+                <a:latin typeface="Calibri" pitchFamily="34" charset="0"/>
+                <a:ea typeface="Calibri" pitchFamily="34" charset="-122"/>
+                <a:cs typeface="Calibri" pitchFamily="34" charset="-120"/>
+              </a:rPr>
+              <a:t>Scene.rayColour</a:t>
+            </a:r>
+            <a:endParaRPr lang="en-US" sz="1150" dirty="0"/>
+          </a:p>
+          <a:p>
+            <a:pPr indent="0" marL="0">
+              <a:lnSpc>
+                <a:spcPct val="125000"/>
+              </a:lnSpc>
+              <a:buNone/>
+            </a:pPr>
+            <a:endParaRPr lang="en-US" sz="1150" dirty="0"/>
+          </a:p>
+          <a:p>
+            <a:pPr indent="0" marL="0">
+              <a:lnSpc>
+                <a:spcPct val="125000"/>
+              </a:lnSpc>
+              <a:buNone/>
+            </a:pPr>
+            <a:r>
+              <a:rPr lang="en-US" sz="1150" dirty="0">
+                <a:solidFill>
+                  <a:srgbClr val="23272E"/>
+                </a:solidFill>
+                <a:latin typeface="Calibri" pitchFamily="34" charset="0"/>
+                <a:ea typeface="Calibri" pitchFamily="34" charset="-122"/>
+                <a:cs typeface="Calibri" pitchFamily="34" charset="-120"/>
+              </a:rPr>
+              <a:t>① set_ray()  → MMIO BAR0</a:t>
+            </a:r>
+            <a:endParaRPr lang="en-US" sz="1150" dirty="0"/>
+          </a:p>
+          <a:p>
+            <a:pPr indent="0" marL="0">
+              <a:lnSpc>
+                <a:spcPct val="125000"/>
+              </a:lnSpc>
+              <a:buNone/>
+            </a:pPr>
+            <a:r>
+              <a:rPr lang="en-US" sz="1150" dirty="0">
+                <a:solidFill>
+                  <a:srgbClr val="23272E"/>
+                </a:solidFill>
+                <a:latin typeface="Calibri" pitchFamily="34" charset="0"/>
+                <a:ea typeface="Calibri" pitchFamily="34" charset="-122"/>
+                <a:cs typeface="Calibri" pitchFamily="34" charset="-120"/>
+              </a:rPr>
+              <a:t>② spheres    → DMA</a:t>
+            </a:r>
+            <a:endParaRPr lang="en-US" sz="1150" dirty="0"/>
+          </a:p>
+          <a:p>
+            <a:pPr indent="0" marL="0">
+              <a:lnSpc>
+                <a:spcPct val="125000"/>
+              </a:lnSpc>
+              <a:buNone/>
+            </a:pPr>
+            <a:r>
+              <a:rPr lang="en-US" sz="1150" dirty="0">
+                <a:solidFill>
+                  <a:srgbClr val="23272E"/>
+                </a:solidFill>
+                <a:latin typeface="Calibri" pitchFamily="34" charset="0"/>
+                <a:ea typeface="Calibri" pitchFamily="34" charset="-122"/>
+                <a:cs typeface="Calibri" pitchFamily="34" charset="-120"/>
+              </a:rPr>
+              <a:t>③ doorbell   → GO bit</a:t>
+            </a:r>
+            <a:endParaRPr lang="en-US" sz="1150" dirty="0"/>
+          </a:p>
+          <a:p>
+            <a:pPr indent="0" marL="0">
+              <a:lnSpc>
+                <a:spcPct val="125000"/>
+              </a:lnSpc>
+              <a:buNone/>
+            </a:pPr>
+            <a:r>
+              <a:rPr lang="en-US" sz="1150" dirty="0">
+                <a:solidFill>
+                  <a:srgbClr val="23272E"/>
+                </a:solidFill>
+                <a:latin typeface="Calibri" pitchFamily="34" charset="0"/>
+                <a:ea typeface="Calibri" pitchFamily="34" charset="-122"/>
+                <a:cs typeface="Calibri" pitchFamily="34" charset="-120"/>
+              </a:rPr>
+              <a:t>④ results    ← DMA</a:t>
+            </a:r>
+            <a:endParaRPr lang="en-US" sz="1150" dirty="0"/>
+          </a:p>
+          <a:p>
+            <a:pPr indent="0" marL="0">
+              <a:lnSpc>
+                <a:spcPct val="125000"/>
+              </a:lnSpc>
+              <a:buNone/>
+            </a:pPr>
+            <a:r>
+              <a:rPr lang="en-US" sz="1150" dirty="0">
+                <a:solidFill>
+                  <a:srgbClr val="23272E"/>
+                </a:solidFill>
+                <a:latin typeface="Calibri" pitchFamily="34" charset="0"/>
+                <a:ea typeface="Calibri" pitchFamily="34" charset="-122"/>
+                <a:cs typeface="Calibri" pitchFamily="34" charset="-120"/>
+              </a:rPr>
+              <a:t>⑤ poll done  ← MMIO</a:t>
+            </a:r>
+            <a:endParaRPr lang="en-US" sz="1150" dirty="0"/>
+          </a:p>
+        </p:txBody>
+      </p:sp>
+      <p:sp>
+        <p:nvSpPr>
+          <p:cNvPr id="9" name="Shape 7"/>
+          <p:cNvSpPr/>
+          <p:nvPr/>
+        </p:nvSpPr>
+        <p:spPr>
+          <a:xfrm>
+            <a:off x="3703320" y="3657600"/>
+            <a:ext cx="777240" cy="384048"/>
+          </a:xfrm>
+          <a:prstGeom prst="rightArrow">
+            <a:avLst/>
+          </a:prstGeom>
+          <a:solidFill>
+            <a:srgbClr val="2D9596"/>
+          </a:solidFill>
+          <a:ln/>
+        </p:spPr>
+      </p:sp>
+      <p:sp>
+        <p:nvSpPr>
+          <p:cNvPr id="10" name="Text 8"/>
+          <p:cNvSpPr txBox="1"/>
+          <p:nvPr/>
+        </p:nvSpPr>
+        <p:spPr>
+          <a:xfrm>
+            <a:off x="3657600" y="3310128"/>
+            <a:ext cx="868680" cy="274320"/>
+          </a:xfrm>
+          <a:prstGeom prst="rect">
+            <a:avLst/>
+          </a:prstGeom>
+          <a:noFill/>
+          <a:ln/>
+        </p:spPr>
+        <p:txBody>
+          <a:bodyPr wrap="square" lIns="0" tIns="0" rIns="0" bIns="0" rtlCol="0" anchor="ctr"/>
+          <a:lstStyle/>
+          <a:p>
+            <a:pPr algn="ctr" indent="0" marL="0">
+              <a:buNone/>
+            </a:pPr>
+            <a:r>
+              <a:rPr lang="en-US" sz="1000" b="1" dirty="0">
+                <a:solidFill>
+                  <a:srgbClr val="2D9596"/>
+                </a:solidFill>
+                <a:latin typeface="Calibri" pitchFamily="34" charset="0"/>
+                <a:ea typeface="Calibri" pitchFamily="34" charset="-122"/>
+                <a:cs typeface="Calibri" pitchFamily="34" charset="-120"/>
+              </a:rPr>
+              <a:t>PCIe</a:t>
+            </a:r>
+            <a:endParaRPr lang="en-US" sz="1000" dirty="0"/>
+          </a:p>
+        </p:txBody>
+      </p:sp>
+      <p:sp>
+        <p:nvSpPr>
+          <p:cNvPr id="11" name="Shape 9"/>
+          <p:cNvSpPr/>
+          <p:nvPr/>
+        </p:nvSpPr>
+        <p:spPr>
+          <a:xfrm>
+            <a:off x="4617720" y="2377440"/>
+            <a:ext cx="6949440" cy="2926080"/>
+          </a:xfrm>
+          <a:prstGeom prst="roundRect">
+            <a:avLst>
+              <a:gd name="adj" fmla="val 1875"/>
+            </a:avLst>
+          </a:prstGeom>
+          <a:solidFill>
+            <a:srgbClr val="EAF5F5"/>
+          </a:solidFill>
+          <a:ln w="15875">
+            <a:solidFill>
+              <a:srgbClr val="2D9596"/>
+            </a:solidFill>
+            <a:prstDash val="solid"/>
+          </a:ln>
+        </p:spPr>
+      </p:sp>
+      <p:sp>
+        <p:nvSpPr>
+          <p:cNvPr id="12" name="Text 10"/>
+          <p:cNvSpPr txBox="1"/>
+          <p:nvPr/>
+        </p:nvSpPr>
+        <p:spPr>
+          <a:xfrm>
+            <a:off x="4800600" y="2542032"/>
+            <a:ext cx="3657600" cy="274320"/>
+          </a:xfrm>
+          <a:prstGeom prst="rect">
+            <a:avLst/>
+          </a:prstGeom>
+          <a:noFill/>
+          <a:ln/>
+        </p:spPr>
+        <p:txBody>
+          <a:bodyPr wrap="square" lIns="0" tIns="0" rIns="0" bIns="0" rtlCol="0" anchor="ctr"/>
+          <a:lstStyle/>
+          <a:p>
+            <a:pPr indent="0" marL="0">
+              <a:buNone/>
+            </a:pPr>
+            <a:r>
+              <a:rPr lang="en-US" sz="1100" b="1" spc="100" kern="0" dirty="0">
+                <a:solidFill>
+                  <a:srgbClr val="2D9596"/>
+                </a:solidFill>
+                <a:latin typeface="Calibri" pitchFamily="34" charset="0"/>
+                <a:ea typeface="Calibri" pitchFamily="34" charset="-122"/>
+                <a:cs typeface="Calibri" pitchFamily="34" charset="-120"/>
+              </a:rPr>
+              <a:t>RSIU ACCELERATOR</a:t>
+            </a:r>
+            <a:endParaRPr lang="en-US" sz="1100" dirty="0"/>
+          </a:p>
+        </p:txBody>
+      </p:sp>
+      <p:sp>
+        <p:nvSpPr>
+          <p:cNvPr id="13" name="Shape 11"/>
+          <p:cNvSpPr/>
+          <p:nvPr/>
+        </p:nvSpPr>
+        <p:spPr>
+          <a:xfrm>
+            <a:off x="4846320" y="2880360"/>
+            <a:ext cx="6492240" cy="256032"/>
+          </a:xfrm>
+          <a:prstGeom prst="roundRect">
+            <a:avLst>
+              <a:gd name="adj" fmla="val 10714"/>
+            </a:avLst>
+          </a:prstGeom>
+          <a:solidFill>
+            <a:srgbClr val="D6EBEB"/>
+          </a:solidFill>
+          <a:ln w="9525">
+            <a:solidFill>
+              <a:srgbClr val="BBD8D8"/>
+            </a:solidFill>
+            <a:prstDash val="solid"/>
+          </a:ln>
+        </p:spPr>
+      </p:sp>
+      <p:sp>
+        <p:nvSpPr>
+          <p:cNvPr id="14" name="Text 12"/>
+          <p:cNvSpPr txBox="1"/>
+          <p:nvPr/>
+        </p:nvSpPr>
+        <p:spPr>
+          <a:xfrm>
+            <a:off x="4983480" y="2880360"/>
+            <a:ext cx="6217920" cy="256032"/>
+          </a:xfrm>
+          <a:prstGeom prst="rect">
+            <a:avLst/>
+          </a:prstGeom>
+          <a:noFill/>
+          <a:ln/>
+        </p:spPr>
+        <p:txBody>
+          <a:bodyPr wrap="square" lIns="0" tIns="0" rIns="0" bIns="0" rtlCol="0" anchor="ctr"/>
+          <a:lstStyle/>
+          <a:p>
+            <a:pPr indent="0" marL="0">
+              <a:buNone/>
+            </a:pPr>
+            <a:r>
+              <a:rPr lang="en-US" sz="1000" dirty="0">
+                <a:solidFill>
+                  <a:srgbClr val="23272E"/>
+                </a:solidFill>
+                <a:latin typeface="Courier New" pitchFamily="34" charset="0"/>
+                <a:ea typeface="Courier New" pitchFamily="34" charset="-122"/>
+                <a:cs typeface="Courier New" pitchFamily="34" charset="-120"/>
+              </a:rPr>
+              <a:t>Ray registers (stationary)</a:t>
+            </a:r>
+            <a:endParaRPr lang="en-US" sz="1000" dirty="0"/>
+          </a:p>
+        </p:txBody>
+      </p:sp>
+      <p:sp>
+        <p:nvSpPr>
+          <p:cNvPr id="15" name="Shape 13"/>
+          <p:cNvSpPr/>
+          <p:nvPr/>
+        </p:nvSpPr>
+        <p:spPr>
+          <a:xfrm>
+            <a:off x="4846320" y="3177540"/>
+            <a:ext cx="6492240" cy="256032"/>
+          </a:xfrm>
+          <a:prstGeom prst="roundRect">
+            <a:avLst>
+              <a:gd name="adj" fmla="val 10714"/>
+            </a:avLst>
+          </a:prstGeom>
+          <a:solidFill>
+            <a:srgbClr val="D6EBEB"/>
+          </a:solidFill>
+          <a:ln w="9525">
+            <a:solidFill>
+              <a:srgbClr val="BBD8D8"/>
+            </a:solidFill>
+            <a:prstDash val="solid"/>
+          </a:ln>
+        </p:spPr>
+      </p:sp>
+      <p:sp>
+        <p:nvSpPr>
+          <p:cNvPr id="16" name="Text 14"/>
+          <p:cNvSpPr txBox="1"/>
+          <p:nvPr/>
+        </p:nvSpPr>
+        <p:spPr>
+          <a:xfrm>
+            <a:off x="4983480" y="3177540"/>
+            <a:ext cx="6217920" cy="256032"/>
+          </a:xfrm>
+          <a:prstGeom prst="rect">
+            <a:avLst/>
+          </a:prstGeom>
+          <a:noFill/>
+          <a:ln/>
+        </p:spPr>
+        <p:txBody>
+          <a:bodyPr wrap="square" lIns="0" tIns="0" rIns="0" bIns="0" rtlCol="0" anchor="ctr"/>
+          <a:lstStyle/>
+          <a:p>
+            <a:pPr indent="0" marL="0">
+              <a:buNone/>
+            </a:pPr>
+            <a:r>
+              <a:rPr lang="en-US" sz="1000" dirty="0">
+                <a:solidFill>
+                  <a:srgbClr val="23272E"/>
+                </a:solidFill>
+                <a:latin typeface="Courier New" pitchFamily="34" charset="0"/>
+                <a:ea typeface="Courier New" pitchFamily="34" charset="-122"/>
+                <a:cs typeface="Courier New" pitchFamily="34" charset="-120"/>
+              </a:rPr>
+              <a:t>Sphere FIFO — 32 deep</a:t>
+            </a:r>
+            <a:endParaRPr lang="en-US" sz="1000" dirty="0"/>
+          </a:p>
+        </p:txBody>
+      </p:sp>
+      <p:sp>
+        <p:nvSpPr>
+          <p:cNvPr id="17" name="Shape 15"/>
+          <p:cNvSpPr/>
+          <p:nvPr/>
+        </p:nvSpPr>
+        <p:spPr>
+          <a:xfrm>
+            <a:off x="4846320" y="3474720"/>
+            <a:ext cx="6492240" cy="256032"/>
+          </a:xfrm>
+          <a:prstGeom prst="roundRect">
+            <a:avLst>
+              <a:gd name="adj" fmla="val 10714"/>
+            </a:avLst>
+          </a:prstGeom>
+          <a:solidFill>
+            <a:srgbClr val="FFFFFF"/>
+          </a:solidFill>
+          <a:ln w="9525">
+            <a:solidFill>
+              <a:srgbClr val="BBD8D8"/>
+            </a:solidFill>
+            <a:prstDash val="solid"/>
+          </a:ln>
+        </p:spPr>
+      </p:sp>
+      <p:sp>
+        <p:nvSpPr>
+          <p:cNvPr id="18" name="Text 16"/>
+          <p:cNvSpPr txBox="1"/>
+          <p:nvPr/>
+        </p:nvSpPr>
+        <p:spPr>
+          <a:xfrm>
+            <a:off x="4983480" y="3474720"/>
+            <a:ext cx="6217920" cy="256032"/>
+          </a:xfrm>
+          <a:prstGeom prst="rect">
+            <a:avLst/>
+          </a:prstGeom>
+          <a:noFill/>
+          <a:ln/>
+        </p:spPr>
+        <p:txBody>
+          <a:bodyPr wrap="square" lIns="0" tIns="0" rIns="0" bIns="0" rtlCol="0" anchor="ctr"/>
+          <a:lstStyle/>
+          <a:p>
+            <a:pPr indent="0" marL="0">
+              <a:buNone/>
+            </a:pPr>
+            <a:r>
+              <a:rPr lang="en-US" sz="1000" dirty="0">
+                <a:solidFill>
+                  <a:srgbClr val="23272E"/>
+                </a:solidFill>
+                <a:latin typeface="Courier New" pitchFamily="34" charset="0"/>
+                <a:ea typeface="Courier New" pitchFamily="34" charset="-122"/>
+                <a:cs typeface="Courier New" pitchFamily="34" charset="-120"/>
+              </a:rPr>
+              <a:t>S1  cp = C − P            3 sub</a:t>
+            </a:r>
+            <a:endParaRPr lang="en-US" sz="1000" dirty="0"/>
+          </a:p>
+        </p:txBody>
+      </p:sp>
+      <p:sp>
+        <p:nvSpPr>
+          <p:cNvPr id="19" name="Shape 17"/>
+          <p:cNvSpPr/>
+          <p:nvPr/>
+        </p:nvSpPr>
+        <p:spPr>
+          <a:xfrm>
+            <a:off x="4846320" y="3771900"/>
+            <a:ext cx="6492240" cy="256032"/>
+          </a:xfrm>
+          <a:prstGeom prst="roundRect">
+            <a:avLst>
+              <a:gd name="adj" fmla="val 10714"/>
+            </a:avLst>
+          </a:prstGeom>
+          <a:solidFill>
+            <a:srgbClr val="FFFFFF"/>
+          </a:solidFill>
+          <a:ln w="9525">
+            <a:solidFill>
+              <a:srgbClr val="BBD8D8"/>
+            </a:solidFill>
+            <a:prstDash val="solid"/>
+          </a:ln>
+        </p:spPr>
+      </p:sp>
+      <p:sp>
+        <p:nvSpPr>
+          <p:cNvPr id="20" name="Text 18"/>
+          <p:cNvSpPr txBox="1"/>
+          <p:nvPr/>
+        </p:nvSpPr>
+        <p:spPr>
+          <a:xfrm>
+            <a:off x="4983480" y="3771900"/>
+            <a:ext cx="6217920" cy="256032"/>
+          </a:xfrm>
+          <a:prstGeom prst="rect">
+            <a:avLst/>
+          </a:prstGeom>
+          <a:noFill/>
+          <a:ln/>
+        </p:spPr>
+        <p:txBody>
+          <a:bodyPr wrap="square" lIns="0" tIns="0" rIns="0" bIns="0" rtlCol="0" anchor="ctr"/>
+          <a:lstStyle/>
+          <a:p>
+            <a:pPr indent="0" marL="0">
+              <a:buNone/>
+            </a:pPr>
+            <a:r>
+              <a:rPr lang="en-US" sz="1000" dirty="0">
+                <a:solidFill>
+                  <a:srgbClr val="23272E"/>
+                </a:solidFill>
+                <a:latin typeface="Courier New" pitchFamily="34" charset="0"/>
+                <a:ea typeface="Courier New" pitchFamily="34" charset="-122"/>
+                <a:cs typeface="Courier New" pitchFamily="34" charset="-120"/>
+              </a:rPr>
+              <a:t>S2  8 × multiply</a:t>
+            </a:r>
+            <a:endParaRPr lang="en-US" sz="1000" dirty="0"/>
+          </a:p>
+        </p:txBody>
+      </p:sp>
+      <p:sp>
+        <p:nvSpPr>
+          <p:cNvPr id="21" name="Shape 19"/>
+          <p:cNvSpPr/>
+          <p:nvPr/>
+        </p:nvSpPr>
+        <p:spPr>
+          <a:xfrm>
+            <a:off x="4846320" y="4069080"/>
+            <a:ext cx="6492240" cy="256032"/>
+          </a:xfrm>
+          <a:prstGeom prst="roundRect">
+            <a:avLst>
+              <a:gd name="adj" fmla="val 10714"/>
+            </a:avLst>
+          </a:prstGeom>
+          <a:solidFill>
+            <a:srgbClr val="FFFFFF"/>
+          </a:solidFill>
+          <a:ln w="9525">
+            <a:solidFill>
+              <a:srgbClr val="BBD8D8"/>
+            </a:solidFill>
+            <a:prstDash val="solid"/>
+          </a:ln>
+        </p:spPr>
+      </p:sp>
+      <p:sp>
+        <p:nvSpPr>
+          <p:cNvPr id="22" name="Text 20"/>
+          <p:cNvSpPr txBox="1"/>
+          <p:nvPr/>
+        </p:nvSpPr>
+        <p:spPr>
+          <a:xfrm>
+            <a:off x="4983480" y="4069080"/>
+            <a:ext cx="6217920" cy="256032"/>
+          </a:xfrm>
+          <a:prstGeom prst="rect">
+            <a:avLst/>
+          </a:prstGeom>
+          <a:noFill/>
+          <a:ln/>
+        </p:spPr>
+        <p:txBody>
+          <a:bodyPr wrap="square" lIns="0" tIns="0" rIns="0" bIns="0" rtlCol="0" anchor="ctr"/>
+          <a:lstStyle/>
+          <a:p>
+            <a:pPr indent="0" marL="0">
+              <a:buNone/>
+            </a:pPr>
+            <a:r>
+              <a:rPr lang="en-US" sz="1000" dirty="0">
+                <a:solidFill>
+                  <a:srgbClr val="23272E"/>
+                </a:solidFill>
+                <a:latin typeface="Courier New" pitchFamily="34" charset="0"/>
+                <a:ea typeface="Courier New" pitchFamily="34" charset="-122"/>
+                <a:cs typeface="Courier New" pitchFamily="34" charset="-120"/>
+              </a:rPr>
+              <a:t>S3  adder trees (Q32.32)</a:t>
+            </a:r>
+            <a:endParaRPr lang="en-US" sz="1000" dirty="0"/>
+          </a:p>
+        </p:txBody>
+      </p:sp>
+      <p:sp>
+        <p:nvSpPr>
+          <p:cNvPr id="23" name="Shape 21"/>
+          <p:cNvSpPr/>
+          <p:nvPr/>
+        </p:nvSpPr>
+        <p:spPr>
+          <a:xfrm>
+            <a:off x="4846320" y="4366260"/>
+            <a:ext cx="6492240" cy="256032"/>
+          </a:xfrm>
+          <a:prstGeom prst="roundRect">
+            <a:avLst>
+              <a:gd name="adj" fmla="val 10714"/>
+            </a:avLst>
+          </a:prstGeom>
+          <a:solidFill>
+            <a:srgbClr val="FFFFFF"/>
+          </a:solidFill>
+          <a:ln w="9525">
+            <a:solidFill>
+              <a:srgbClr val="BBD8D8"/>
+            </a:solidFill>
+            <a:prstDash val="solid"/>
+          </a:ln>
+        </p:spPr>
+      </p:sp>
+      <p:sp>
+        <p:nvSpPr>
+          <p:cNvPr id="24" name="Text 22"/>
+          <p:cNvSpPr txBox="1"/>
+          <p:nvPr/>
+        </p:nvSpPr>
+        <p:spPr>
+          <a:xfrm>
+            <a:off x="4983480" y="4366260"/>
+            <a:ext cx="6217920" cy="256032"/>
+          </a:xfrm>
+          <a:prstGeom prst="rect">
+            <a:avLst/>
+          </a:prstGeom>
+          <a:noFill/>
+          <a:ln/>
+        </p:spPr>
+        <p:txBody>
+          <a:bodyPr wrap="square" lIns="0" tIns="0" rIns="0" bIns="0" rtlCol="0" anchor="ctr"/>
+          <a:lstStyle/>
+          <a:p>
+            <a:pPr indent="0" marL="0">
+              <a:buNone/>
+            </a:pPr>
+            <a:r>
+              <a:rPr lang="en-US" sz="1000" dirty="0">
+                <a:solidFill>
+                  <a:srgbClr val="23272E"/>
+                </a:solidFill>
+                <a:latin typeface="Courier New" pitchFamily="34" charset="0"/>
+                <a:ea typeface="Courier New" pitchFamily="34" charset="-122"/>
+                <a:cs typeface="Courier New" pitchFamily="34" charset="-120"/>
+              </a:rPr>
+              <a:t>S4  disc + hit test</a:t>
+            </a:r>
+            <a:endParaRPr lang="en-US" sz="1000" dirty="0"/>
+          </a:p>
+        </p:txBody>
+      </p:sp>
+      <p:sp>
+        <p:nvSpPr>
+          <p:cNvPr id="25" name="Shape 23"/>
+          <p:cNvSpPr/>
+          <p:nvPr/>
+        </p:nvSpPr>
+        <p:spPr>
+          <a:xfrm>
+            <a:off x="4846320" y="4663440"/>
+            <a:ext cx="6492240" cy="256032"/>
+          </a:xfrm>
+          <a:prstGeom prst="roundRect">
+            <a:avLst>
+              <a:gd name="adj" fmla="val 10714"/>
+            </a:avLst>
+          </a:prstGeom>
+          <a:solidFill>
+            <a:srgbClr val="FFFFFF"/>
+          </a:solidFill>
+          <a:ln w="9525">
+            <a:solidFill>
+              <a:srgbClr val="BBD8D8"/>
+            </a:solidFill>
+            <a:prstDash val="solid"/>
+          </a:ln>
+        </p:spPr>
+      </p:sp>
+      <p:sp>
+        <p:nvSpPr>
+          <p:cNvPr id="26" name="Text 24"/>
+          <p:cNvSpPr txBox="1"/>
+          <p:nvPr/>
+        </p:nvSpPr>
+        <p:spPr>
+          <a:xfrm>
+            <a:off x="4983480" y="4663440"/>
+            <a:ext cx="6217920" cy="256032"/>
+          </a:xfrm>
+          <a:prstGeom prst="rect">
+            <a:avLst/>
+          </a:prstGeom>
+          <a:noFill/>
+          <a:ln/>
+        </p:spPr>
+        <p:txBody>
+          <a:bodyPr wrap="square" lIns="0" tIns="0" rIns="0" bIns="0" rtlCol="0" anchor="ctr"/>
+          <a:lstStyle/>
+          <a:p>
+            <a:pPr indent="0" marL="0">
+              <a:buNone/>
+            </a:pPr>
+            <a:r>
+              <a:rPr lang="en-US" sz="1000" dirty="0">
+                <a:solidFill>
+                  <a:srgbClr val="23272E"/>
+                </a:solidFill>
+                <a:latin typeface="Courier New" pitchFamily="34" charset="0"/>
+                <a:ea typeface="Courier New" pitchFamily="34" charset="-122"/>
+                <a:cs typeface="Courier New" pitchFamily="34" charset="-120"/>
+              </a:rPr>
+              <a:t>S5–S28  pipelined sqrt</a:t>
+            </a:r>
+            <a:endParaRPr lang="en-US" sz="1000" dirty="0"/>
+          </a:p>
+        </p:txBody>
+      </p:sp>
+      <p:sp>
+        <p:nvSpPr>
+          <p:cNvPr id="27" name="Shape 25"/>
+          <p:cNvSpPr/>
+          <p:nvPr/>
+        </p:nvSpPr>
+        <p:spPr>
+          <a:xfrm>
+            <a:off x="4846320" y="4960620"/>
+            <a:ext cx="6492240" cy="256032"/>
+          </a:xfrm>
+          <a:prstGeom prst="roundRect">
+            <a:avLst>
+              <a:gd name="adj" fmla="val 10714"/>
+            </a:avLst>
+          </a:prstGeom>
+          <a:solidFill>
+            <a:srgbClr val="FFFFFF"/>
+          </a:solidFill>
+          <a:ln w="9525">
+            <a:solidFill>
+              <a:srgbClr val="BBD8D8"/>
+            </a:solidFill>
+            <a:prstDash val="solid"/>
+          </a:ln>
+        </p:spPr>
+      </p:sp>
+      <p:sp>
+        <p:nvSpPr>
+          <p:cNvPr id="28" name="Text 26"/>
+          <p:cNvSpPr txBox="1"/>
+          <p:nvPr/>
+        </p:nvSpPr>
+        <p:spPr>
+          <a:xfrm>
+            <a:off x="4983480" y="4960620"/>
+            <a:ext cx="6217920" cy="256032"/>
+          </a:xfrm>
+          <a:prstGeom prst="rect">
+            <a:avLst/>
+          </a:prstGeom>
+          <a:noFill/>
+          <a:ln/>
+        </p:spPr>
+        <p:txBody>
+          <a:bodyPr wrap="square" lIns="0" tIns="0" rIns="0" bIns="0" rtlCol="0" anchor="ctr"/>
+          <a:lstStyle/>
+          <a:p>
+            <a:pPr indent="0" marL="0">
+              <a:buNone/>
+            </a:pPr>
+            <a:r>
+              <a:rPr lang="en-US" sz="1000" dirty="0">
+                <a:solidFill>
+                  <a:srgbClr val="23272E"/>
+                </a:solidFill>
+                <a:latin typeface="Courier New" pitchFamily="34" charset="0"/>
+                <a:ea typeface="Courier New" pitchFamily="34" charset="-122"/>
+                <a:cs typeface="Courier New" pitchFamily="34" charset="-120"/>
+              </a:rPr>
+              <a:t>S29  t = v − √disc</a:t>
+            </a:r>
+            <a:endParaRPr lang="en-US" sz="1000" dirty="0"/>
+          </a:p>
+        </p:txBody>
+      </p:sp>
+      <p:sp>
+        <p:nvSpPr>
+          <p:cNvPr id="29" name="Text 27"/>
+          <p:cNvSpPr txBox="1"/>
+          <p:nvPr/>
+        </p:nvSpPr>
+        <p:spPr>
+          <a:xfrm>
+            <a:off x="594360" y="5486400"/>
+            <a:ext cx="10881360" cy="548640"/>
+          </a:xfrm>
+          <a:prstGeom prst="rect">
+            <a:avLst/>
+          </a:prstGeom>
+          <a:noFill/>
+          <a:ln/>
+        </p:spPr>
+        <p:txBody>
+          <a:bodyPr wrap="square" lIns="0" tIns="0" rIns="0" bIns="0" rtlCol="0" anchor="ctr"/>
+          <a:lstStyle/>
+          <a:p>
+            <a:pPr indent="0" marL="0">
+              <a:buNone/>
+            </a:pPr>
+            <a:r>
+              <a:rPr lang="en-US" sz="1250" dirty="0">
+                <a:solidFill>
+                  <a:srgbClr val="23272E"/>
+                </a:solidFill>
+                <a:latin typeface="Calibri" pitchFamily="34" charset="0"/>
+                <a:ea typeface="Calibri" pitchFamily="34" charset="-122"/>
+                <a:cs typeface="Calibri" pitchFamily="34" charset="-120"/>
+              </a:rPr>
+              <a:t>No FSM · no stalls · no branches — a miss is a flag on the result, not a branch.  Little's Law: λ=1/cycle × W=30 cycles ⇒ 30 in flight, so the FIFOs are 32 deep.</a:t>
+            </a:r>
+            <a:endParaRPr lang="en-US" sz="1250" dirty="0"/>
+          </a:p>
+        </p:txBody>
+      </p:sp>
+    </p:spTree>
+  </p:cSld>
+  <p:clrMapOvr>
+    <a:masterClrMapping/>
+  </p:clrMapOvr>
+</p:sld>
+</file>
+
+<file path=ppt/slides/slide16.xml><?xml version="1.0" encoding="utf-8"?>
+<p:sld xmlns:a="http://schemas.openxmlformats.org/drawingml/2006/main" xmlns:r="http://schemas.openxmlformats.org/officeDocument/2006/relationships" xmlns:p="http://schemas.openxmlformats.org/presentationml/2006/main">
+  <p:cSld name="Slide 16">
+    <p:bg>
+      <p:bgPr>
+        <a:solidFill>
+          <a:srgbClr val="F7F7F5"/>
+        </a:solidFill>
+      </p:bgPr>
+    </p:bg>
+    <p:spTree>
+      <p:nvGrpSpPr>
+        <p:cNvPr id="1" name=""/>
+        <p:cNvGrpSpPr/>
+        <p:nvPr/>
+      </p:nvGrpSpPr>
+      <p:grpSpPr>
+        <a:xfrm>
+          <a:off x="0" y="0"/>
+          <a:ext cx="0" cy="0"/>
+          <a:chOff x="0" y="0"/>
+          <a:chExt cx="0" cy="0"/>
+        </a:xfrm>
+      </p:grpSpPr>
+      <p:sp>
+        <p:nvSpPr>
+          <p:cNvPr id="2" name="Text 0"/>
+          <p:cNvSpPr txBox="1"/>
+          <p:nvPr/>
+        </p:nvSpPr>
+        <p:spPr>
+          <a:xfrm>
+            <a:off x="594360" y="310896"/>
+            <a:ext cx="8229600" cy="237744"/>
+          </a:xfrm>
+          <a:prstGeom prst="rect">
+            <a:avLst/>
+          </a:prstGeom>
+          <a:noFill/>
+          <a:ln/>
+        </p:spPr>
+        <p:txBody>
+          <a:bodyPr wrap="square" lIns="0" tIns="0" rIns="0" bIns="0" rtlCol="0" anchor="ctr"/>
+          <a:lstStyle/>
+          <a:p>
+            <a:pPr indent="0" marL="0">
+              <a:buNone/>
+            </a:pPr>
+            <a:r>
+              <a:rPr lang="en-US" sz="1100" b="1" spc="200" kern="0" dirty="0">
+                <a:solidFill>
+                  <a:srgbClr val="E8552D"/>
+                </a:solidFill>
+                <a:latin typeface="Calibri" pitchFamily="34" charset="0"/>
+                <a:ea typeface="Calibri" pitchFamily="34" charset="-122"/>
+                <a:cs typeface="Calibri" pitchFamily="34" charset="-120"/>
+              </a:rPr>
               <a:t>VERIFICATION</a:t>
             </a:r>
             <a:endParaRPr lang="en-US" sz="1100" dirty="0"/>
@@ -9198,9 +10612,9 @@
 </p:sld>
 </file>
 
-<file path=ppt/slides/slide16.xml><?xml version="1.0" encoding="utf-8"?>
+<file path=ppt/slides/slide17.xml><?xml version="1.0" encoding="utf-8"?>
 <p:sld xmlns:a="http://schemas.openxmlformats.org/drawingml/2006/main" xmlns:r="http://schemas.openxmlformats.org/officeDocument/2006/relationships" xmlns:p="http://schemas.openxmlformats.org/presentationml/2006/main">
-  <p:cSld name="Slide 16">
+  <p:cSld name="Slide 17">
     <p:bg>
       <p:bgPr>
         <a:solidFill>
@@ -9620,601 +11034,6 @@
               <a:t>Remaining error traced to input quantisation of the ray direction. The fix: a direction is a UNIT vector, so Q16.16 wastes 15 integer bits on a value that can never exceed 1 — Q2.30 would buy 14 fractional bits at zero cost.</a:t>
             </a:r>
             <a:endParaRPr lang="en-US" sz="1300" dirty="0"/>
-          </a:p>
-        </p:txBody>
-      </p:sp>
-    </p:spTree>
-  </p:cSld>
-  <p:clrMapOvr>
-    <a:masterClrMapping/>
-  </p:clrMapOvr>
-</p:sld>
-</file>
-
-<file path=ppt/slides/slide17.xml><?xml version="1.0" encoding="utf-8"?>
-<p:sld xmlns:a="http://schemas.openxmlformats.org/drawingml/2006/main" xmlns:r="http://schemas.openxmlformats.org/officeDocument/2006/relationships" xmlns:p="http://schemas.openxmlformats.org/presentationml/2006/main">
-  <p:cSld name="Slide 17">
-    <p:bg>
-      <p:bgPr>
-        <a:solidFill>
-          <a:srgbClr val="F7F7F5"/>
-        </a:solidFill>
-      </p:bgPr>
-    </p:bg>
-    <p:spTree>
-      <p:nvGrpSpPr>
-        <p:cNvPr id="1" name=""/>
-        <p:cNvGrpSpPr/>
-        <p:nvPr/>
-      </p:nvGrpSpPr>
-      <p:grpSpPr>
-        <a:xfrm>
-          <a:off x="0" y="0"/>
-          <a:ext cx="0" cy="0"/>
-          <a:chOff x="0" y="0"/>
-          <a:chExt cx="0" cy="0"/>
-        </a:xfrm>
-      </p:grpSpPr>
-      <p:sp>
-        <p:nvSpPr>
-          <p:cNvPr id="2" name="Text 0"/>
-          <p:cNvSpPr txBox="1"/>
-          <p:nvPr/>
-        </p:nvSpPr>
-        <p:spPr>
-          <a:xfrm>
-            <a:off x="594360" y="310896"/>
-            <a:ext cx="8229600" cy="237744"/>
-          </a:xfrm>
-          <a:prstGeom prst="rect">
-            <a:avLst/>
-          </a:prstGeom>
-          <a:noFill/>
-          <a:ln/>
-        </p:spPr>
-        <p:txBody>
-          <a:bodyPr wrap="square" lIns="0" tIns="0" rIns="0" bIns="0" rtlCol="0" anchor="ctr"/>
-          <a:lstStyle/>
-          <a:p>
-            <a:pPr indent="0" marL="0">
-              <a:buNone/>
-            </a:pPr>
-            <a:r>
-              <a:rPr lang="en-US" sz="1100" b="1" spc="200" kern="0" dirty="0">
-                <a:solidFill>
-                  <a:srgbClr val="E8552D"/>
-                </a:solidFill>
-                <a:latin typeface="Calibri" pitchFamily="34" charset="0"/>
-                <a:ea typeface="Calibri" pitchFamily="34" charset="-122"/>
-                <a:cs typeface="Calibri" pitchFamily="34" charset="-120"/>
-              </a:rPr>
-              <a:t>EXPECTED PERFORMANCE</a:t>
-            </a:r>
-            <a:endParaRPr lang="en-US" sz="1100" dirty="0"/>
-          </a:p>
-        </p:txBody>
-      </p:sp>
-      <p:sp>
-        <p:nvSpPr>
-          <p:cNvPr id="3" name="Text 1"/>
-          <p:cNvSpPr txBox="1"/>
-          <p:nvPr/>
-        </p:nvSpPr>
-        <p:spPr>
-          <a:xfrm>
-            <a:off x="594360" y="566928"/>
-            <a:ext cx="10972800" cy="640080"/>
-          </a:xfrm>
-          <a:prstGeom prst="rect">
-            <a:avLst/>
-          </a:prstGeom>
-          <a:noFill/>
-          <a:ln/>
-        </p:spPr>
-        <p:txBody>
-          <a:bodyPr wrap="square" lIns="0" tIns="0" rIns="0" bIns="0" rtlCol="0" anchor="ctr"/>
-          <a:lstStyle/>
-          <a:p>
-            <a:pPr indent="0" marL="0">
-              <a:buNone/>
-            </a:pPr>
-            <a:r>
-              <a:rPr lang="en-US" sz="3200" b="1" dirty="0">
-                <a:solidFill>
-                  <a:srgbClr val="23272E"/>
-                </a:solidFill>
-                <a:latin typeface="Cambria" pitchFamily="34" charset="0"/>
-                <a:ea typeface="Cambria" pitchFamily="34" charset="-122"/>
-                <a:cs typeface="Cambria" pitchFamily="34" charset="-120"/>
-              </a:rPr>
-              <a:t>The honest ceiling</a:t>
-            </a:r>
-            <a:endParaRPr lang="en-US" sz="3200" dirty="0"/>
-          </a:p>
-        </p:txBody>
-      </p:sp>
-      <p:sp>
-        <p:nvSpPr>
-          <p:cNvPr id="4" name="Shape 2"/>
-          <p:cNvSpPr/>
-          <p:nvPr/>
-        </p:nvSpPr>
-        <p:spPr>
-          <a:xfrm>
-            <a:off x="594360" y="1463040"/>
-            <a:ext cx="3429000" cy="1828800"/>
-          </a:xfrm>
-          <a:prstGeom prst="roundRect">
-            <a:avLst>
-              <a:gd name="adj" fmla="val 3000"/>
-            </a:avLst>
-          </a:prstGeom>
-          <a:solidFill>
-            <a:srgbClr val="EAF5F5"/>
-          </a:solidFill>
-          <a:ln w="12700">
-            <a:solidFill>
-              <a:srgbClr val="E3E3DF"/>
-            </a:solidFill>
-            <a:prstDash val="solid"/>
-          </a:ln>
-          <a:effectLst>
-            <a:outerShdw sx="100000" sy="100000" kx="0" ky="0" algn="bl" rotWithShape="0" blurRad="76200" dist="12700" dir="5400000">
-              <a:srgbClr val="9A9A95">
-                <a:alpha val="18000"/>
-              </a:srgbClr>
-            </a:outerShdw>
-          </a:effectLst>
-        </p:spPr>
-      </p:sp>
-      <p:sp>
-        <p:nvSpPr>
-          <p:cNvPr id="5" name="Text 3"/>
-          <p:cNvSpPr txBox="1"/>
-          <p:nvPr/>
-        </p:nvSpPr>
-        <p:spPr>
-          <a:xfrm>
-            <a:off x="822960" y="1691640"/>
-            <a:ext cx="3017520" cy="457200"/>
-          </a:xfrm>
-          <a:prstGeom prst="rect">
-            <a:avLst/>
-          </a:prstGeom>
-          <a:noFill/>
-          <a:ln/>
-        </p:spPr>
-        <p:txBody>
-          <a:bodyPr wrap="square" lIns="0" tIns="0" rIns="0" bIns="0" rtlCol="0" anchor="ctr"/>
-          <a:lstStyle/>
-          <a:p>
-            <a:pPr indent="0" marL="0">
-              <a:buNone/>
-            </a:pPr>
-            <a:r>
-              <a:rPr lang="en-US" sz="2100" b="1" dirty="0">
-                <a:solidFill>
-                  <a:srgbClr val="2D9596"/>
-                </a:solidFill>
-                <a:latin typeface="Cambria" pitchFamily="34" charset="0"/>
-                <a:ea typeface="Cambria" pitchFamily="34" charset="-122"/>
-                <a:cs typeface="Cambria" pitchFamily="34" charset="-120"/>
-              </a:rPr>
-              <a:t>~202 ms  →  ~1 ms</a:t>
-            </a:r>
-            <a:endParaRPr lang="en-US" sz="2100" dirty="0"/>
-          </a:p>
-        </p:txBody>
-      </p:sp>
-      <p:sp>
-        <p:nvSpPr>
-          <p:cNvPr id="6" name="Text 4"/>
-          <p:cNvSpPr txBox="1"/>
-          <p:nvPr/>
-        </p:nvSpPr>
-        <p:spPr>
-          <a:xfrm>
-            <a:off x="822960" y="2194560"/>
-            <a:ext cx="3017520" cy="914400"/>
-          </a:xfrm>
-          <a:prstGeom prst="rect">
-            <a:avLst/>
-          </a:prstGeom>
-          <a:noFill/>
-          <a:ln/>
-        </p:spPr>
-        <p:txBody>
-          <a:bodyPr wrap="square" lIns="0" tIns="0" rIns="0" bIns="0" rtlCol="0" anchor="ctr"/>
-          <a:lstStyle/>
-          <a:p>
-            <a:pPr indent="0" marL="0">
-              <a:buNone/>
-            </a:pPr>
-            <a:r>
-              <a:rPr lang="en-US" sz="1200" dirty="0">
-                <a:solidFill>
-                  <a:srgbClr val="23272E"/>
-                </a:solidFill>
-                <a:latin typeface="Calibri" pitchFamily="34" charset="0"/>
-                <a:ea typeface="Calibri" pitchFamily="34" charset="-122"/>
-                <a:cs typeface="Calibri" pitchFamily="34" charset="-120"/>
-              </a:rPr>
-              <a:t>time spent in intersectionTime, replaced by 194,790 cycles at 200 MHz</a:t>
-            </a:r>
-            <a:endParaRPr lang="en-US" sz="1200" dirty="0"/>
-          </a:p>
-        </p:txBody>
-      </p:sp>
-      <p:sp>
-        <p:nvSpPr>
-          <p:cNvPr id="7" name="Shape 5"/>
-          <p:cNvSpPr/>
-          <p:nvPr/>
-        </p:nvSpPr>
-        <p:spPr>
-          <a:xfrm>
-            <a:off x="4251960" y="1463040"/>
-            <a:ext cx="3429000" cy="1828800"/>
-          </a:xfrm>
-          <a:prstGeom prst="roundRect">
-            <a:avLst>
-              <a:gd name="adj" fmla="val 3000"/>
-            </a:avLst>
-          </a:prstGeom>
-          <a:solidFill>
-            <a:srgbClr val="FDF1EC"/>
-          </a:solidFill>
-          <a:ln w="12700">
-            <a:solidFill>
-              <a:srgbClr val="E3E3DF"/>
-            </a:solidFill>
-            <a:prstDash val="solid"/>
-          </a:ln>
-          <a:effectLst>
-            <a:outerShdw sx="100000" sy="100000" kx="0" ky="0" algn="bl" rotWithShape="0" blurRad="76200" dist="12700" dir="5400000">
-              <a:srgbClr val="9A9A95">
-                <a:alpha val="18000"/>
-              </a:srgbClr>
-            </a:outerShdw>
-          </a:effectLst>
-        </p:spPr>
-      </p:sp>
-      <p:sp>
-        <p:nvSpPr>
-          <p:cNvPr id="8" name="Text 6"/>
-          <p:cNvSpPr txBox="1"/>
-          <p:nvPr/>
-        </p:nvSpPr>
-        <p:spPr>
-          <a:xfrm>
-            <a:off x="4480560" y="1645920"/>
-            <a:ext cx="3017520" cy="594360"/>
-          </a:xfrm>
-          <a:prstGeom prst="rect">
-            <a:avLst/>
-          </a:prstGeom>
-          <a:noFill/>
-          <a:ln/>
-        </p:spPr>
-        <p:txBody>
-          <a:bodyPr wrap="square" lIns="0" tIns="0" rIns="0" bIns="0" rtlCol="0" anchor="ctr"/>
-          <a:lstStyle/>
-          <a:p>
-            <a:pPr indent="0" marL="0">
-              <a:buNone/>
-            </a:pPr>
-            <a:r>
-              <a:rPr lang="en-US" sz="3400" b="1" dirty="0">
-                <a:solidFill>
-                  <a:srgbClr val="E8552D"/>
-                </a:solidFill>
-                <a:latin typeface="Cambria" pitchFamily="34" charset="0"/>
-                <a:ea typeface="Cambria" pitchFamily="34" charset="-122"/>
-                <a:cs typeface="Cambria" pitchFamily="34" charset="-120"/>
-              </a:rPr>
-              <a:t>1.39×</a:t>
-            </a:r>
-            <a:endParaRPr lang="en-US" sz="3400" dirty="0"/>
-          </a:p>
-        </p:txBody>
-      </p:sp>
-      <p:sp>
-        <p:nvSpPr>
-          <p:cNvPr id="9" name="Text 7"/>
-          <p:cNvSpPr txBox="1"/>
-          <p:nvPr/>
-        </p:nvSpPr>
-        <p:spPr>
-          <a:xfrm>
-            <a:off x="4480560" y="2240280"/>
-            <a:ext cx="3017520" cy="822960"/>
-          </a:xfrm>
-          <a:prstGeom prst="rect">
-            <a:avLst/>
-          </a:prstGeom>
-          <a:noFill/>
-          <a:ln/>
-        </p:spPr>
-        <p:txBody>
-          <a:bodyPr wrap="square" lIns="0" tIns="0" rIns="0" bIns="0" rtlCol="0" anchor="ctr"/>
-          <a:lstStyle/>
-          <a:p>
-            <a:pPr indent="0" marL="0">
-              <a:buNone/>
-            </a:pPr>
-            <a:r>
-              <a:rPr lang="en-US" sz="1200" dirty="0">
-                <a:solidFill>
-                  <a:srgbClr val="23272E"/>
-                </a:solidFill>
-                <a:latin typeface="Calibri" pitchFamily="34" charset="0"/>
-                <a:ea typeface="Calibri" pitchFamily="34" charset="-122"/>
-                <a:cs typeface="Calibri" pitchFamily="34" charset="-120"/>
-              </a:rPr>
-              <a:t>maximum end-to-end speedup.  S = 1 / (1 − 0.281)</a:t>
-            </a:r>
-            <a:endParaRPr lang="en-US" sz="1200" dirty="0"/>
-          </a:p>
-        </p:txBody>
-      </p:sp>
-      <p:sp>
-        <p:nvSpPr>
-          <p:cNvPr id="10" name="Shape 8"/>
-          <p:cNvSpPr/>
-          <p:nvPr/>
-        </p:nvSpPr>
-        <p:spPr>
-          <a:xfrm>
-            <a:off x="7955280" y="1463040"/>
-            <a:ext cx="3611880" cy="1828800"/>
-          </a:xfrm>
-          <a:prstGeom prst="roundRect">
-            <a:avLst>
-              <a:gd name="adj" fmla="val 3000"/>
-            </a:avLst>
-          </a:prstGeom>
-          <a:solidFill>
-            <a:srgbClr val="FFFFFF"/>
-          </a:solidFill>
-          <a:ln w="12700">
-            <a:solidFill>
-              <a:srgbClr val="E3E3DF"/>
-            </a:solidFill>
-            <a:prstDash val="solid"/>
-          </a:ln>
-          <a:effectLst>
-            <a:outerShdw sx="100000" sy="100000" kx="0" ky="0" algn="bl" rotWithShape="0" blurRad="76200" dist="12700" dir="5400000">
-              <a:srgbClr val="9A9A95">
-                <a:alpha val="18000"/>
-              </a:srgbClr>
-            </a:outerShdw>
-          </a:effectLst>
-        </p:spPr>
-      </p:sp>
-      <p:sp>
-        <p:nvSpPr>
-          <p:cNvPr id="11" name="Text 9"/>
-          <p:cNvSpPr txBox="1"/>
-          <p:nvPr/>
-        </p:nvSpPr>
-        <p:spPr>
-          <a:xfrm>
-            <a:off x="8183880" y="1664208"/>
-            <a:ext cx="3200400" cy="274320"/>
-          </a:xfrm>
-          <a:prstGeom prst="rect">
-            <a:avLst/>
-          </a:prstGeom>
-          <a:noFill/>
-          <a:ln/>
-        </p:spPr>
-        <p:txBody>
-          <a:bodyPr wrap="square" lIns="0" tIns="0" rIns="0" bIns="0" rtlCol="0" anchor="ctr"/>
-          <a:lstStyle/>
-          <a:p>
-            <a:pPr indent="0" marL="0">
-              <a:buNone/>
-            </a:pPr>
-            <a:r>
-              <a:rPr lang="en-US" sz="1500" b="1" dirty="0">
-                <a:solidFill>
-                  <a:srgbClr val="23272E"/>
-                </a:solidFill>
-                <a:latin typeface="Cambria" pitchFamily="34" charset="0"/>
-                <a:ea typeface="Cambria" pitchFamily="34" charset="-122"/>
-                <a:cs typeface="Cambria" pitchFamily="34" charset="-120"/>
-              </a:rPr>
-              <a:t>A wider unit is pointless</a:t>
-            </a:r>
-            <a:endParaRPr lang="en-US" sz="1500" dirty="0"/>
-          </a:p>
-        </p:txBody>
-      </p:sp>
-      <p:sp>
-        <p:nvSpPr>
-          <p:cNvPr id="12" name="Text 10"/>
-          <p:cNvSpPr txBox="1"/>
-          <p:nvPr/>
-        </p:nvSpPr>
-        <p:spPr>
-          <a:xfrm>
-            <a:off x="8183880" y="2011680"/>
-            <a:ext cx="3200400" cy="1097280"/>
-          </a:xfrm>
-          <a:prstGeom prst="rect">
-            <a:avLst/>
-          </a:prstGeom>
-          <a:noFill/>
-          <a:ln/>
-        </p:spPr>
-        <p:txBody>
-          <a:bodyPr wrap="square" lIns="0" tIns="0" rIns="0" bIns="0" rtlCol="0" anchor="ctr"/>
-          <a:lstStyle/>
-          <a:p>
-            <a:pPr indent="0" marL="0">
-              <a:buNone/>
-            </a:pPr>
-            <a:r>
-              <a:rPr lang="en-US" sz="1200" dirty="0">
-                <a:solidFill>
-                  <a:srgbClr val="23272E"/>
-                </a:solidFill>
-                <a:latin typeface="Calibri" pitchFamily="34" charset="0"/>
-                <a:ea typeface="Calibri" pitchFamily="34" charset="-122"/>
-                <a:cs typeface="Calibri" pitchFamily="34" charset="-120"/>
-              </a:rPr>
-              <a:t>A 9-wide array would cut 0.97 ms to 0.077 ms — and change the end-to-end result by well under 1 %.</a:t>
-            </a:r>
-            <a:endParaRPr lang="en-US" sz="1200" dirty="0"/>
-          </a:p>
-        </p:txBody>
-      </p:sp>
-      <p:sp>
-        <p:nvSpPr>
-          <p:cNvPr id="13" name="Text 11"/>
-          <p:cNvSpPr txBox="1"/>
-          <p:nvPr/>
-        </p:nvSpPr>
-        <p:spPr>
-          <a:xfrm>
-            <a:off x="594360" y="3611880"/>
-            <a:ext cx="10881360" cy="411480"/>
-          </a:xfrm>
-          <a:prstGeom prst="rect">
-            <a:avLst/>
-          </a:prstGeom>
-          <a:noFill/>
-          <a:ln/>
-        </p:spPr>
-        <p:txBody>
-          <a:bodyPr wrap="square" lIns="0" tIns="0" rIns="0" bIns="0" rtlCol="0" anchor="ctr"/>
-          <a:lstStyle/>
-          <a:p>
-            <a:pPr indent="0" marL="0">
-              <a:buNone/>
-            </a:pPr>
-            <a:r>
-              <a:rPr lang="en-US" sz="2100" b="1" dirty="0">
-                <a:solidFill>
-                  <a:srgbClr val="23272E"/>
-                </a:solidFill>
-                <a:latin typeface="Cambria" pitchFamily="34" charset="0"/>
-                <a:ea typeface="Cambria" pitchFamily="34" charset="-122"/>
-                <a:cs typeface="Cambria" pitchFamily="34" charset="-120"/>
-              </a:rPr>
-              <a:t>Making the arithmetic free does not make the program fast.</a:t>
-            </a:r>
-            <a:endParaRPr lang="en-US" sz="2100" dirty="0"/>
-          </a:p>
-        </p:txBody>
-      </p:sp>
-      <p:sp>
-        <p:nvSpPr>
-          <p:cNvPr id="14" name="Text 12"/>
-          <p:cNvSpPr txBox="1"/>
-          <p:nvPr/>
-        </p:nvSpPr>
-        <p:spPr>
-          <a:xfrm>
-            <a:off x="594360" y="4023360"/>
-            <a:ext cx="10881360" cy="1554480"/>
-          </a:xfrm>
-          <a:prstGeom prst="rect">
-            <a:avLst/>
-          </a:prstGeom>
-          <a:noFill/>
-          <a:ln/>
-        </p:spPr>
-        <p:txBody>
-          <a:bodyPr wrap="square" lIns="0" tIns="0" rIns="0" bIns="0" rtlCol="0" anchor="ctr"/>
-          <a:lstStyle/>
-          <a:p>
-            <a:pPr indent="0" marL="0">
-              <a:lnSpc>
-                <a:spcPct val="115000"/>
-              </a:lnSpc>
-              <a:buNone/>
-            </a:pPr>
-            <a:r>
-              <a:rPr lang="en-US" sz="1400" dirty="0">
-                <a:solidFill>
-                  <a:srgbClr val="23272E"/>
-                </a:solidFill>
-                <a:latin typeface="Calibri" pitchFamily="34" charset="0"/>
-                <a:ea typeface="Calibri" pitchFamily="34" charset="-122"/>
-                <a:cs typeface="Calibri" pitchFamily="34" charset="-120"/>
-              </a:rPr>
-              <a:t>The accelerator removes essentially all of the geometry cost, and Amdahl still caps the benefit at 1.39×, because 72 % of the program is other Python. Once you have offloaded a hotspot, the bottleneck is what you did NOT offload.</a:t>
-            </a:r>
-            <a:endParaRPr lang="en-US" sz="1400" dirty="0"/>
-          </a:p>
-          <a:p>
-            <a:pPr indent="0" marL="0">
-              <a:lnSpc>
-                <a:spcPct val="115000"/>
-              </a:lnSpc>
-              <a:buNone/>
-            </a:pPr>
-            <a:endParaRPr lang="en-US" sz="1400" dirty="0"/>
-          </a:p>
-          <a:p>
-            <a:pPr indent="0" marL="0">
-              <a:lnSpc>
-                <a:spcPct val="115000"/>
-              </a:lnSpc>
-              <a:buNone/>
-            </a:pPr>
-            <a:r>
-              <a:rPr lang="en-US" sz="1400" dirty="0">
-                <a:solidFill>
-                  <a:srgbClr val="23272E"/>
-                </a:solidFill>
-                <a:latin typeface="Calibri" pitchFamily="34" charset="0"/>
-                <a:ea typeface="Calibri" pitchFamily="34" charset="-122"/>
-                <a:cs typeface="Calibri" pitchFamily="34" charset="-120"/>
-              </a:rPr>
-              <a:t>So the way forward is not more multipliers — it is a LARGER offload. Moving the whole traversal loop (rayColour 10.1 %, _lightIsVisible 6.2 %, the half-space test 2.3 %) raises the offloadable fraction to ~47 % and the ceiling to 1.88×. That is a data-movement argument, not an arithmetic one.</a:t>
-            </a:r>
-            <a:endParaRPr lang="en-US" sz="1400" dirty="0"/>
-          </a:p>
-        </p:txBody>
-      </p:sp>
-      <p:sp>
-        <p:nvSpPr>
-          <p:cNvPr id="15" name="Text 13"/>
-          <p:cNvSpPr txBox="1"/>
-          <p:nvPr/>
-        </p:nvSpPr>
-        <p:spPr>
-          <a:xfrm>
-            <a:off x="594360" y="5715000"/>
-            <a:ext cx="10881360" cy="365760"/>
-          </a:xfrm>
-          <a:prstGeom prst="rect">
-            <a:avLst/>
-          </a:prstGeom>
-          <a:noFill/>
-          <a:ln/>
-        </p:spPr>
-        <p:txBody>
-          <a:bodyPr wrap="square" lIns="0" tIns="0" rIns="0" bIns="0" rtlCol="0" anchor="ctr"/>
-          <a:lstStyle/>
-          <a:p>
-            <a:pPr indent="0" marL="0">
-              <a:buNone/>
-            </a:pPr>
-            <a:r>
-              <a:rPr lang="en-US" sz="1150" i="1" dirty="0">
-                <a:solidFill>
-                  <a:srgbClr val="6B7280"/>
-                </a:solidFill>
-                <a:latin typeface="Calibri" pitchFamily="34" charset="0"/>
-                <a:ea typeface="Calibri" pitchFamily="34" charset="-122"/>
-                <a:cs typeface="Calibri" pitchFamily="34" charset="-120"/>
-              </a:rPr>
-              <a:t>Caveat we state in the report: cProfile inflates frequently-called functions, so 28.1 % is likely an over-estimate — which makes 1.39× optimistic, not conservative.</a:t>
-            </a:r>
-            <a:endParaRPr lang="en-US" sz="1150" dirty="0"/>
           </a:p>
         </p:txBody>
       </p:sp>
@@ -10283,7 +11102,7 @@
                 <a:ea typeface="Calibri" pitchFamily="34" charset="-122"/>
                 <a:cs typeface="Calibri" pitchFamily="34" charset="-120"/>
               </a:rPr>
-              <a:t>TRADE-OFFS</a:t>
+              <a:t>EXPECTED PERFORMANCE</a:t>
             </a:r>
             <a:endParaRPr lang="en-US" sz="1100" dirty="0"/>
           </a:p>
@@ -10322,7 +11141,7 @@
                 <a:ea typeface="Cambria" pitchFamily="34" charset="-122"/>
                 <a:cs typeface="Cambria" pitchFamily="34" charset="-120"/>
               </a:rPr>
-              <a:t>Performance, area and power</a:t>
+              <a:t>The honest ceiling</a:t>
             </a:r>
             <a:endParaRPr lang="en-US" sz="3200" dirty="0"/>
           </a:p>
@@ -10337,11 +11156,235 @@
         <p:spPr>
           <a:xfrm>
             <a:off x="594360" y="1463040"/>
-            <a:ext cx="3538728" cy="3840480"/>
+            <a:ext cx="3429000" cy="1828800"/>
           </a:xfrm>
           <a:prstGeom prst="roundRect">
             <a:avLst>
-              <a:gd name="adj" fmla="val 1550"/>
+              <a:gd name="adj" fmla="val 3000"/>
+            </a:avLst>
+          </a:prstGeom>
+          <a:solidFill>
+            <a:srgbClr val="EAF5F5"/>
+          </a:solidFill>
+          <a:ln w="12700">
+            <a:solidFill>
+              <a:srgbClr val="E3E3DF"/>
+            </a:solidFill>
+            <a:prstDash val="solid"/>
+          </a:ln>
+          <a:effectLst>
+            <a:outerShdw sx="100000" sy="100000" kx="0" ky="0" algn="bl" rotWithShape="0" blurRad="76200" dist="12700" dir="5400000">
+              <a:srgbClr val="9A9A95">
+                <a:alpha val="18000"/>
+              </a:srgbClr>
+            </a:outerShdw>
+          </a:effectLst>
+        </p:spPr>
+      </p:sp>
+      <p:sp>
+        <p:nvSpPr>
+          <p:cNvPr id="5" name="Text 3"/>
+          <p:cNvSpPr txBox="1"/>
+          <p:nvPr/>
+        </p:nvSpPr>
+        <p:spPr>
+          <a:xfrm>
+            <a:off x="822960" y="1691640"/>
+            <a:ext cx="3017520" cy="457200"/>
+          </a:xfrm>
+          <a:prstGeom prst="rect">
+            <a:avLst/>
+          </a:prstGeom>
+          <a:noFill/>
+          <a:ln/>
+        </p:spPr>
+        <p:txBody>
+          <a:bodyPr wrap="square" lIns="0" tIns="0" rIns="0" bIns="0" rtlCol="0" anchor="ctr"/>
+          <a:lstStyle/>
+          <a:p>
+            <a:pPr indent="0" marL="0">
+              <a:buNone/>
+            </a:pPr>
+            <a:r>
+              <a:rPr lang="en-US" sz="2100" b="1" dirty="0">
+                <a:solidFill>
+                  <a:srgbClr val="2D9596"/>
+                </a:solidFill>
+                <a:latin typeface="Cambria" pitchFamily="34" charset="0"/>
+                <a:ea typeface="Cambria" pitchFamily="34" charset="-122"/>
+                <a:cs typeface="Cambria" pitchFamily="34" charset="-120"/>
+              </a:rPr>
+              <a:t>~88 ms  →  ~1 ms</a:t>
+            </a:r>
+            <a:endParaRPr lang="en-US" sz="2100" dirty="0"/>
+          </a:p>
+        </p:txBody>
+      </p:sp>
+      <p:sp>
+        <p:nvSpPr>
+          <p:cNvPr id="6" name="Text 4"/>
+          <p:cNvSpPr txBox="1"/>
+          <p:nvPr/>
+        </p:nvSpPr>
+        <p:spPr>
+          <a:xfrm>
+            <a:off x="822960" y="2194560"/>
+            <a:ext cx="3017520" cy="914400"/>
+          </a:xfrm>
+          <a:prstGeom prst="rect">
+            <a:avLst/>
+          </a:prstGeom>
+          <a:noFill/>
+          <a:ln/>
+        </p:spPr>
+        <p:txBody>
+          <a:bodyPr wrap="square" lIns="0" tIns="0" rIns="0" bIns="0" rtlCol="0" anchor="ctr"/>
+          <a:lstStyle/>
+          <a:p>
+            <a:pPr indent="0" marL="0">
+              <a:buNone/>
+            </a:pPr>
+            <a:r>
+              <a:rPr lang="en-US" sz="1200" dirty="0">
+                <a:solidFill>
+                  <a:srgbClr val="23272E"/>
+                </a:solidFill>
+                <a:latin typeface="Calibri" pitchFamily="34" charset="0"/>
+                <a:ea typeface="Calibri" pitchFamily="34" charset="-122"/>
+                <a:cs typeface="Calibri" pitchFamily="34" charset="-120"/>
+              </a:rPr>
+              <a:t>time spent in intersectionTime, replaced by 194,790 cycles at 200 MHz</a:t>
+            </a:r>
+            <a:endParaRPr lang="en-US" sz="1200" dirty="0"/>
+          </a:p>
+        </p:txBody>
+      </p:sp>
+      <p:sp>
+        <p:nvSpPr>
+          <p:cNvPr id="7" name="Shape 5"/>
+          <p:cNvSpPr/>
+          <p:nvPr/>
+        </p:nvSpPr>
+        <p:spPr>
+          <a:xfrm>
+            <a:off x="4251960" y="1463040"/>
+            <a:ext cx="3429000" cy="1828800"/>
+          </a:xfrm>
+          <a:prstGeom prst="roundRect">
+            <a:avLst>
+              <a:gd name="adj" fmla="val 3000"/>
+            </a:avLst>
+          </a:prstGeom>
+          <a:solidFill>
+            <a:srgbClr val="FDF1EC"/>
+          </a:solidFill>
+          <a:ln w="12700">
+            <a:solidFill>
+              <a:srgbClr val="E3E3DF"/>
+            </a:solidFill>
+            <a:prstDash val="solid"/>
+          </a:ln>
+          <a:effectLst>
+            <a:outerShdw sx="100000" sy="100000" kx="0" ky="0" algn="bl" rotWithShape="0" blurRad="76200" dist="12700" dir="5400000">
+              <a:srgbClr val="9A9A95">
+                <a:alpha val="18000"/>
+              </a:srgbClr>
+            </a:outerShdw>
+          </a:effectLst>
+        </p:spPr>
+      </p:sp>
+      <p:sp>
+        <p:nvSpPr>
+          <p:cNvPr id="8" name="Text 6"/>
+          <p:cNvSpPr txBox="1"/>
+          <p:nvPr/>
+        </p:nvSpPr>
+        <p:spPr>
+          <a:xfrm>
+            <a:off x="4480560" y="1645920"/>
+            <a:ext cx="3017520" cy="594360"/>
+          </a:xfrm>
+          <a:prstGeom prst="rect">
+            <a:avLst/>
+          </a:prstGeom>
+          <a:noFill/>
+          <a:ln/>
+        </p:spPr>
+        <p:txBody>
+          <a:bodyPr wrap="square" lIns="0" tIns="0" rIns="0" bIns="0" rtlCol="0" anchor="ctr"/>
+          <a:lstStyle/>
+          <a:p>
+            <a:pPr indent="0" marL="0">
+              <a:buNone/>
+            </a:pPr>
+            <a:r>
+              <a:rPr lang="en-US" sz="3400" b="1" dirty="0">
+                <a:solidFill>
+                  <a:srgbClr val="E8552D"/>
+                </a:solidFill>
+                <a:latin typeface="Cambria" pitchFamily="34" charset="0"/>
+                <a:ea typeface="Cambria" pitchFamily="34" charset="-122"/>
+                <a:cs typeface="Cambria" pitchFamily="34" charset="-120"/>
+              </a:rPr>
+              <a:t>1.39×</a:t>
+            </a:r>
+            <a:endParaRPr lang="en-US" sz="3400" dirty="0"/>
+          </a:p>
+        </p:txBody>
+      </p:sp>
+      <p:sp>
+        <p:nvSpPr>
+          <p:cNvPr id="9" name="Text 7"/>
+          <p:cNvSpPr txBox="1"/>
+          <p:nvPr/>
+        </p:nvSpPr>
+        <p:spPr>
+          <a:xfrm>
+            <a:off x="4480560" y="2240280"/>
+            <a:ext cx="3017520" cy="822960"/>
+          </a:xfrm>
+          <a:prstGeom prst="rect">
+            <a:avLst/>
+          </a:prstGeom>
+          <a:noFill/>
+          <a:ln/>
+        </p:spPr>
+        <p:txBody>
+          <a:bodyPr wrap="square" lIns="0" tIns="0" rIns="0" bIns="0" rtlCol="0" anchor="ctr"/>
+          <a:lstStyle/>
+          <a:p>
+            <a:pPr indent="0" marL="0">
+              <a:buNone/>
+            </a:pPr>
+            <a:r>
+              <a:rPr lang="en-US" sz="1200" dirty="0">
+                <a:solidFill>
+                  <a:srgbClr val="23272E"/>
+                </a:solidFill>
+                <a:latin typeface="Calibri" pitchFamily="34" charset="0"/>
+                <a:ea typeface="Calibri" pitchFamily="34" charset="-122"/>
+                <a:cs typeface="Calibri" pitchFamily="34" charset="-120"/>
+              </a:rPr>
+              <a:t>maximum end-to-end speedup.  S = 1 / (1 − 0.281)</a:t>
+            </a:r>
+            <a:endParaRPr lang="en-US" sz="1200" dirty="0"/>
+          </a:p>
+        </p:txBody>
+      </p:sp>
+      <p:sp>
+        <p:nvSpPr>
+          <p:cNvPr id="10" name="Shape 8"/>
+          <p:cNvSpPr/>
+          <p:nvPr/>
+        </p:nvSpPr>
+        <p:spPr>
+          <a:xfrm>
+            <a:off x="7955280" y="1463040"/>
+            <a:ext cx="3611880" cy="1828800"/>
+          </a:xfrm>
+          <a:prstGeom prst="roundRect">
+            <a:avLst>
+              <a:gd name="adj" fmla="val 3000"/>
             </a:avLst>
           </a:prstGeom>
           <a:solidFill>
@@ -10364,14 +11407,14 @@
       </p:sp>
       <p:sp>
         <p:nvSpPr>
-          <p:cNvPr id="5" name="Text 3"/>
+          <p:cNvPr id="11" name="Text 9"/>
           <p:cNvSpPr txBox="1"/>
           <p:nvPr/>
         </p:nvSpPr>
         <p:spPr>
           <a:xfrm>
-            <a:off x="850392" y="1664208"/>
-            <a:ext cx="3017520" cy="320040"/>
+            <a:off x="8183880" y="1664208"/>
+            <a:ext cx="3200400" cy="274320"/>
           </a:xfrm>
           <a:prstGeom prst="rect">
             <a:avLst/>
@@ -10387,30 +11430,108 @@
               <a:buNone/>
             </a:pPr>
             <a:r>
-              <a:rPr lang="en-US" sz="1700" b="1" dirty="0">
-                <a:solidFill>
-                  <a:srgbClr val="2D9596"/>
+              <a:rPr lang="en-US" sz="1500" b="1" dirty="0">
+                <a:solidFill>
+                  <a:srgbClr val="23272E"/>
                 </a:solidFill>
                 <a:latin typeface="Cambria" pitchFamily="34" charset="0"/>
                 <a:ea typeface="Cambria" pitchFamily="34" charset="-122"/>
                 <a:cs typeface="Cambria" pitchFamily="34" charset="-120"/>
               </a:rPr>
-              <a:t>Area</a:t>
-            </a:r>
-            <a:endParaRPr lang="en-US" sz="1700" dirty="0"/>
-          </a:p>
-        </p:txBody>
-      </p:sp>
-      <p:sp>
-        <p:nvSpPr>
-          <p:cNvPr id="6" name="Text 4"/>
+              <a:t>A wider unit is pointless</a:t>
+            </a:r>
+            <a:endParaRPr lang="en-US" sz="1500" dirty="0"/>
+          </a:p>
+        </p:txBody>
+      </p:sp>
+      <p:sp>
+        <p:nvSpPr>
+          <p:cNvPr id="12" name="Text 10"/>
           <p:cNvSpPr txBox="1"/>
           <p:nvPr/>
         </p:nvSpPr>
         <p:spPr>
           <a:xfrm>
-            <a:off x="850392" y="2084832"/>
-            <a:ext cx="3017520" cy="3017520"/>
+            <a:off x="8183880" y="2011680"/>
+            <a:ext cx="3200400" cy="1097280"/>
+          </a:xfrm>
+          <a:prstGeom prst="rect">
+            <a:avLst/>
+          </a:prstGeom>
+          <a:noFill/>
+          <a:ln/>
+        </p:spPr>
+        <p:txBody>
+          <a:bodyPr wrap="square" lIns="0" tIns="0" rIns="0" bIns="0" rtlCol="0" anchor="ctr"/>
+          <a:lstStyle/>
+          <a:p>
+            <a:pPr indent="0" marL="0">
+              <a:buNone/>
+            </a:pPr>
+            <a:r>
+              <a:rPr lang="en-US" sz="1200" dirty="0">
+                <a:solidFill>
+                  <a:srgbClr val="23272E"/>
+                </a:solidFill>
+                <a:latin typeface="Calibri" pitchFamily="34" charset="0"/>
+                <a:ea typeface="Calibri" pitchFamily="34" charset="-122"/>
+                <a:cs typeface="Calibri" pitchFamily="34" charset="-120"/>
+              </a:rPr>
+              <a:t>A 9-wide array would cut 0.97 ms to 0.077 ms — and change the end-to-end result by well under 1 %.</a:t>
+            </a:r>
+            <a:endParaRPr lang="en-US" sz="1200" dirty="0"/>
+          </a:p>
+        </p:txBody>
+      </p:sp>
+      <p:sp>
+        <p:nvSpPr>
+          <p:cNvPr id="13" name="Text 11"/>
+          <p:cNvSpPr txBox="1"/>
+          <p:nvPr/>
+        </p:nvSpPr>
+        <p:spPr>
+          <a:xfrm>
+            <a:off x="594360" y="3611880"/>
+            <a:ext cx="10881360" cy="411480"/>
+          </a:xfrm>
+          <a:prstGeom prst="rect">
+            <a:avLst/>
+          </a:prstGeom>
+          <a:noFill/>
+          <a:ln/>
+        </p:spPr>
+        <p:txBody>
+          <a:bodyPr wrap="square" lIns="0" tIns="0" rIns="0" bIns="0" rtlCol="0" anchor="ctr"/>
+          <a:lstStyle/>
+          <a:p>
+            <a:pPr indent="0" marL="0">
+              <a:buNone/>
+            </a:pPr>
+            <a:r>
+              <a:rPr lang="en-US" sz="2100" b="1" dirty="0">
+                <a:solidFill>
+                  <a:srgbClr val="23272E"/>
+                </a:solidFill>
+                <a:latin typeface="Cambria" pitchFamily="34" charset="0"/>
+                <a:ea typeface="Cambria" pitchFamily="34" charset="-122"/>
+                <a:cs typeface="Cambria" pitchFamily="34" charset="-120"/>
+              </a:rPr>
+              <a:t>Making the arithmetic free does not make the program fast.</a:t>
+            </a:r>
+            <a:endParaRPr lang="en-US" sz="2100" dirty="0"/>
+          </a:p>
+        </p:txBody>
+      </p:sp>
+      <p:sp>
+        <p:nvSpPr>
+          <p:cNvPr id="14" name="Text 12"/>
+          <p:cNvSpPr txBox="1"/>
+          <p:nvPr/>
+        </p:nvSpPr>
+        <p:spPr>
+          <a:xfrm>
+            <a:off x="594360" y="4023360"/>
+            <a:ext cx="10881360" cy="1554480"/>
           </a:xfrm>
           <a:prstGeom prst="rect">
             <a:avLst/>
@@ -10429,7 +11550,7 @@
               <a:buNone/>
             </a:pPr>
             <a:r>
-              <a:rPr lang="en-US" sz="1150" dirty="0">
+              <a:rPr lang="en-US" sz="1400" dirty="0">
                 <a:solidFill>
                   <a:srgbClr val="23272E"/>
                 </a:solidFill>
@@ -10437,9 +11558,9 @@
                 <a:ea typeface="Calibri" pitchFamily="34" charset="-122"/>
                 <a:cs typeface="Calibri" pitchFamily="34" charset="-120"/>
               </a:rPr>
-              <a:t>9 signed 32×32 multipliers (~9 DSP blocks)</a:t>
-            </a:r>
-            <a:endParaRPr lang="en-US" sz="1150" dirty="0"/>
+              <a:t>The accelerator removes essentially all of the geometry cost, and Amdahl still caps the benefit at 1.39×, because 72 % of the program is other Python. Once you have offloaded a hotspot, the bottleneck is what you did NOT offload.</a:t>
+            </a:r>
+            <a:endParaRPr lang="en-US" sz="1400" dirty="0"/>
           </a:p>
           <a:p>
             <a:pPr indent="0" marL="0">
@@ -10448,8 +11569,17 @@
               </a:lnSpc>
               <a:buNone/>
             </a:pPr>
-            <a:r>
-              <a:rPr lang="en-US" sz="1150" dirty="0">
+            <a:endParaRPr lang="en-US" sz="1400" dirty="0"/>
+          </a:p>
+          <a:p>
+            <a:pPr indent="0" marL="0">
+              <a:lnSpc>
+                <a:spcPct val="115000"/>
+              </a:lnSpc>
+              <a:buNone/>
+            </a:pPr>
+            <a:r>
+              <a:rPr lang="en-US" sz="1400" dirty="0">
                 <a:solidFill>
                   <a:srgbClr val="23272E"/>
                 </a:solidFill>
@@ -10457,405 +11587,48 @@
                 <a:ea typeface="Calibri" pitchFamily="34" charset="-122"/>
                 <a:cs typeface="Calibri" pitchFamily="34" charset="-120"/>
               </a:rPr>
-              <a:t>24 sqrt stages ≈ 2,400 flip-flops</a:t>
-            </a:r>
-            <a:endParaRPr lang="en-US" sz="1150" dirty="0"/>
-          </a:p>
-          <a:p>
-            <a:pPr indent="0" marL="0">
-              <a:lnSpc>
-                <a:spcPct val="115000"/>
-              </a:lnSpc>
-              <a:buNone/>
-            </a:pPr>
-            <a:r>
-              <a:rPr lang="en-US" sz="1150" dirty="0">
-                <a:solidFill>
-                  <a:srgbClr val="23272E"/>
+              <a:t>So the way forward is not more multipliers — it is a LARGER offload. Moving the whole traversal loop (rayColour 10.1 %, _lightIsVisible 6.2 %, the half-space test 2.3 %) raises the offloadable fraction to ~47 % and the ceiling to 1.88×. That is a data-movement argument, not an arithmetic one.</a:t>
+            </a:r>
+            <a:endParaRPr lang="en-US" sz="1400" dirty="0"/>
+          </a:p>
+        </p:txBody>
+      </p:sp>
+      <p:sp>
+        <p:nvSpPr>
+          <p:cNvPr id="15" name="Text 13"/>
+          <p:cNvSpPr txBox="1"/>
+          <p:nvPr/>
+        </p:nvSpPr>
+        <p:spPr>
+          <a:xfrm>
+            <a:off x="594360" y="5715000"/>
+            <a:ext cx="10881360" cy="365760"/>
+          </a:xfrm>
+          <a:prstGeom prst="rect">
+            <a:avLst/>
+          </a:prstGeom>
+          <a:noFill/>
+          <a:ln/>
+        </p:spPr>
+        <p:txBody>
+          <a:bodyPr wrap="square" lIns="0" tIns="0" rIns="0" bIns="0" rtlCol="0" anchor="ctr"/>
+          <a:lstStyle/>
+          <a:p>
+            <a:pPr indent="0" marL="0">
+              <a:buNone/>
+            </a:pPr>
+            <a:r>
+              <a:rPr lang="en-US" sz="1150" i="1" dirty="0">
+                <a:solidFill>
+                  <a:srgbClr val="6B7280"/>
                 </a:solidFill>
                 <a:latin typeface="Calibri" pitchFamily="34" charset="0"/>
                 <a:ea typeface="Calibri" pitchFamily="34" charset="-122"/>
                 <a:cs typeface="Calibri" pitchFamily="34" charset="-120"/>
               </a:rPr>
-              <a:t>+ ~1,500 for datapath and delay lines</a:t>
+              <a:t>Caveat we state in the report: cProfile inflates frequently-called functions, so 28.1 % is likely an over-estimate — which makes 1.39× optimistic, not conservative.</a:t>
             </a:r>
             <a:endParaRPr lang="en-US" sz="1150" dirty="0"/>
-          </a:p>
-          <a:p>
-            <a:pPr indent="0" marL="0">
-              <a:lnSpc>
-                <a:spcPct val="115000"/>
-              </a:lnSpc>
-              <a:buNone/>
-            </a:pPr>
-            <a:r>
-              <a:rPr lang="en-US" sz="1150" dirty="0">
-                <a:solidFill>
-                  <a:srgbClr val="23272E"/>
-                </a:solidFill>
-                <a:latin typeface="Calibri" pitchFamily="34" charset="0"/>
-                <a:ea typeface="Calibri" pitchFamily="34" charset="-122"/>
-                <a:cs typeface="Calibri" pitchFamily="34" charset="-120"/>
-              </a:rPr>
-              <a:t>two 32-deep FIFOs</a:t>
-            </a:r>
-            <a:endParaRPr lang="en-US" sz="1150" dirty="0"/>
-          </a:p>
-          <a:p>
-            <a:pPr indent="0" marL="0">
-              <a:lnSpc>
-                <a:spcPct val="115000"/>
-              </a:lnSpc>
-              <a:buNone/>
-            </a:pPr>
-            <a:endParaRPr lang="en-US" sz="1150" dirty="0"/>
-          </a:p>
-          <a:p>
-            <a:pPr indent="0" marL="0">
-              <a:lnSpc>
-                <a:spcPct val="115000"/>
-              </a:lnSpc>
-              <a:buNone/>
-            </a:pPr>
-            <a:r>
-              <a:rPr lang="en-US" sz="1150" dirty="0">
-                <a:solidFill>
-                  <a:srgbClr val="23272E"/>
-                </a:solidFill>
-                <a:latin typeface="Calibri" pitchFamily="34" charset="0"/>
-                <a:ea typeface="Calibri" pitchFamily="34" charset="-122"/>
-                <a:cs typeface="Calibri" pitchFamily="34" charset="-120"/>
-              </a:rPr>
-              <a:t>Well under 1 % of a mid-range FPGA.</a:t>
-            </a:r>
-            <a:endParaRPr lang="en-US" sz="1150" dirty="0"/>
-          </a:p>
-        </p:txBody>
-      </p:sp>
-      <p:sp>
-        <p:nvSpPr>
-          <p:cNvPr id="7" name="Shape 5"/>
-          <p:cNvSpPr/>
-          <p:nvPr/>
-        </p:nvSpPr>
-        <p:spPr>
-          <a:xfrm>
-            <a:off x="4288536" y="1463040"/>
-            <a:ext cx="3538728" cy="3840480"/>
-          </a:xfrm>
-          <a:prstGeom prst="roundRect">
-            <a:avLst>
-              <a:gd name="adj" fmla="val 1550"/>
-            </a:avLst>
-          </a:prstGeom>
-          <a:solidFill>
-            <a:srgbClr val="FFFFFF"/>
-          </a:solidFill>
-          <a:ln w="12700">
-            <a:solidFill>
-              <a:srgbClr val="E3E3DF"/>
-            </a:solidFill>
-            <a:prstDash val="solid"/>
-          </a:ln>
-          <a:effectLst>
-            <a:outerShdw sx="100000" sy="100000" kx="0" ky="0" algn="bl" rotWithShape="0" blurRad="76200" dist="12700" dir="5400000">
-              <a:srgbClr val="9A9A95">
-                <a:alpha val="18000"/>
-              </a:srgbClr>
-            </a:outerShdw>
-          </a:effectLst>
-        </p:spPr>
-      </p:sp>
-      <p:sp>
-        <p:nvSpPr>
-          <p:cNvPr id="8" name="Text 6"/>
-          <p:cNvSpPr txBox="1"/>
-          <p:nvPr/>
-        </p:nvSpPr>
-        <p:spPr>
-          <a:xfrm>
-            <a:off x="4544568" y="1664208"/>
-            <a:ext cx="3017520" cy="320040"/>
-          </a:xfrm>
-          <a:prstGeom prst="rect">
-            <a:avLst/>
-          </a:prstGeom>
-          <a:noFill/>
-          <a:ln/>
-        </p:spPr>
-        <p:txBody>
-          <a:bodyPr wrap="square" lIns="0" tIns="0" rIns="0" bIns="0" rtlCol="0" anchor="ctr"/>
-          <a:lstStyle/>
-          <a:p>
-            <a:pPr indent="0" marL="0">
-              <a:buNone/>
-            </a:pPr>
-            <a:r>
-              <a:rPr lang="en-US" sz="1700" b="1" dirty="0">
-                <a:solidFill>
-                  <a:srgbClr val="E8552D"/>
-                </a:solidFill>
-                <a:latin typeface="Cambria" pitchFamily="34" charset="0"/>
-                <a:ea typeface="Cambria" pitchFamily="34" charset="-122"/>
-                <a:cs typeface="Cambria" pitchFamily="34" charset="-120"/>
-              </a:rPr>
-              <a:t>The expensive decision</a:t>
-            </a:r>
-            <a:endParaRPr lang="en-US" sz="1700" dirty="0"/>
-          </a:p>
-        </p:txBody>
-      </p:sp>
-      <p:sp>
-        <p:nvSpPr>
-          <p:cNvPr id="9" name="Text 7"/>
-          <p:cNvSpPr txBox="1"/>
-          <p:nvPr/>
-        </p:nvSpPr>
-        <p:spPr>
-          <a:xfrm>
-            <a:off x="4544568" y="2084832"/>
-            <a:ext cx="3017520" cy="3017520"/>
-          </a:xfrm>
-          <a:prstGeom prst="rect">
-            <a:avLst/>
-          </a:prstGeom>
-          <a:noFill/>
-          <a:ln/>
-        </p:spPr>
-        <p:txBody>
-          <a:bodyPr wrap="square" lIns="0" tIns="0" rIns="0" bIns="0" rtlCol="0" anchor="ctr"/>
-          <a:lstStyle/>
-          <a:p>
-            <a:pPr indent="0" marL="0">
-              <a:lnSpc>
-                <a:spcPct val="115000"/>
-              </a:lnSpc>
-              <a:buNone/>
-            </a:pPr>
-            <a:r>
-              <a:rPr lang="en-US" sz="1150" dirty="0">
-                <a:solidFill>
-                  <a:srgbClr val="23272E"/>
-                </a:solidFill>
-                <a:latin typeface="Calibri" pitchFamily="34" charset="0"/>
-                <a:ea typeface="Calibri" pitchFamily="34" charset="-122"/>
-                <a:cs typeface="Calibri" pitchFamily="34" charset="-120"/>
-              </a:rPr>
-              <a:t>Squaring v at full width to survive the cancellation turns one 32×32 multiply into a 64×64 — 4× the multiplier area.</a:t>
-            </a:r>
-            <a:endParaRPr lang="en-US" sz="1150" dirty="0"/>
-          </a:p>
-          <a:p>
-            <a:pPr indent="0" marL="0">
-              <a:lnSpc>
-                <a:spcPct val="115000"/>
-              </a:lnSpc>
-              <a:buNone/>
-            </a:pPr>
-            <a:endParaRPr lang="en-US" sz="1150" dirty="0"/>
-          </a:p>
-          <a:p>
-            <a:pPr indent="0" marL="0">
-              <a:lnSpc>
-                <a:spcPct val="115000"/>
-              </a:lnSpc>
-              <a:buNone/>
-            </a:pPr>
-            <a:r>
-              <a:rPr lang="en-US" sz="1150" dirty="0">
-                <a:solidFill>
-                  <a:srgbClr val="23272E"/>
-                </a:solidFill>
-                <a:latin typeface="Calibri" pitchFamily="34" charset="0"/>
-                <a:ea typeface="Calibri" pitchFamily="34" charset="-122"/>
-                <a:cs typeface="Calibri" pitchFamily="34" charset="-120"/>
-              </a:rPr>
-              <a:t>Q2.30 ray directions would let it revert to 32×32 AND improve accuracy: the better numerical choice is also the cheaper one.</a:t>
-            </a:r>
-            <a:endParaRPr lang="en-US" sz="1150" dirty="0"/>
-          </a:p>
-        </p:txBody>
-      </p:sp>
-      <p:sp>
-        <p:nvSpPr>
-          <p:cNvPr id="10" name="Shape 8"/>
-          <p:cNvSpPr/>
-          <p:nvPr/>
-        </p:nvSpPr>
-        <p:spPr>
-          <a:xfrm>
-            <a:off x="7982712" y="1463040"/>
-            <a:ext cx="3538728" cy="3840480"/>
-          </a:xfrm>
-          <a:prstGeom prst="roundRect">
-            <a:avLst>
-              <a:gd name="adj" fmla="val 1550"/>
-            </a:avLst>
-          </a:prstGeom>
-          <a:solidFill>
-            <a:srgbClr val="FFFFFF"/>
-          </a:solidFill>
-          <a:ln w="12700">
-            <a:solidFill>
-              <a:srgbClr val="E3E3DF"/>
-            </a:solidFill>
-            <a:prstDash val="solid"/>
-          </a:ln>
-          <a:effectLst>
-            <a:outerShdw sx="100000" sy="100000" kx="0" ky="0" algn="bl" rotWithShape="0" blurRad="76200" dist="12700" dir="5400000">
-              <a:srgbClr val="9A9A95">
-                <a:alpha val="18000"/>
-              </a:srgbClr>
-            </a:outerShdw>
-          </a:effectLst>
-        </p:spPr>
-      </p:sp>
-      <p:sp>
-        <p:nvSpPr>
-          <p:cNvPr id="11" name="Text 9"/>
-          <p:cNvSpPr txBox="1"/>
-          <p:nvPr/>
-        </p:nvSpPr>
-        <p:spPr>
-          <a:xfrm>
-            <a:off x="8238744" y="1664208"/>
-            <a:ext cx="3017520" cy="320040"/>
-          </a:xfrm>
-          <a:prstGeom prst="rect">
-            <a:avLst/>
-          </a:prstGeom>
-          <a:noFill/>
-          <a:ln/>
-        </p:spPr>
-        <p:txBody>
-          <a:bodyPr wrap="square" lIns="0" tIns="0" rIns="0" bIns="0" rtlCol="0" anchor="ctr"/>
-          <a:lstStyle/>
-          <a:p>
-            <a:pPr indent="0" marL="0">
-              <a:buNone/>
-            </a:pPr>
-            <a:r>
-              <a:rPr lang="en-US" sz="1700" b="1" dirty="0">
-                <a:solidFill>
-                  <a:srgbClr val="23272E"/>
-                </a:solidFill>
-                <a:latin typeface="Cambria" pitchFamily="34" charset="0"/>
-                <a:ea typeface="Cambria" pitchFamily="34" charset="-122"/>
-                <a:cs typeface="Cambria" pitchFamily="34" charset="-120"/>
-              </a:rPr>
-              <a:t>Power &amp; frequency</a:t>
-            </a:r>
-            <a:endParaRPr lang="en-US" sz="1700" dirty="0"/>
-          </a:p>
-        </p:txBody>
-      </p:sp>
-      <p:sp>
-        <p:nvSpPr>
-          <p:cNvPr id="12" name="Text 10"/>
-          <p:cNvSpPr txBox="1"/>
-          <p:nvPr/>
-        </p:nvSpPr>
-        <p:spPr>
-          <a:xfrm>
-            <a:off x="8238744" y="2084832"/>
-            <a:ext cx="3017520" cy="3017520"/>
-          </a:xfrm>
-          <a:prstGeom prst="rect">
-            <a:avLst/>
-          </a:prstGeom>
-          <a:noFill/>
-          <a:ln/>
-        </p:spPr>
-        <p:txBody>
-          <a:bodyPr wrap="square" lIns="0" tIns="0" rIns="0" bIns="0" rtlCol="0" anchor="ctr"/>
-          <a:lstStyle/>
-          <a:p>
-            <a:pPr indent="0" marL="0">
-              <a:lnSpc>
-                <a:spcPct val="115000"/>
-              </a:lnSpc>
-              <a:buNone/>
-            </a:pPr>
-            <a:r>
-              <a:rPr lang="en-US" sz="1150" dirty="0">
-                <a:solidFill>
-                  <a:srgbClr val="23272E"/>
-                </a:solidFill>
-                <a:latin typeface="Calibri" pitchFamily="34" charset="0"/>
-                <a:ea typeface="Calibri" pitchFamily="34" charset="-122"/>
-                <a:cs typeface="Calibri" pitchFamily="34" charset="-120"/>
-              </a:rPr>
-              <a:t>No caches, no branch predictor, no register file — the three biggest consumers in a general-purpose core. Every flip-flop toggles for the computation.</a:t>
-            </a:r>
-            <a:endParaRPr lang="en-US" sz="1150" dirty="0"/>
-          </a:p>
-          <a:p>
-            <a:pPr indent="0" marL="0">
-              <a:lnSpc>
-                <a:spcPct val="115000"/>
-              </a:lnSpc>
-              <a:buNone/>
-            </a:pPr>
-            <a:endParaRPr lang="en-US" sz="1150" dirty="0"/>
-          </a:p>
-          <a:p>
-            <a:pPr indent="0" marL="0">
-              <a:lnSpc>
-                <a:spcPct val="115000"/>
-              </a:lnSpc>
-              <a:buNone/>
-            </a:pPr>
-            <a:r>
-              <a:rPr lang="en-US" sz="1150" dirty="0">
-                <a:solidFill>
-                  <a:srgbClr val="23272E"/>
-                </a:solidFill>
-                <a:latin typeface="Calibri" pitchFamily="34" charset="0"/>
-                <a:ea typeface="Calibri" pitchFamily="34" charset="-122"/>
-                <a:cs typeface="Calibri" pitchFamily="34" charset="-120"/>
-              </a:rPr>
-              <a:t>Throughput is 1/cycle regardless of depth, so frequency scales it linearly. Latency (30 cycles = 150 ns at 200 MHz) is hidden by the FIFO.</a:t>
-            </a:r>
-            <a:endParaRPr lang="en-US" sz="1150" dirty="0"/>
-          </a:p>
-        </p:txBody>
-      </p:sp>
-      <p:sp>
-        <p:nvSpPr>
-          <p:cNvPr id="13" name="Text 11"/>
-          <p:cNvSpPr txBox="1"/>
-          <p:nvPr/>
-        </p:nvSpPr>
-        <p:spPr>
-          <a:xfrm>
-            <a:off x="594360" y="5486400"/>
-            <a:ext cx="10881360" cy="640080"/>
-          </a:xfrm>
-          <a:prstGeom prst="rect">
-            <a:avLst/>
-          </a:prstGeom>
-          <a:noFill/>
-          <a:ln/>
-        </p:spPr>
-        <p:txBody>
-          <a:bodyPr wrap="square" lIns="0" tIns="0" rIns="0" bIns="0" rtlCol="0" anchor="ctr"/>
-          <a:lstStyle/>
-          <a:p>
-            <a:pPr indent="0" marL="0">
-              <a:buNone/>
-            </a:pPr>
-            <a:r>
-              <a:rPr lang="en-US" sz="1250" dirty="0">
-                <a:solidFill>
-                  <a:srgbClr val="6B7280"/>
-                </a:solidFill>
-                <a:latin typeface="Calibri" pitchFamily="34" charset="0"/>
-                <a:ea typeface="Calibri" pitchFamily="34" charset="-122"/>
-                <a:cs typeface="Calibri" pitchFamily="34" charset="-120"/>
-              </a:rPr>
-              <a:t>Fixed vs floating point: FP32 would remove the range and cancellation concerns and match Python exactly — at the cost of a much larger multiplier, an FP adder with normalisation, and a far more complex square root. For a bounded scene, fixed point is the better engineering choice, and we quantified exactly what it costs.</a:t>
-            </a:r>
-            <a:endParaRPr lang="en-US" sz="1250" dirty="0"/>
           </a:p>
         </p:txBody>
       </p:sp>
@@ -10873,7 +11646,7 @@
     <p:bg>
       <p:bgPr>
         <a:solidFill>
-          <a:srgbClr val="1A1D23"/>
+          <a:srgbClr val="F7F7F5"/>
         </a:solidFill>
       </p:bgPr>
     </p:bg>
@@ -10899,8 +11672,8 @@
         </p:nvSpPr>
         <p:spPr>
           <a:xfrm>
-            <a:off x="594360" y="731520"/>
-            <a:ext cx="7315200" cy="548640"/>
+            <a:off x="594360" y="310896"/>
+            <a:ext cx="8229600" cy="237744"/>
           </a:xfrm>
           <a:prstGeom prst="rect">
             <a:avLst/>
@@ -10916,15 +11689,54 @@
               <a:buNone/>
             </a:pPr>
             <a:r>
+              <a:rPr lang="en-US" sz="1100" b="1" spc="200" kern="0" dirty="0">
+                <a:solidFill>
+                  <a:srgbClr val="E8552D"/>
+                </a:solidFill>
+                <a:latin typeface="Calibri" pitchFamily="34" charset="0"/>
+                <a:ea typeface="Calibri" pitchFamily="34" charset="-122"/>
+                <a:cs typeface="Calibri" pitchFamily="34" charset="-120"/>
+              </a:rPr>
+              <a:t>TRADE-OFFS</a:t>
+            </a:r>
+            <a:endParaRPr lang="en-US" sz="1100" dirty="0"/>
+          </a:p>
+        </p:txBody>
+      </p:sp>
+      <p:sp>
+        <p:nvSpPr>
+          <p:cNvPr id="3" name="Text 1"/>
+          <p:cNvSpPr txBox="1"/>
+          <p:nvPr/>
+        </p:nvSpPr>
+        <p:spPr>
+          <a:xfrm>
+            <a:off x="594360" y="566928"/>
+            <a:ext cx="10972800" cy="640080"/>
+          </a:xfrm>
+          <a:prstGeom prst="rect">
+            <a:avLst/>
+          </a:prstGeom>
+          <a:noFill/>
+          <a:ln/>
+        </p:spPr>
+        <p:txBody>
+          <a:bodyPr wrap="square" lIns="0" tIns="0" rIns="0" bIns="0" rtlCol="0" anchor="ctr"/>
+          <a:lstStyle/>
+          <a:p>
+            <a:pPr indent="0" marL="0">
+              <a:buNone/>
+            </a:pPr>
+            <a:r>
               <a:rPr lang="en-US" sz="3200" b="1" dirty="0">
                 <a:solidFill>
-                  <a:srgbClr val="FFFFFF"/>
+                  <a:srgbClr val="23272E"/>
                 </a:solidFill>
                 <a:latin typeface="Cambria" pitchFamily="34" charset="0"/>
                 <a:ea typeface="Cambria" pitchFamily="34" charset="-122"/>
                 <a:cs typeface="Cambria" pitchFamily="34" charset="-120"/>
               </a:rPr>
-              <a:t>What we take away</a:t>
+              <a:t>Performance, area and power</a:t>
             </a:r>
             <a:endParaRPr lang="en-US" sz="3200" dirty="0"/>
           </a:p>
@@ -10932,34 +11744,48 @@
       </p:sp>
       <p:sp>
         <p:nvSpPr>
-          <p:cNvPr id="3" name="Shape 1"/>
+          <p:cNvPr id="4" name="Shape 2"/>
           <p:cNvSpPr/>
           <p:nvPr/>
         </p:nvSpPr>
         <p:spPr>
           <a:xfrm>
-            <a:off x="594360" y="1527048"/>
-            <a:ext cx="310896" cy="310896"/>
-          </a:xfrm>
-          <a:prstGeom prst="ellipse">
-            <a:avLst/>
+            <a:off x="594360" y="1463040"/>
+            <a:ext cx="3538728" cy="3840480"/>
+          </a:xfrm>
+          <a:prstGeom prst="roundRect">
+            <a:avLst>
+              <a:gd name="adj" fmla="val 1550"/>
+            </a:avLst>
           </a:prstGeom>
           <a:solidFill>
-            <a:srgbClr val="E8552D"/>
+            <a:srgbClr val="FFFFFF"/>
           </a:solidFill>
-          <a:ln/>
-        </p:spPr>
-      </p:sp>
-      <p:sp>
-        <p:nvSpPr>
-          <p:cNvPr id="4" name="Text 2"/>
+          <a:ln w="12700">
+            <a:solidFill>
+              <a:srgbClr val="E3E3DF"/>
+            </a:solidFill>
+            <a:prstDash val="solid"/>
+          </a:ln>
+          <a:effectLst>
+            <a:outerShdw sx="100000" sy="100000" kx="0" ky="0" algn="bl" rotWithShape="0" blurRad="76200" dist="12700" dir="5400000">
+              <a:srgbClr val="9A9A95">
+                <a:alpha val="18000"/>
+              </a:srgbClr>
+            </a:outerShdw>
+          </a:effectLst>
+        </p:spPr>
+      </p:sp>
+      <p:sp>
+        <p:nvSpPr>
+          <p:cNvPr id="5" name="Text 3"/>
           <p:cNvSpPr txBox="1"/>
           <p:nvPr/>
         </p:nvSpPr>
         <p:spPr>
           <a:xfrm>
-            <a:off x="594360" y="1527048"/>
-            <a:ext cx="310896" cy="310896"/>
+            <a:off x="850392" y="1664208"/>
+            <a:ext cx="3017520" cy="320040"/>
           </a:xfrm>
           <a:prstGeom prst="rect">
             <a:avLst/>
@@ -10971,210 +11797,199 @@
           <a:bodyPr wrap="square" lIns="0" tIns="0" rIns="0" bIns="0" rtlCol="0" anchor="ctr"/>
           <a:lstStyle/>
           <a:p>
-            <a:pPr algn="ctr" indent="0" marL="0">
-              <a:buNone/>
-            </a:pPr>
-            <a:r>
-              <a:rPr lang="en-US" sz="1300" b="1" dirty="0">
-                <a:solidFill>
-                  <a:srgbClr val="FFFFFF"/>
+            <a:pPr indent="0" marL="0">
+              <a:buNone/>
+            </a:pPr>
+            <a:r>
+              <a:rPr lang="en-US" sz="1700" b="1" dirty="0">
+                <a:solidFill>
+                  <a:srgbClr val="2D9596"/>
+                </a:solidFill>
+                <a:latin typeface="Cambria" pitchFamily="34" charset="0"/>
+                <a:ea typeface="Cambria" pitchFamily="34" charset="-122"/>
+                <a:cs typeface="Cambria" pitchFamily="34" charset="-120"/>
+              </a:rPr>
+              <a:t>Area</a:t>
+            </a:r>
+            <a:endParaRPr lang="en-US" sz="1700" dirty="0"/>
+          </a:p>
+        </p:txBody>
+      </p:sp>
+      <p:sp>
+        <p:nvSpPr>
+          <p:cNvPr id="6" name="Text 4"/>
+          <p:cNvSpPr txBox="1"/>
+          <p:nvPr/>
+        </p:nvSpPr>
+        <p:spPr>
+          <a:xfrm>
+            <a:off x="850392" y="2084832"/>
+            <a:ext cx="3017520" cy="3017520"/>
+          </a:xfrm>
+          <a:prstGeom prst="rect">
+            <a:avLst/>
+          </a:prstGeom>
+          <a:noFill/>
+          <a:ln/>
+        </p:spPr>
+        <p:txBody>
+          <a:bodyPr wrap="square" lIns="0" tIns="0" rIns="0" bIns="0" rtlCol="0" anchor="ctr"/>
+          <a:lstStyle/>
+          <a:p>
+            <a:pPr indent="0" marL="0">
+              <a:lnSpc>
+                <a:spcPct val="115000"/>
+              </a:lnSpc>
+              <a:buNone/>
+            </a:pPr>
+            <a:r>
+              <a:rPr lang="en-US" sz="1150" dirty="0">
+                <a:solidFill>
+                  <a:srgbClr val="23272E"/>
                 </a:solidFill>
                 <a:latin typeface="Calibri" pitchFamily="34" charset="0"/>
                 <a:ea typeface="Calibri" pitchFamily="34" charset="-122"/>
                 <a:cs typeface="Calibri" pitchFamily="34" charset="-120"/>
               </a:rPr>
-              <a:t>1</a:t>
-            </a:r>
-            <a:endParaRPr lang="en-US" sz="1300" dirty="0"/>
-          </a:p>
-        </p:txBody>
-      </p:sp>
-      <p:sp>
-        <p:nvSpPr>
-          <p:cNvPr id="5" name="Text 3"/>
-          <p:cNvSpPr txBox="1"/>
-          <p:nvPr/>
-        </p:nvSpPr>
-        <p:spPr>
-          <a:xfrm>
-            <a:off x="1097280" y="1508760"/>
-            <a:ext cx="10332720" cy="274320"/>
-          </a:xfrm>
-          <a:prstGeom prst="rect">
-            <a:avLst/>
-          </a:prstGeom>
-          <a:noFill/>
-          <a:ln/>
-        </p:spPr>
-        <p:txBody>
-          <a:bodyPr wrap="square" lIns="0" tIns="0" rIns="0" bIns="0" rtlCol="0" anchor="ctr"/>
-          <a:lstStyle/>
-          <a:p>
-            <a:pPr indent="0" marL="0">
-              <a:buNone/>
-            </a:pPr>
-            <a:r>
-              <a:rPr lang="en-US" sz="1450" b="1" dirty="0">
-                <a:solidFill>
-                  <a:srgbClr val="FFFFFF"/>
+              <a:t>9 signed 32×32 multipliers (~9 DSP blocks)</a:t>
+            </a:r>
+            <a:endParaRPr lang="en-US" sz="1150" dirty="0"/>
+          </a:p>
+          <a:p>
+            <a:pPr indent="0" marL="0">
+              <a:lnSpc>
+                <a:spcPct val="115000"/>
+              </a:lnSpc>
+              <a:buNone/>
+            </a:pPr>
+            <a:r>
+              <a:rPr lang="en-US" sz="1150" dirty="0">
+                <a:solidFill>
+                  <a:srgbClr val="23272E"/>
                 </a:solidFill>
                 <a:latin typeface="Calibri" pitchFamily="34" charset="0"/>
                 <a:ea typeface="Calibri" pitchFamily="34" charset="-122"/>
                 <a:cs typeface="Calibri" pitchFamily="34" charset="-120"/>
               </a:rPr>
-              <a:t>Both benchmarks beat the requirement</a:t>
-            </a:r>
-            <a:endParaRPr lang="en-US" sz="1450" dirty="0"/>
-          </a:p>
-        </p:txBody>
-      </p:sp>
-      <p:sp>
-        <p:nvSpPr>
-          <p:cNvPr id="6" name="Text 4"/>
-          <p:cNvSpPr txBox="1"/>
-          <p:nvPr/>
-        </p:nvSpPr>
-        <p:spPr>
-          <a:xfrm>
-            <a:off x="1097280" y="1801368"/>
-            <a:ext cx="10332720" cy="502920"/>
-          </a:xfrm>
-          <a:prstGeom prst="rect">
-            <a:avLst/>
-          </a:prstGeom>
-          <a:noFill/>
-          <a:ln/>
-        </p:spPr>
-        <p:txBody>
-          <a:bodyPr wrap="square" lIns="0" tIns="0" rIns="0" bIns="0" rtlCol="0" anchor="ctr"/>
-          <a:lstStyle/>
-          <a:p>
-            <a:pPr indent="0" marL="0">
-              <a:buNone/>
-            </a:pPr>
-            <a:r>
-              <a:rPr lang="en-US" sz="1250" dirty="0">
-                <a:solidFill>
-                  <a:srgbClr val="9AA0A6"/>
+              <a:t>24 sqrt stages ≈ 2,400 flip-flops</a:t>
+            </a:r>
+            <a:endParaRPr lang="en-US" sz="1150" dirty="0"/>
+          </a:p>
+          <a:p>
+            <a:pPr indent="0" marL="0">
+              <a:lnSpc>
+                <a:spcPct val="115000"/>
+              </a:lnSpc>
+              <a:buNone/>
+            </a:pPr>
+            <a:r>
+              <a:rPr lang="en-US" sz="1150" dirty="0">
+                <a:solidFill>
+                  <a:srgbClr val="23272E"/>
                 </a:solidFill>
                 <a:latin typeface="Calibri" pitchFamily="34" charset="0"/>
                 <a:ea typeface="Calibri" pitchFamily="34" charset="-122"/>
                 <a:cs typeface="Calibri" pitchFamily="34" charset="-120"/>
               </a:rPr>
-              <a:t>2.98× and 1.44×, with byte-identical output verified before any number was recorded.</a:t>
-            </a:r>
-            <a:endParaRPr lang="en-US" sz="1250" dirty="0"/>
-          </a:p>
-        </p:txBody>
-      </p:sp>
-      <p:sp>
-        <p:nvSpPr>
-          <p:cNvPr id="7" name="Shape 5"/>
-          <p:cNvSpPr/>
-          <p:nvPr/>
-        </p:nvSpPr>
-        <p:spPr>
-          <a:xfrm>
-            <a:off x="594360" y="2441448"/>
-            <a:ext cx="310896" cy="310896"/>
-          </a:xfrm>
-          <a:prstGeom prst="ellipse">
-            <a:avLst/>
-          </a:prstGeom>
-          <a:solidFill>
-            <a:srgbClr val="E8552D"/>
-          </a:solidFill>
-          <a:ln/>
-        </p:spPr>
-      </p:sp>
-      <p:sp>
-        <p:nvSpPr>
-          <p:cNvPr id="8" name="Text 6"/>
-          <p:cNvSpPr txBox="1"/>
-          <p:nvPr/>
-        </p:nvSpPr>
-        <p:spPr>
-          <a:xfrm>
-            <a:off x="594360" y="2441448"/>
-            <a:ext cx="310896" cy="310896"/>
-          </a:xfrm>
-          <a:prstGeom prst="rect">
-            <a:avLst/>
-          </a:prstGeom>
-          <a:noFill/>
-          <a:ln/>
-        </p:spPr>
-        <p:txBody>
-          <a:bodyPr wrap="square" lIns="0" tIns="0" rIns="0" bIns="0" rtlCol="0" anchor="ctr"/>
-          <a:lstStyle/>
-          <a:p>
-            <a:pPr algn="ctr" indent="0" marL="0">
-              <a:buNone/>
-            </a:pPr>
-            <a:r>
-              <a:rPr lang="en-US" sz="1300" b="1" dirty="0">
-                <a:solidFill>
-                  <a:srgbClr val="FFFFFF"/>
+              <a:t>+ ~1,500 for datapath and delay lines</a:t>
+            </a:r>
+            <a:endParaRPr lang="en-US" sz="1150" dirty="0"/>
+          </a:p>
+          <a:p>
+            <a:pPr indent="0" marL="0">
+              <a:lnSpc>
+                <a:spcPct val="115000"/>
+              </a:lnSpc>
+              <a:buNone/>
+            </a:pPr>
+            <a:r>
+              <a:rPr lang="en-US" sz="1150" dirty="0">
+                <a:solidFill>
+                  <a:srgbClr val="23272E"/>
                 </a:solidFill>
                 <a:latin typeface="Calibri" pitchFamily="34" charset="0"/>
                 <a:ea typeface="Calibri" pitchFamily="34" charset="-122"/>
                 <a:cs typeface="Calibri" pitchFamily="34" charset="-120"/>
               </a:rPr>
-              <a:t>2</a:t>
-            </a:r>
-            <a:endParaRPr lang="en-US" sz="1300" dirty="0"/>
-          </a:p>
-        </p:txBody>
-      </p:sp>
-      <p:sp>
-        <p:nvSpPr>
-          <p:cNvPr id="9" name="Text 7"/>
-          <p:cNvSpPr txBox="1"/>
-          <p:nvPr/>
-        </p:nvSpPr>
-        <p:spPr>
-          <a:xfrm>
-            <a:off x="1097280" y="2423160"/>
-            <a:ext cx="10332720" cy="274320"/>
-          </a:xfrm>
-          <a:prstGeom prst="rect">
-            <a:avLst/>
-          </a:prstGeom>
-          <a:noFill/>
-          <a:ln/>
-        </p:spPr>
-        <p:txBody>
-          <a:bodyPr wrap="square" lIns="0" tIns="0" rIns="0" bIns="0" rtlCol="0" anchor="ctr"/>
-          <a:lstStyle/>
-          <a:p>
-            <a:pPr indent="0" marL="0">
-              <a:buNone/>
-            </a:pPr>
-            <a:r>
-              <a:rPr lang="en-US" sz="1450" b="1" dirty="0">
-                <a:solidFill>
-                  <a:srgbClr val="FFFFFF"/>
+              <a:t>two 32-deep FIFOs</a:t>
+            </a:r>
+            <a:endParaRPr lang="en-US" sz="1150" dirty="0"/>
+          </a:p>
+          <a:p>
+            <a:pPr indent="0" marL="0">
+              <a:lnSpc>
+                <a:spcPct val="115000"/>
+              </a:lnSpc>
+              <a:buNone/>
+            </a:pPr>
+            <a:endParaRPr lang="en-US" sz="1150" dirty="0"/>
+          </a:p>
+          <a:p>
+            <a:pPr indent="0" marL="0">
+              <a:lnSpc>
+                <a:spcPct val="115000"/>
+              </a:lnSpc>
+              <a:buNone/>
+            </a:pPr>
+            <a:r>
+              <a:rPr lang="en-US" sz="1150" dirty="0">
+                <a:solidFill>
+                  <a:srgbClr val="23272E"/>
                 </a:solidFill>
                 <a:latin typeface="Calibri" pitchFamily="34" charset="0"/>
                 <a:ea typeface="Calibri" pitchFamily="34" charset="-122"/>
                 <a:cs typeface="Calibri" pitchFamily="34" charset="-120"/>
               </a:rPr>
-              <a:t>The speedups are removed work</a:t>
-            </a:r>
-            <a:endParaRPr lang="en-US" sz="1450" dirty="0"/>
-          </a:p>
-        </p:txBody>
-      </p:sp>
-      <p:sp>
-        <p:nvSpPr>
-          <p:cNvPr id="10" name="Text 8"/>
+              <a:t>Well under 1 % of a mid-range FPGA.</a:t>
+            </a:r>
+            <a:endParaRPr lang="en-US" sz="1150" dirty="0"/>
+          </a:p>
+        </p:txBody>
+      </p:sp>
+      <p:sp>
+        <p:nvSpPr>
+          <p:cNvPr id="7" name="Shape 5"/>
+          <p:cNvSpPr/>
+          <p:nvPr/>
+        </p:nvSpPr>
+        <p:spPr>
+          <a:xfrm>
+            <a:off x="4288536" y="1463040"/>
+            <a:ext cx="3538728" cy="3840480"/>
+          </a:xfrm>
+          <a:prstGeom prst="roundRect">
+            <a:avLst>
+              <a:gd name="adj" fmla="val 1550"/>
+            </a:avLst>
+          </a:prstGeom>
+          <a:solidFill>
+            <a:srgbClr val="FFFFFF"/>
+          </a:solidFill>
+          <a:ln w="12700">
+            <a:solidFill>
+              <a:srgbClr val="E3E3DF"/>
+            </a:solidFill>
+            <a:prstDash val="solid"/>
+          </a:ln>
+          <a:effectLst>
+            <a:outerShdw sx="100000" sy="100000" kx="0" ky="0" algn="bl" rotWithShape="0" blurRad="76200" dist="12700" dir="5400000">
+              <a:srgbClr val="9A9A95">
+                <a:alpha val="18000"/>
+              </a:srgbClr>
+            </a:outerShdw>
+          </a:effectLst>
+        </p:spPr>
+      </p:sp>
+      <p:sp>
+        <p:nvSpPr>
+          <p:cNvPr id="8" name="Text 6"/>
           <p:cNvSpPr txBox="1"/>
           <p:nvPr/>
         </p:nvSpPr>
         <p:spPr>
           <a:xfrm>
-            <a:off x="1097280" y="2715768"/>
-            <a:ext cx="10332720" cy="502920"/>
+            <a:off x="4544568" y="1664208"/>
+            <a:ext cx="3017520" cy="320040"/>
           </a:xfrm>
           <a:prstGeom prst="rect">
             <a:avLst/>
@@ -11190,89 +12005,135 @@
               <a:buNone/>
             </a:pPr>
             <a:r>
-              <a:rPr lang="en-US" sz="1250" dirty="0">
-                <a:solidFill>
-                  <a:srgbClr val="9AA0A6"/>
+              <a:rPr lang="en-US" sz="1700" b="1" dirty="0">
+                <a:solidFill>
+                  <a:srgbClr val="E8552D"/>
+                </a:solidFill>
+                <a:latin typeface="Cambria" pitchFamily="34" charset="0"/>
+                <a:ea typeface="Cambria" pitchFamily="34" charset="-122"/>
+                <a:cs typeface="Cambria" pitchFamily="34" charset="-120"/>
+              </a:rPr>
+              <a:t>The expensive decision</a:t>
+            </a:r>
+            <a:endParaRPr lang="en-US" sz="1700" dirty="0"/>
+          </a:p>
+        </p:txBody>
+      </p:sp>
+      <p:sp>
+        <p:nvSpPr>
+          <p:cNvPr id="9" name="Text 7"/>
+          <p:cNvSpPr txBox="1"/>
+          <p:nvPr/>
+        </p:nvSpPr>
+        <p:spPr>
+          <a:xfrm>
+            <a:off x="4544568" y="2084832"/>
+            <a:ext cx="3017520" cy="3017520"/>
+          </a:xfrm>
+          <a:prstGeom prst="rect">
+            <a:avLst/>
+          </a:prstGeom>
+          <a:noFill/>
+          <a:ln/>
+        </p:spPr>
+        <p:txBody>
+          <a:bodyPr wrap="square" lIns="0" tIns="0" rIns="0" bIns="0" rtlCol="0" anchor="ctr"/>
+          <a:lstStyle/>
+          <a:p>
+            <a:pPr indent="0" marL="0">
+              <a:lnSpc>
+                <a:spcPct val="115000"/>
+              </a:lnSpc>
+              <a:buNone/>
+            </a:pPr>
+            <a:r>
+              <a:rPr lang="en-US" sz="1150" dirty="0">
+                <a:solidFill>
+                  <a:srgbClr val="23272E"/>
                 </a:solidFill>
                 <a:latin typeface="Calibri" pitchFamily="34" charset="0"/>
                 <a:ea typeface="Calibri" pitchFamily="34" charset="-122"/>
                 <a:cs typeface="Calibri" pitchFamily="34" charset="-120"/>
               </a:rPr>
-              <a:t>Cycles and instructions fall by the same factor with IPC flat, and page faults are unchanged — so it is compute, not artefacts.</a:t>
-            </a:r>
-            <a:endParaRPr lang="en-US" sz="1250" dirty="0"/>
-          </a:p>
-        </p:txBody>
-      </p:sp>
-      <p:sp>
-        <p:nvSpPr>
-          <p:cNvPr id="11" name="Shape 9"/>
-          <p:cNvSpPr/>
-          <p:nvPr/>
-        </p:nvSpPr>
-        <p:spPr>
-          <a:xfrm>
-            <a:off x="594360" y="3355848"/>
-            <a:ext cx="310896" cy="310896"/>
-          </a:xfrm>
-          <a:prstGeom prst="ellipse">
-            <a:avLst/>
-          </a:prstGeom>
-          <a:solidFill>
-            <a:srgbClr val="E8552D"/>
-          </a:solidFill>
-          <a:ln/>
-        </p:spPr>
-      </p:sp>
-      <p:sp>
-        <p:nvSpPr>
-          <p:cNvPr id="12" name="Text 10"/>
-          <p:cNvSpPr txBox="1"/>
-          <p:nvPr/>
-        </p:nvSpPr>
-        <p:spPr>
-          <a:xfrm>
-            <a:off x="594360" y="3355848"/>
-            <a:ext cx="310896" cy="310896"/>
-          </a:xfrm>
-          <a:prstGeom prst="rect">
-            <a:avLst/>
-          </a:prstGeom>
-          <a:noFill/>
-          <a:ln/>
-        </p:spPr>
-        <p:txBody>
-          <a:bodyPr wrap="square" lIns="0" tIns="0" rIns="0" bIns="0" rtlCol="0" anchor="ctr"/>
-          <a:lstStyle/>
-          <a:p>
-            <a:pPr algn="ctr" indent="0" marL="0">
-              <a:buNone/>
-            </a:pPr>
-            <a:r>
-              <a:rPr lang="en-US" sz="1300" b="1" dirty="0">
-                <a:solidFill>
-                  <a:srgbClr val="FFFFFF"/>
+              <a:t>Squaring v at full width to survive the cancellation turns one 32×32 multiply into a 64×64 — 4× the multiplier area.</a:t>
+            </a:r>
+            <a:endParaRPr lang="en-US" sz="1150" dirty="0"/>
+          </a:p>
+          <a:p>
+            <a:pPr indent="0" marL="0">
+              <a:lnSpc>
+                <a:spcPct val="115000"/>
+              </a:lnSpc>
+              <a:buNone/>
+            </a:pPr>
+            <a:endParaRPr lang="en-US" sz="1150" dirty="0"/>
+          </a:p>
+          <a:p>
+            <a:pPr indent="0" marL="0">
+              <a:lnSpc>
+                <a:spcPct val="115000"/>
+              </a:lnSpc>
+              <a:buNone/>
+            </a:pPr>
+            <a:r>
+              <a:rPr lang="en-US" sz="1150" dirty="0">
+                <a:solidFill>
+                  <a:srgbClr val="23272E"/>
                 </a:solidFill>
                 <a:latin typeface="Calibri" pitchFamily="34" charset="0"/>
                 <a:ea typeface="Calibri" pitchFamily="34" charset="-122"/>
                 <a:cs typeface="Calibri" pitchFamily="34" charset="-120"/>
               </a:rPr>
-              <a:t>3</a:t>
-            </a:r>
-            <a:endParaRPr lang="en-US" sz="1300" dirty="0"/>
-          </a:p>
-        </p:txBody>
-      </p:sp>
-      <p:sp>
-        <p:nvSpPr>
-          <p:cNvPr id="13" name="Text 11"/>
+              <a:t>Q2.30 ray directions would let it revert to 32×32 AND improve accuracy: the better numerical choice is also the cheaper one.</a:t>
+            </a:r>
+            <a:endParaRPr lang="en-US" sz="1150" dirty="0"/>
+          </a:p>
+        </p:txBody>
+      </p:sp>
+      <p:sp>
+        <p:nvSpPr>
+          <p:cNvPr id="10" name="Shape 8"/>
+          <p:cNvSpPr/>
+          <p:nvPr/>
+        </p:nvSpPr>
+        <p:spPr>
+          <a:xfrm>
+            <a:off x="7982712" y="1463040"/>
+            <a:ext cx="3538728" cy="3840480"/>
+          </a:xfrm>
+          <a:prstGeom prst="roundRect">
+            <a:avLst>
+              <a:gd name="adj" fmla="val 1550"/>
+            </a:avLst>
+          </a:prstGeom>
+          <a:solidFill>
+            <a:srgbClr val="FFFFFF"/>
+          </a:solidFill>
+          <a:ln w="12700">
+            <a:solidFill>
+              <a:srgbClr val="E3E3DF"/>
+            </a:solidFill>
+            <a:prstDash val="solid"/>
+          </a:ln>
+          <a:effectLst>
+            <a:outerShdw sx="100000" sy="100000" kx="0" ky="0" algn="bl" rotWithShape="0" blurRad="76200" dist="12700" dir="5400000">
+              <a:srgbClr val="9A9A95">
+                <a:alpha val="18000"/>
+              </a:srgbClr>
+            </a:outerShdw>
+          </a:effectLst>
+        </p:spPr>
+      </p:sp>
+      <p:sp>
+        <p:nvSpPr>
+          <p:cNvPr id="11" name="Text 9"/>
           <p:cNvSpPr txBox="1"/>
           <p:nvPr/>
         </p:nvSpPr>
         <p:spPr>
           <a:xfrm>
-            <a:off x="1097280" y="3337560"/>
-            <a:ext cx="10332720" cy="274320"/>
+            <a:off x="8238744" y="1664208"/>
+            <a:ext cx="3017520" cy="320040"/>
           </a:xfrm>
           <a:prstGeom prst="rect">
             <a:avLst/>
@@ -11288,89 +12149,101 @@
               <a:buNone/>
             </a:pPr>
             <a:r>
-              <a:rPr lang="en-US" sz="1450" b="1" dirty="0">
-                <a:solidFill>
-                  <a:srgbClr val="FFFFFF"/>
+              <a:rPr lang="en-US" sz="1700" b="1" dirty="0">
+                <a:solidFill>
+                  <a:srgbClr val="23272E"/>
+                </a:solidFill>
+                <a:latin typeface="Cambria" pitchFamily="34" charset="0"/>
+                <a:ea typeface="Cambria" pitchFamily="34" charset="-122"/>
+                <a:cs typeface="Cambria" pitchFamily="34" charset="-120"/>
+              </a:rPr>
+              <a:t>Power &amp; frequency</a:t>
+            </a:r>
+            <a:endParaRPr lang="en-US" sz="1700" dirty="0"/>
+          </a:p>
+        </p:txBody>
+      </p:sp>
+      <p:sp>
+        <p:nvSpPr>
+          <p:cNvPr id="12" name="Text 10"/>
+          <p:cNvSpPr txBox="1"/>
+          <p:nvPr/>
+        </p:nvSpPr>
+        <p:spPr>
+          <a:xfrm>
+            <a:off x="8238744" y="2084832"/>
+            <a:ext cx="3017520" cy="3017520"/>
+          </a:xfrm>
+          <a:prstGeom prst="rect">
+            <a:avLst/>
+          </a:prstGeom>
+          <a:noFill/>
+          <a:ln/>
+        </p:spPr>
+        <p:txBody>
+          <a:bodyPr wrap="square" lIns="0" tIns="0" rIns="0" bIns="0" rtlCol="0" anchor="ctr"/>
+          <a:lstStyle/>
+          <a:p>
+            <a:pPr indent="0" marL="0">
+              <a:lnSpc>
+                <a:spcPct val="115000"/>
+              </a:lnSpc>
+              <a:buNone/>
+            </a:pPr>
+            <a:r>
+              <a:rPr lang="en-US" sz="1150" dirty="0">
+                <a:solidFill>
+                  <a:srgbClr val="23272E"/>
                 </a:solidFill>
                 <a:latin typeface="Calibri" pitchFamily="34" charset="0"/>
                 <a:ea typeface="Calibri" pitchFamily="34" charset="-122"/>
                 <a:cs typeface="Calibri" pitchFamily="34" charset="-120"/>
               </a:rPr>
-              <a:t>Optimizing changes the shape of the problem</a:t>
-            </a:r>
-            <a:endParaRPr lang="en-US" sz="1450" dirty="0"/>
-          </a:p>
-        </p:txBody>
-      </p:sp>
-      <p:sp>
-        <p:nvSpPr>
-          <p:cNvPr id="14" name="Text 12"/>
-          <p:cNvSpPr txBox="1"/>
-          <p:nvPr/>
-        </p:nvSpPr>
-        <p:spPr>
-          <a:xfrm>
-            <a:off x="1097280" y="3630168"/>
-            <a:ext cx="10332720" cy="502920"/>
-          </a:xfrm>
-          <a:prstGeom prst="rect">
-            <a:avLst/>
-          </a:prstGeom>
-          <a:noFill/>
-          <a:ln/>
-        </p:spPr>
-        <p:txBody>
-          <a:bodyPr wrap="square" lIns="0" tIns="0" rIns="0" bIns="0" rtlCol="0" anchor="ctr"/>
-          <a:lstStyle/>
-          <a:p>
-            <a:pPr indent="0" marL="0">
-              <a:buNone/>
-            </a:pPr>
-            <a:r>
-              <a:rPr lang="en-US" sz="1250" dirty="0">
-                <a:solidFill>
-                  <a:srgbClr val="9AA0A6"/>
+              <a:t>No caches, no branch predictor, no register file — the three biggest consumers in a general-purpose core. Every flip-flop toggles for the computation.</a:t>
+            </a:r>
+            <a:endParaRPr lang="en-US" sz="1150" dirty="0"/>
+          </a:p>
+          <a:p>
+            <a:pPr indent="0" marL="0">
+              <a:lnSpc>
+                <a:spcPct val="115000"/>
+              </a:lnSpc>
+              <a:buNone/>
+            </a:pPr>
+            <a:endParaRPr lang="en-US" sz="1150" dirty="0"/>
+          </a:p>
+          <a:p>
+            <a:pPr indent="0" marL="0">
+              <a:lnSpc>
+                <a:spcPct val="115000"/>
+              </a:lnSpc>
+              <a:buNone/>
+            </a:pPr>
+            <a:r>
+              <a:rPr lang="en-US" sz="1150" dirty="0">
+                <a:solidFill>
+                  <a:srgbClr val="23272E"/>
                 </a:solidFill>
                 <a:latin typeface="Calibri" pitchFamily="34" charset="0"/>
                 <a:ea typeface="Calibri" pitchFamily="34" charset="-122"/>
                 <a:cs typeface="Calibri" pitchFamily="34" charset="-120"/>
               </a:rPr>
-              <a:t>intersectionTime went 11.8 % → 28.1 % and interpreter dispatch 28 % → 34 %. What remains is the floor software cannot reach.</a:t>
-            </a:r>
-            <a:endParaRPr lang="en-US" sz="1250" dirty="0"/>
-          </a:p>
-        </p:txBody>
-      </p:sp>
-      <p:sp>
-        <p:nvSpPr>
-          <p:cNvPr id="15" name="Shape 13"/>
-          <p:cNvSpPr/>
-          <p:nvPr/>
-        </p:nvSpPr>
-        <p:spPr>
-          <a:xfrm>
-            <a:off x="594360" y="4270248"/>
-            <a:ext cx="310896" cy="310896"/>
-          </a:xfrm>
-          <a:prstGeom prst="ellipse">
-            <a:avLst/>
-          </a:prstGeom>
-          <a:solidFill>
-            <a:srgbClr val="E8552D"/>
-          </a:solidFill>
-          <a:ln/>
-        </p:spPr>
-      </p:sp>
-      <p:sp>
-        <p:nvSpPr>
-          <p:cNvPr id="16" name="Text 14"/>
+              <a:t>Throughput is 1/cycle regardless of depth, so frequency scales it linearly. Latency (30 cycles = 150 ns at 200 MHz) is hidden by the FIFO.</a:t>
+            </a:r>
+            <a:endParaRPr lang="en-US" sz="1150" dirty="0"/>
+          </a:p>
+        </p:txBody>
+      </p:sp>
+      <p:sp>
+        <p:nvSpPr>
+          <p:cNvPr id="13" name="Text 11"/>
           <p:cNvSpPr txBox="1"/>
           <p:nvPr/>
         </p:nvSpPr>
         <p:spPr>
           <a:xfrm>
-            <a:off x="594360" y="4270248"/>
-            <a:ext cx="310896" cy="310896"/>
+            <a:off x="594360" y="5486400"/>
+            <a:ext cx="10881360" cy="640080"/>
           </a:xfrm>
           <a:prstGeom prst="rect">
             <a:avLst/>
@@ -11382,234 +12255,19 @@
           <a:bodyPr wrap="square" lIns="0" tIns="0" rIns="0" bIns="0" rtlCol="0" anchor="ctr"/>
           <a:lstStyle/>
           <a:p>
-            <a:pPr algn="ctr" indent="0" marL="0">
-              <a:buNone/>
-            </a:pPr>
-            <a:r>
-              <a:rPr lang="en-US" sz="1300" b="1" dirty="0">
-                <a:solidFill>
-                  <a:srgbClr val="FFFFFF"/>
+            <a:pPr indent="0" marL="0">
+              <a:buNone/>
+            </a:pPr>
+            <a:r>
+              <a:rPr lang="en-US" sz="1250" dirty="0">
+                <a:solidFill>
+                  <a:srgbClr val="6B7280"/>
                 </a:solidFill>
                 <a:latin typeface="Calibri" pitchFamily="34" charset="0"/>
                 <a:ea typeface="Calibri" pitchFamily="34" charset="-122"/>
                 <a:cs typeface="Calibri" pitchFamily="34" charset="-120"/>
               </a:rPr>
-              <a:t>4</a:t>
-            </a:r>
-            <a:endParaRPr lang="en-US" sz="1300" dirty="0"/>
-          </a:p>
-        </p:txBody>
-      </p:sp>
-      <p:sp>
-        <p:nvSpPr>
-          <p:cNvPr id="17" name="Text 15"/>
-          <p:cNvSpPr txBox="1"/>
-          <p:nvPr/>
-        </p:nvSpPr>
-        <p:spPr>
-          <a:xfrm>
-            <a:off x="1097280" y="4251960"/>
-            <a:ext cx="10332720" cy="274320"/>
-          </a:xfrm>
-          <a:prstGeom prst="rect">
-            <a:avLst/>
-          </a:prstGeom>
-          <a:noFill/>
-          <a:ln/>
-        </p:spPr>
-        <p:txBody>
-          <a:bodyPr wrap="square" lIns="0" tIns="0" rIns="0" bIns="0" rtlCol="0" anchor="ctr"/>
-          <a:lstStyle/>
-          <a:p>
-            <a:pPr indent="0" marL="0">
-              <a:buNone/>
-            </a:pPr>
-            <a:r>
-              <a:rPr lang="en-US" sz="1450" b="1" dirty="0">
-                <a:solidFill>
-                  <a:srgbClr val="FFFFFF"/>
-                </a:solidFill>
-                <a:latin typeface="Calibri" pitchFamily="34" charset="0"/>
-                <a:ea typeface="Calibri" pitchFamily="34" charset="-122"/>
-                <a:cs typeface="Calibri" pitchFamily="34" charset="-120"/>
-              </a:rPr>
-              <a:t>The accelerator's limit is Amdahl, not arithmetic</a:t>
-            </a:r>
-            <a:endParaRPr lang="en-US" sz="1450" dirty="0"/>
-          </a:p>
-        </p:txBody>
-      </p:sp>
-      <p:sp>
-        <p:nvSpPr>
-          <p:cNvPr id="18" name="Text 16"/>
-          <p:cNvSpPr txBox="1"/>
-          <p:nvPr/>
-        </p:nvSpPr>
-        <p:spPr>
-          <a:xfrm>
-            <a:off x="1097280" y="4544568"/>
-            <a:ext cx="10332720" cy="502920"/>
-          </a:xfrm>
-          <a:prstGeom prst="rect">
-            <a:avLst/>
-          </a:prstGeom>
-          <a:noFill/>
-          <a:ln/>
-        </p:spPr>
-        <p:txBody>
-          <a:bodyPr wrap="square" lIns="0" tIns="0" rIns="0" bIns="0" rtlCol="0" anchor="ctr"/>
-          <a:lstStyle/>
-          <a:p>
-            <a:pPr indent="0" marL="0">
-              <a:buNone/>
-            </a:pPr>
-            <a:r>
-              <a:rPr lang="en-US" sz="1250" dirty="0">
-                <a:solidFill>
-                  <a:srgbClr val="9AA0A6"/>
-                </a:solidFill>
-                <a:latin typeface="Calibri" pitchFamily="34" charset="0"/>
-                <a:ea typeface="Calibri" pitchFamily="34" charset="-122"/>
-                <a:cs typeface="Calibri" pitchFamily="34" charset="-120"/>
-              </a:rPr>
-              <a:t>One pipeline makes the geometry free; the ceiling is still 1.39×, and a wider unit would change nothing.</a:t>
-            </a:r>
-            <a:endParaRPr lang="en-US" sz="1250" dirty="0"/>
-          </a:p>
-        </p:txBody>
-      </p:sp>
-      <p:sp>
-        <p:nvSpPr>
-          <p:cNvPr id="19" name="Shape 17"/>
-          <p:cNvSpPr/>
-          <p:nvPr/>
-        </p:nvSpPr>
-        <p:spPr>
-          <a:xfrm>
-            <a:off x="594360" y="5184648"/>
-            <a:ext cx="310896" cy="310896"/>
-          </a:xfrm>
-          <a:prstGeom prst="ellipse">
-            <a:avLst/>
-          </a:prstGeom>
-          <a:solidFill>
-            <a:srgbClr val="2D9596"/>
-          </a:solidFill>
-          <a:ln/>
-        </p:spPr>
-      </p:sp>
-      <p:sp>
-        <p:nvSpPr>
-          <p:cNvPr id="20" name="Text 18"/>
-          <p:cNvSpPr txBox="1"/>
-          <p:nvPr/>
-        </p:nvSpPr>
-        <p:spPr>
-          <a:xfrm>
-            <a:off x="594360" y="5184648"/>
-            <a:ext cx="310896" cy="310896"/>
-          </a:xfrm>
-          <a:prstGeom prst="rect">
-            <a:avLst/>
-          </a:prstGeom>
-          <a:noFill/>
-          <a:ln/>
-        </p:spPr>
-        <p:txBody>
-          <a:bodyPr wrap="square" lIns="0" tIns="0" rIns="0" bIns="0" rtlCol="0" anchor="ctr"/>
-          <a:lstStyle/>
-          <a:p>
-            <a:pPr algn="ctr" indent="0" marL="0">
-              <a:buNone/>
-            </a:pPr>
-            <a:r>
-              <a:rPr lang="en-US" sz="1300" b="1" dirty="0">
-                <a:solidFill>
-                  <a:srgbClr val="FFFFFF"/>
-                </a:solidFill>
-                <a:latin typeface="Calibri" pitchFamily="34" charset="0"/>
-                <a:ea typeface="Calibri" pitchFamily="34" charset="-122"/>
-                <a:cs typeface="Calibri" pitchFamily="34" charset="-120"/>
-              </a:rPr>
-              <a:t>5</a:t>
-            </a:r>
-            <a:endParaRPr lang="en-US" sz="1300" dirty="0"/>
-          </a:p>
-        </p:txBody>
-      </p:sp>
-      <p:sp>
-        <p:nvSpPr>
-          <p:cNvPr id="21" name="Text 19"/>
-          <p:cNvSpPr txBox="1"/>
-          <p:nvPr/>
-        </p:nvSpPr>
-        <p:spPr>
-          <a:xfrm>
-            <a:off x="1097280" y="5166360"/>
-            <a:ext cx="10332720" cy="274320"/>
-          </a:xfrm>
-          <a:prstGeom prst="rect">
-            <a:avLst/>
-          </a:prstGeom>
-          <a:noFill/>
-          <a:ln/>
-        </p:spPr>
-        <p:txBody>
-          <a:bodyPr wrap="square" lIns="0" tIns="0" rIns="0" bIns="0" rtlCol="0" anchor="ctr"/>
-          <a:lstStyle/>
-          <a:p>
-            <a:pPr indent="0" marL="0">
-              <a:buNone/>
-            </a:pPr>
-            <a:r>
-              <a:rPr lang="en-US" sz="1450" b="1" dirty="0">
-                <a:solidFill>
-                  <a:srgbClr val="FFFFFF"/>
-                </a:solidFill>
-                <a:latin typeface="Calibri" pitchFamily="34" charset="0"/>
-                <a:ea typeface="Calibri" pitchFamily="34" charset="-122"/>
-                <a:cs typeface="Calibri" pitchFamily="34" charset="-120"/>
-              </a:rPr>
-              <a:t>Two workloads, two different hardware answers</a:t>
-            </a:r>
-            <a:endParaRPr lang="en-US" sz="1450" dirty="0"/>
-          </a:p>
-        </p:txBody>
-      </p:sp>
-      <p:sp>
-        <p:nvSpPr>
-          <p:cNvPr id="22" name="Text 20"/>
-          <p:cNvSpPr txBox="1"/>
-          <p:nvPr/>
-        </p:nvSpPr>
-        <p:spPr>
-          <a:xfrm>
-            <a:off x="1097280" y="5458968"/>
-            <a:ext cx="10332720" cy="502920"/>
-          </a:xfrm>
-          <a:prstGeom prst="rect">
-            <a:avLst/>
-          </a:prstGeom>
-          <a:noFill/>
-          <a:ln/>
-        </p:spPr>
-        <p:txBody>
-          <a:bodyPr wrap="square" lIns="0" tIns="0" rIns="0" bIns="0" rtlCol="0" anchor="ctr"/>
-          <a:lstStyle/>
-          <a:p>
-            <a:pPr indent="0" marL="0">
-              <a:buNone/>
-            </a:pPr>
-            <a:r>
-              <a:rPr lang="en-US" sz="1250" dirty="0">
-                <a:solidFill>
-                  <a:srgbClr val="9AA0A6"/>
-                </a:solidFill>
-                <a:latin typeface="Calibri" pitchFamily="34" charset="0"/>
-                <a:ea typeface="Calibri" pitchFamily="34" charset="-122"/>
-                <a:cs typeface="Calibri" pitchFamily="34" charset="-120"/>
-              </a:rPr>
-              <a:t>raytrace is regular and suits a control-free systolic pipeline. pyflate's variable-length decode is serially dependent by construction — the same method, an entirely different conclusion.</a:t>
+              <a:t>Fixed vs floating point: FP32 would remove the range and cancellation concerns and match Python exactly — at the cost of a much larger multiplier, an FP adder with normalisation, and a far more complex square root. For a bounded scene, fixed point is the better engineering choice, and we quantified exactly what it costs.</a:t>
             </a:r>
             <a:endParaRPr lang="en-US" sz="1250" dirty="0"/>
           </a:p>
@@ -12204,6 +12862,762 @@
         </p:nvSpPr>
         <p:spPr>
           <a:xfrm>
+            <a:off x="594360" y="731520"/>
+            <a:ext cx="7315200" cy="548640"/>
+          </a:xfrm>
+          <a:prstGeom prst="rect">
+            <a:avLst/>
+          </a:prstGeom>
+          <a:noFill/>
+          <a:ln/>
+        </p:spPr>
+        <p:txBody>
+          <a:bodyPr wrap="square" lIns="0" tIns="0" rIns="0" bIns="0" rtlCol="0" anchor="ctr"/>
+          <a:lstStyle/>
+          <a:p>
+            <a:pPr indent="0" marL="0">
+              <a:buNone/>
+            </a:pPr>
+            <a:r>
+              <a:rPr lang="en-US" sz="3200" b="1" dirty="0">
+                <a:solidFill>
+                  <a:srgbClr val="FFFFFF"/>
+                </a:solidFill>
+                <a:latin typeface="Cambria" pitchFamily="34" charset="0"/>
+                <a:ea typeface="Cambria" pitchFamily="34" charset="-122"/>
+                <a:cs typeface="Cambria" pitchFamily="34" charset="-120"/>
+              </a:rPr>
+              <a:t>What we take away</a:t>
+            </a:r>
+            <a:endParaRPr lang="en-US" sz="3200" dirty="0"/>
+          </a:p>
+        </p:txBody>
+      </p:sp>
+      <p:sp>
+        <p:nvSpPr>
+          <p:cNvPr id="3" name="Shape 1"/>
+          <p:cNvSpPr/>
+          <p:nvPr/>
+        </p:nvSpPr>
+        <p:spPr>
+          <a:xfrm>
+            <a:off x="594360" y="1527048"/>
+            <a:ext cx="310896" cy="310896"/>
+          </a:xfrm>
+          <a:prstGeom prst="ellipse">
+            <a:avLst/>
+          </a:prstGeom>
+          <a:solidFill>
+            <a:srgbClr val="E8552D"/>
+          </a:solidFill>
+          <a:ln/>
+        </p:spPr>
+      </p:sp>
+      <p:sp>
+        <p:nvSpPr>
+          <p:cNvPr id="4" name="Text 2"/>
+          <p:cNvSpPr txBox="1"/>
+          <p:nvPr/>
+        </p:nvSpPr>
+        <p:spPr>
+          <a:xfrm>
+            <a:off x="594360" y="1527048"/>
+            <a:ext cx="310896" cy="310896"/>
+          </a:xfrm>
+          <a:prstGeom prst="rect">
+            <a:avLst/>
+          </a:prstGeom>
+          <a:noFill/>
+          <a:ln/>
+        </p:spPr>
+        <p:txBody>
+          <a:bodyPr wrap="square" lIns="0" tIns="0" rIns="0" bIns="0" rtlCol="0" anchor="ctr"/>
+          <a:lstStyle/>
+          <a:p>
+            <a:pPr algn="ctr" indent="0" marL="0">
+              <a:buNone/>
+            </a:pPr>
+            <a:r>
+              <a:rPr lang="en-US" sz="1300" b="1" dirty="0">
+                <a:solidFill>
+                  <a:srgbClr val="FFFFFF"/>
+                </a:solidFill>
+                <a:latin typeface="Calibri" pitchFamily="34" charset="0"/>
+                <a:ea typeface="Calibri" pitchFamily="34" charset="-122"/>
+                <a:cs typeface="Calibri" pitchFamily="34" charset="-120"/>
+              </a:rPr>
+              <a:t>1</a:t>
+            </a:r>
+            <a:endParaRPr lang="en-US" sz="1300" dirty="0"/>
+          </a:p>
+        </p:txBody>
+      </p:sp>
+      <p:sp>
+        <p:nvSpPr>
+          <p:cNvPr id="5" name="Text 3"/>
+          <p:cNvSpPr txBox="1"/>
+          <p:nvPr/>
+        </p:nvSpPr>
+        <p:spPr>
+          <a:xfrm>
+            <a:off x="1097280" y="1508760"/>
+            <a:ext cx="10332720" cy="274320"/>
+          </a:xfrm>
+          <a:prstGeom prst="rect">
+            <a:avLst/>
+          </a:prstGeom>
+          <a:noFill/>
+          <a:ln/>
+        </p:spPr>
+        <p:txBody>
+          <a:bodyPr wrap="square" lIns="0" tIns="0" rIns="0" bIns="0" rtlCol="0" anchor="ctr"/>
+          <a:lstStyle/>
+          <a:p>
+            <a:pPr indent="0" marL="0">
+              <a:buNone/>
+            </a:pPr>
+            <a:r>
+              <a:rPr lang="en-US" sz="1450" b="1" dirty="0">
+                <a:solidFill>
+                  <a:srgbClr val="FFFFFF"/>
+                </a:solidFill>
+                <a:latin typeface="Calibri" pitchFamily="34" charset="0"/>
+                <a:ea typeface="Calibri" pitchFamily="34" charset="-122"/>
+                <a:cs typeface="Calibri" pitchFamily="34" charset="-120"/>
+              </a:rPr>
+              <a:t>Both benchmarks beat the requirement</a:t>
+            </a:r>
+            <a:endParaRPr lang="en-US" sz="1450" dirty="0"/>
+          </a:p>
+        </p:txBody>
+      </p:sp>
+      <p:sp>
+        <p:nvSpPr>
+          <p:cNvPr id="6" name="Text 4"/>
+          <p:cNvSpPr txBox="1"/>
+          <p:nvPr/>
+        </p:nvSpPr>
+        <p:spPr>
+          <a:xfrm>
+            <a:off x="1097280" y="1801368"/>
+            <a:ext cx="10332720" cy="502920"/>
+          </a:xfrm>
+          <a:prstGeom prst="rect">
+            <a:avLst/>
+          </a:prstGeom>
+          <a:noFill/>
+          <a:ln/>
+        </p:spPr>
+        <p:txBody>
+          <a:bodyPr wrap="square" lIns="0" tIns="0" rIns="0" bIns="0" rtlCol="0" anchor="ctr"/>
+          <a:lstStyle/>
+          <a:p>
+            <a:pPr indent="0" marL="0">
+              <a:buNone/>
+            </a:pPr>
+            <a:r>
+              <a:rPr lang="en-US" sz="1250" dirty="0">
+                <a:solidFill>
+                  <a:srgbClr val="9AA0A6"/>
+                </a:solidFill>
+                <a:latin typeface="Calibri" pitchFamily="34" charset="0"/>
+                <a:ea typeface="Calibri" pitchFamily="34" charset="-122"/>
+                <a:cs typeface="Calibri" pitchFamily="34" charset="-120"/>
+              </a:rPr>
+              <a:t>2.56× and 1.48× on the release interpreter, with byte-identical output verified before any number was recorded.</a:t>
+            </a:r>
+            <a:endParaRPr lang="en-US" sz="1250" dirty="0"/>
+          </a:p>
+        </p:txBody>
+      </p:sp>
+      <p:sp>
+        <p:nvSpPr>
+          <p:cNvPr id="7" name="Shape 5"/>
+          <p:cNvSpPr/>
+          <p:nvPr/>
+        </p:nvSpPr>
+        <p:spPr>
+          <a:xfrm>
+            <a:off x="594360" y="2441448"/>
+            <a:ext cx="310896" cy="310896"/>
+          </a:xfrm>
+          <a:prstGeom prst="ellipse">
+            <a:avLst/>
+          </a:prstGeom>
+          <a:solidFill>
+            <a:srgbClr val="E8552D"/>
+          </a:solidFill>
+          <a:ln/>
+        </p:spPr>
+      </p:sp>
+      <p:sp>
+        <p:nvSpPr>
+          <p:cNvPr id="8" name="Text 6"/>
+          <p:cNvSpPr txBox="1"/>
+          <p:nvPr/>
+        </p:nvSpPr>
+        <p:spPr>
+          <a:xfrm>
+            <a:off x="594360" y="2441448"/>
+            <a:ext cx="310896" cy="310896"/>
+          </a:xfrm>
+          <a:prstGeom prst="rect">
+            <a:avLst/>
+          </a:prstGeom>
+          <a:noFill/>
+          <a:ln/>
+        </p:spPr>
+        <p:txBody>
+          <a:bodyPr wrap="square" lIns="0" tIns="0" rIns="0" bIns="0" rtlCol="0" anchor="ctr"/>
+          <a:lstStyle/>
+          <a:p>
+            <a:pPr algn="ctr" indent="0" marL="0">
+              <a:buNone/>
+            </a:pPr>
+            <a:r>
+              <a:rPr lang="en-US" sz="1300" b="1" dirty="0">
+                <a:solidFill>
+                  <a:srgbClr val="FFFFFF"/>
+                </a:solidFill>
+                <a:latin typeface="Calibri" pitchFamily="34" charset="0"/>
+                <a:ea typeface="Calibri" pitchFamily="34" charset="-122"/>
+                <a:cs typeface="Calibri" pitchFamily="34" charset="-120"/>
+              </a:rPr>
+              <a:t>2</a:t>
+            </a:r>
+            <a:endParaRPr lang="en-US" sz="1300" dirty="0"/>
+          </a:p>
+        </p:txBody>
+      </p:sp>
+      <p:sp>
+        <p:nvSpPr>
+          <p:cNvPr id="9" name="Text 7"/>
+          <p:cNvSpPr txBox="1"/>
+          <p:nvPr/>
+        </p:nvSpPr>
+        <p:spPr>
+          <a:xfrm>
+            <a:off x="1097280" y="2423160"/>
+            <a:ext cx="10332720" cy="274320"/>
+          </a:xfrm>
+          <a:prstGeom prst="rect">
+            <a:avLst/>
+          </a:prstGeom>
+          <a:noFill/>
+          <a:ln/>
+        </p:spPr>
+        <p:txBody>
+          <a:bodyPr wrap="square" lIns="0" tIns="0" rIns="0" bIns="0" rtlCol="0" anchor="ctr"/>
+          <a:lstStyle/>
+          <a:p>
+            <a:pPr indent="0" marL="0">
+              <a:buNone/>
+            </a:pPr>
+            <a:r>
+              <a:rPr lang="en-US" sz="1450" b="1" dirty="0">
+                <a:solidFill>
+                  <a:srgbClr val="FFFFFF"/>
+                </a:solidFill>
+                <a:latin typeface="Calibri" pitchFamily="34" charset="0"/>
+                <a:ea typeface="Calibri" pitchFamily="34" charset="-122"/>
+                <a:cs typeface="Calibri" pitchFamily="34" charset="-120"/>
+              </a:rPr>
+              <a:t>The speedups are removed work</a:t>
+            </a:r>
+            <a:endParaRPr lang="en-US" sz="1450" dirty="0"/>
+          </a:p>
+        </p:txBody>
+      </p:sp>
+      <p:sp>
+        <p:nvSpPr>
+          <p:cNvPr id="10" name="Text 8"/>
+          <p:cNvSpPr txBox="1"/>
+          <p:nvPr/>
+        </p:nvSpPr>
+        <p:spPr>
+          <a:xfrm>
+            <a:off x="1097280" y="2715768"/>
+            <a:ext cx="10332720" cy="502920"/>
+          </a:xfrm>
+          <a:prstGeom prst="rect">
+            <a:avLst/>
+          </a:prstGeom>
+          <a:noFill/>
+          <a:ln/>
+        </p:spPr>
+        <p:txBody>
+          <a:bodyPr wrap="square" lIns="0" tIns="0" rIns="0" bIns="0" rtlCol="0" anchor="ctr"/>
+          <a:lstStyle/>
+          <a:p>
+            <a:pPr indent="0" marL="0">
+              <a:buNone/>
+            </a:pPr>
+            <a:r>
+              <a:rPr lang="en-US" sz="1250" dirty="0">
+                <a:solidFill>
+                  <a:srgbClr val="9AA0A6"/>
+                </a:solidFill>
+                <a:latin typeface="Calibri" pitchFamily="34" charset="0"/>
+                <a:ea typeface="Calibri" pitchFamily="34" charset="-122"/>
+                <a:cs typeface="Calibri" pitchFamily="34" charset="-120"/>
+              </a:rPr>
+              <a:t>Cycles and instructions fall by the same factor with IPC flat, and page faults are unchanged — so it is compute, not artefacts.</a:t>
+            </a:r>
+            <a:endParaRPr lang="en-US" sz="1250" dirty="0"/>
+          </a:p>
+        </p:txBody>
+      </p:sp>
+      <p:sp>
+        <p:nvSpPr>
+          <p:cNvPr id="11" name="Shape 9"/>
+          <p:cNvSpPr/>
+          <p:nvPr/>
+        </p:nvSpPr>
+        <p:spPr>
+          <a:xfrm>
+            <a:off x="594360" y="3355848"/>
+            <a:ext cx="310896" cy="310896"/>
+          </a:xfrm>
+          <a:prstGeom prst="ellipse">
+            <a:avLst/>
+          </a:prstGeom>
+          <a:solidFill>
+            <a:srgbClr val="E8552D"/>
+          </a:solidFill>
+          <a:ln/>
+        </p:spPr>
+      </p:sp>
+      <p:sp>
+        <p:nvSpPr>
+          <p:cNvPr id="12" name="Text 10"/>
+          <p:cNvSpPr txBox="1"/>
+          <p:nvPr/>
+        </p:nvSpPr>
+        <p:spPr>
+          <a:xfrm>
+            <a:off x="594360" y="3355848"/>
+            <a:ext cx="310896" cy="310896"/>
+          </a:xfrm>
+          <a:prstGeom prst="rect">
+            <a:avLst/>
+          </a:prstGeom>
+          <a:noFill/>
+          <a:ln/>
+        </p:spPr>
+        <p:txBody>
+          <a:bodyPr wrap="square" lIns="0" tIns="0" rIns="0" bIns="0" rtlCol="0" anchor="ctr"/>
+          <a:lstStyle/>
+          <a:p>
+            <a:pPr algn="ctr" indent="0" marL="0">
+              <a:buNone/>
+            </a:pPr>
+            <a:r>
+              <a:rPr lang="en-US" sz="1300" b="1" dirty="0">
+                <a:solidFill>
+                  <a:srgbClr val="FFFFFF"/>
+                </a:solidFill>
+                <a:latin typeface="Calibri" pitchFamily="34" charset="0"/>
+                <a:ea typeface="Calibri" pitchFamily="34" charset="-122"/>
+                <a:cs typeface="Calibri" pitchFamily="34" charset="-120"/>
+              </a:rPr>
+              <a:t>3</a:t>
+            </a:r>
+            <a:endParaRPr lang="en-US" sz="1300" dirty="0"/>
+          </a:p>
+        </p:txBody>
+      </p:sp>
+      <p:sp>
+        <p:nvSpPr>
+          <p:cNvPr id="13" name="Text 11"/>
+          <p:cNvSpPr txBox="1"/>
+          <p:nvPr/>
+        </p:nvSpPr>
+        <p:spPr>
+          <a:xfrm>
+            <a:off x="1097280" y="3337560"/>
+            <a:ext cx="10332720" cy="274320"/>
+          </a:xfrm>
+          <a:prstGeom prst="rect">
+            <a:avLst/>
+          </a:prstGeom>
+          <a:noFill/>
+          <a:ln/>
+        </p:spPr>
+        <p:txBody>
+          <a:bodyPr wrap="square" lIns="0" tIns="0" rIns="0" bIns="0" rtlCol="0" anchor="ctr"/>
+          <a:lstStyle/>
+          <a:p>
+            <a:pPr indent="0" marL="0">
+              <a:buNone/>
+            </a:pPr>
+            <a:r>
+              <a:rPr lang="en-US" sz="1450" b="1" dirty="0">
+                <a:solidFill>
+                  <a:srgbClr val="FFFFFF"/>
+                </a:solidFill>
+                <a:latin typeface="Calibri" pitchFamily="34" charset="0"/>
+                <a:ea typeface="Calibri" pitchFamily="34" charset="-122"/>
+                <a:cs typeface="Calibri" pitchFamily="34" charset="-120"/>
+              </a:rPr>
+              <a:t>Optimizing changes the shape of the problem</a:t>
+            </a:r>
+            <a:endParaRPr lang="en-US" sz="1450" dirty="0"/>
+          </a:p>
+        </p:txBody>
+      </p:sp>
+      <p:sp>
+        <p:nvSpPr>
+          <p:cNvPr id="14" name="Text 12"/>
+          <p:cNvSpPr txBox="1"/>
+          <p:nvPr/>
+        </p:nvSpPr>
+        <p:spPr>
+          <a:xfrm>
+            <a:off x="1097280" y="3630168"/>
+            <a:ext cx="10332720" cy="502920"/>
+          </a:xfrm>
+          <a:prstGeom prst="rect">
+            <a:avLst/>
+          </a:prstGeom>
+          <a:noFill/>
+          <a:ln/>
+        </p:spPr>
+        <p:txBody>
+          <a:bodyPr wrap="square" lIns="0" tIns="0" rIns="0" bIns="0" rtlCol="0" anchor="ctr"/>
+          <a:lstStyle/>
+          <a:p>
+            <a:pPr indent="0" marL="0">
+              <a:buNone/>
+            </a:pPr>
+            <a:r>
+              <a:rPr lang="en-US" sz="1250" dirty="0">
+                <a:solidFill>
+                  <a:srgbClr val="9AA0A6"/>
+                </a:solidFill>
+                <a:latin typeface="Calibri" pitchFamily="34" charset="0"/>
+                <a:ea typeface="Calibri" pitchFamily="34" charset="-122"/>
+                <a:cs typeface="Calibri" pitchFamily="34" charset="-120"/>
+              </a:rPr>
+              <a:t>intersectionTime went 11.8 % → 28.1 % and interpreter dispatch 28 % → 34 %. What remains is the floor software cannot reach.</a:t>
+            </a:r>
+            <a:endParaRPr lang="en-US" sz="1250" dirty="0"/>
+          </a:p>
+        </p:txBody>
+      </p:sp>
+      <p:sp>
+        <p:nvSpPr>
+          <p:cNvPr id="15" name="Shape 13"/>
+          <p:cNvSpPr/>
+          <p:nvPr/>
+        </p:nvSpPr>
+        <p:spPr>
+          <a:xfrm>
+            <a:off x="594360" y="4270248"/>
+            <a:ext cx="310896" cy="310896"/>
+          </a:xfrm>
+          <a:prstGeom prst="ellipse">
+            <a:avLst/>
+          </a:prstGeom>
+          <a:solidFill>
+            <a:srgbClr val="E8552D"/>
+          </a:solidFill>
+          <a:ln/>
+        </p:spPr>
+      </p:sp>
+      <p:sp>
+        <p:nvSpPr>
+          <p:cNvPr id="16" name="Text 14"/>
+          <p:cNvSpPr txBox="1"/>
+          <p:nvPr/>
+        </p:nvSpPr>
+        <p:spPr>
+          <a:xfrm>
+            <a:off x="594360" y="4270248"/>
+            <a:ext cx="310896" cy="310896"/>
+          </a:xfrm>
+          <a:prstGeom prst="rect">
+            <a:avLst/>
+          </a:prstGeom>
+          <a:noFill/>
+          <a:ln/>
+        </p:spPr>
+        <p:txBody>
+          <a:bodyPr wrap="square" lIns="0" tIns="0" rIns="0" bIns="0" rtlCol="0" anchor="ctr"/>
+          <a:lstStyle/>
+          <a:p>
+            <a:pPr algn="ctr" indent="0" marL="0">
+              <a:buNone/>
+            </a:pPr>
+            <a:r>
+              <a:rPr lang="en-US" sz="1300" b="1" dirty="0">
+                <a:solidFill>
+                  <a:srgbClr val="FFFFFF"/>
+                </a:solidFill>
+                <a:latin typeface="Calibri" pitchFamily="34" charset="0"/>
+                <a:ea typeface="Calibri" pitchFamily="34" charset="-122"/>
+                <a:cs typeface="Calibri" pitchFamily="34" charset="-120"/>
+              </a:rPr>
+              <a:t>4</a:t>
+            </a:r>
+            <a:endParaRPr lang="en-US" sz="1300" dirty="0"/>
+          </a:p>
+        </p:txBody>
+      </p:sp>
+      <p:sp>
+        <p:nvSpPr>
+          <p:cNvPr id="17" name="Text 15"/>
+          <p:cNvSpPr txBox="1"/>
+          <p:nvPr/>
+        </p:nvSpPr>
+        <p:spPr>
+          <a:xfrm>
+            <a:off x="1097280" y="4251960"/>
+            <a:ext cx="10332720" cy="274320"/>
+          </a:xfrm>
+          <a:prstGeom prst="rect">
+            <a:avLst/>
+          </a:prstGeom>
+          <a:noFill/>
+          <a:ln/>
+        </p:spPr>
+        <p:txBody>
+          <a:bodyPr wrap="square" lIns="0" tIns="0" rIns="0" bIns="0" rtlCol="0" anchor="ctr"/>
+          <a:lstStyle/>
+          <a:p>
+            <a:pPr indent="0" marL="0">
+              <a:buNone/>
+            </a:pPr>
+            <a:r>
+              <a:rPr lang="en-US" sz="1450" b="1" dirty="0">
+                <a:solidFill>
+                  <a:srgbClr val="FFFFFF"/>
+                </a:solidFill>
+                <a:latin typeface="Calibri" pitchFamily="34" charset="0"/>
+                <a:ea typeface="Calibri" pitchFamily="34" charset="-122"/>
+                <a:cs typeface="Calibri" pitchFamily="34" charset="-120"/>
+              </a:rPr>
+              <a:t>The accelerator's limit is Amdahl, not arithmetic</a:t>
+            </a:r>
+            <a:endParaRPr lang="en-US" sz="1450" dirty="0"/>
+          </a:p>
+        </p:txBody>
+      </p:sp>
+      <p:sp>
+        <p:nvSpPr>
+          <p:cNvPr id="18" name="Text 16"/>
+          <p:cNvSpPr txBox="1"/>
+          <p:nvPr/>
+        </p:nvSpPr>
+        <p:spPr>
+          <a:xfrm>
+            <a:off x="1097280" y="4544568"/>
+            <a:ext cx="10332720" cy="502920"/>
+          </a:xfrm>
+          <a:prstGeom prst="rect">
+            <a:avLst/>
+          </a:prstGeom>
+          <a:noFill/>
+          <a:ln/>
+        </p:spPr>
+        <p:txBody>
+          <a:bodyPr wrap="square" lIns="0" tIns="0" rIns="0" bIns="0" rtlCol="0" anchor="ctr"/>
+          <a:lstStyle/>
+          <a:p>
+            <a:pPr indent="0" marL="0">
+              <a:buNone/>
+            </a:pPr>
+            <a:r>
+              <a:rPr lang="en-US" sz="1250" dirty="0">
+                <a:solidFill>
+                  <a:srgbClr val="9AA0A6"/>
+                </a:solidFill>
+                <a:latin typeface="Calibri" pitchFamily="34" charset="0"/>
+                <a:ea typeface="Calibri" pitchFamily="34" charset="-122"/>
+                <a:cs typeface="Calibri" pitchFamily="34" charset="-120"/>
+              </a:rPr>
+              <a:t>One pipeline makes the geometry free; the ceiling is still 1.39×, and a wider unit would change nothing.</a:t>
+            </a:r>
+            <a:endParaRPr lang="en-US" sz="1250" dirty="0"/>
+          </a:p>
+        </p:txBody>
+      </p:sp>
+      <p:sp>
+        <p:nvSpPr>
+          <p:cNvPr id="19" name="Shape 17"/>
+          <p:cNvSpPr/>
+          <p:nvPr/>
+        </p:nvSpPr>
+        <p:spPr>
+          <a:xfrm>
+            <a:off x="594360" y="5184648"/>
+            <a:ext cx="310896" cy="310896"/>
+          </a:xfrm>
+          <a:prstGeom prst="ellipse">
+            <a:avLst/>
+          </a:prstGeom>
+          <a:solidFill>
+            <a:srgbClr val="2D9596"/>
+          </a:solidFill>
+          <a:ln/>
+        </p:spPr>
+      </p:sp>
+      <p:sp>
+        <p:nvSpPr>
+          <p:cNvPr id="20" name="Text 18"/>
+          <p:cNvSpPr txBox="1"/>
+          <p:nvPr/>
+        </p:nvSpPr>
+        <p:spPr>
+          <a:xfrm>
+            <a:off x="594360" y="5184648"/>
+            <a:ext cx="310896" cy="310896"/>
+          </a:xfrm>
+          <a:prstGeom prst="rect">
+            <a:avLst/>
+          </a:prstGeom>
+          <a:noFill/>
+          <a:ln/>
+        </p:spPr>
+        <p:txBody>
+          <a:bodyPr wrap="square" lIns="0" tIns="0" rIns="0" bIns="0" rtlCol="0" anchor="ctr"/>
+          <a:lstStyle/>
+          <a:p>
+            <a:pPr algn="ctr" indent="0" marL="0">
+              <a:buNone/>
+            </a:pPr>
+            <a:r>
+              <a:rPr lang="en-US" sz="1300" b="1" dirty="0">
+                <a:solidFill>
+                  <a:srgbClr val="FFFFFF"/>
+                </a:solidFill>
+                <a:latin typeface="Calibri" pitchFamily="34" charset="0"/>
+                <a:ea typeface="Calibri" pitchFamily="34" charset="-122"/>
+                <a:cs typeface="Calibri" pitchFamily="34" charset="-120"/>
+              </a:rPr>
+              <a:t>5</a:t>
+            </a:r>
+            <a:endParaRPr lang="en-US" sz="1300" dirty="0"/>
+          </a:p>
+        </p:txBody>
+      </p:sp>
+      <p:sp>
+        <p:nvSpPr>
+          <p:cNvPr id="21" name="Text 19"/>
+          <p:cNvSpPr txBox="1"/>
+          <p:nvPr/>
+        </p:nvSpPr>
+        <p:spPr>
+          <a:xfrm>
+            <a:off x="1097280" y="5166360"/>
+            <a:ext cx="10332720" cy="274320"/>
+          </a:xfrm>
+          <a:prstGeom prst="rect">
+            <a:avLst/>
+          </a:prstGeom>
+          <a:noFill/>
+          <a:ln/>
+        </p:spPr>
+        <p:txBody>
+          <a:bodyPr wrap="square" lIns="0" tIns="0" rIns="0" bIns="0" rtlCol="0" anchor="ctr"/>
+          <a:lstStyle/>
+          <a:p>
+            <a:pPr indent="0" marL="0">
+              <a:buNone/>
+            </a:pPr>
+            <a:r>
+              <a:rPr lang="en-US" sz="1450" b="1" dirty="0">
+                <a:solidFill>
+                  <a:srgbClr val="FFFFFF"/>
+                </a:solidFill>
+                <a:latin typeface="Calibri" pitchFamily="34" charset="0"/>
+                <a:ea typeface="Calibri" pitchFamily="34" charset="-122"/>
+                <a:cs typeface="Calibri" pitchFamily="34" charset="-120"/>
+              </a:rPr>
+              <a:t>Two workloads, two different hardware answers</a:t>
+            </a:r>
+            <a:endParaRPr lang="en-US" sz="1450" dirty="0"/>
+          </a:p>
+        </p:txBody>
+      </p:sp>
+      <p:sp>
+        <p:nvSpPr>
+          <p:cNvPr id="22" name="Text 20"/>
+          <p:cNvSpPr txBox="1"/>
+          <p:nvPr/>
+        </p:nvSpPr>
+        <p:spPr>
+          <a:xfrm>
+            <a:off x="1097280" y="5458968"/>
+            <a:ext cx="10332720" cy="502920"/>
+          </a:xfrm>
+          <a:prstGeom prst="rect">
+            <a:avLst/>
+          </a:prstGeom>
+          <a:noFill/>
+          <a:ln/>
+        </p:spPr>
+        <p:txBody>
+          <a:bodyPr wrap="square" lIns="0" tIns="0" rIns="0" bIns="0" rtlCol="0" anchor="ctr"/>
+          <a:lstStyle/>
+          <a:p>
+            <a:pPr indent="0" marL="0">
+              <a:buNone/>
+            </a:pPr>
+            <a:r>
+              <a:rPr lang="en-US" sz="1250" dirty="0">
+                <a:solidFill>
+                  <a:srgbClr val="9AA0A6"/>
+                </a:solidFill>
+                <a:latin typeface="Calibri" pitchFamily="34" charset="0"/>
+                <a:ea typeface="Calibri" pitchFamily="34" charset="-122"/>
+                <a:cs typeface="Calibri" pitchFamily="34" charset="-120"/>
+              </a:rPr>
+              <a:t>raytrace is regular and suits a control-free systolic pipeline. pyflate's variable-length decode is serially dependent by construction — the same method, an entirely different conclusion.</a:t>
+            </a:r>
+            <a:endParaRPr lang="en-US" sz="1250" dirty="0"/>
+          </a:p>
+        </p:txBody>
+      </p:sp>
+    </p:spTree>
+  </p:cSld>
+  <p:clrMapOvr>
+    <a:masterClrMapping/>
+  </p:clrMapOvr>
+</p:sld>
+</file>
+
+<file path=ppt/slides/slide21.xml><?xml version="1.0" encoding="utf-8"?>
+<p:sld xmlns:a="http://schemas.openxmlformats.org/drawingml/2006/main" xmlns:r="http://schemas.openxmlformats.org/officeDocument/2006/relationships" xmlns:p="http://schemas.openxmlformats.org/presentationml/2006/main">
+  <p:cSld name="Slide 21">
+    <p:bg>
+      <p:bgPr>
+        <a:solidFill>
+          <a:srgbClr val="1A1D23"/>
+        </a:solidFill>
+      </p:bgPr>
+    </p:bg>
+    <p:spTree>
+      <p:nvGrpSpPr>
+        <p:cNvPr id="1" name=""/>
+        <p:cNvGrpSpPr/>
+        <p:nvPr/>
+      </p:nvGrpSpPr>
+      <p:grpSpPr>
+        <a:xfrm>
+          <a:off x="0" y="0"/>
+          <a:ext cx="0" cy="0"/>
+          <a:chOff x="0" y="0"/>
+          <a:chExt cx="0" cy="0"/>
+        </a:xfrm>
+      </p:grpSpPr>
+      <p:sp>
+        <p:nvSpPr>
+          <p:cNvPr id="2" name="Text 0"/>
+          <p:cNvSpPr txBox="1"/>
+          <p:nvPr/>
+        </p:nvSpPr>
+        <p:spPr>
+          <a:xfrm>
             <a:off x="594360" y="2286000"/>
             <a:ext cx="7315200" cy="914400"/>
           </a:xfrm>
@@ -13619,7 +15033,7 @@
                 <a:ea typeface="Calibri" pitchFamily="34" charset="-122"/>
                 <a:cs typeface="Calibri" pitchFamily="34" charset="-120"/>
               </a:rPr>
-              <a:t>Python 3.10.12 debug build (python3-dbg)</a:t>
+              <a:t>Python 3.10.12 — timing: release · profiling: dbg</a:t>
             </a:r>
             <a:endParaRPr lang="en-US" sz="1250" dirty="0"/>
           </a:p>
@@ -17552,7 +18966,7 @@
                 <a:ea typeface="Cambria" pitchFamily="34" charset="-122"/>
                 <a:cs typeface="Cambria" pitchFamily="34" charset="-120"/>
               </a:rPr>
-              <a:t>raytrace: 2.98× faster, identical output</a:t>
+              <a:t>raytrace: 2.56× faster, identical output</a:t>
             </a:r>
             <a:endParaRPr lang="en-US" sz="3200" dirty="0"/>
           </a:p>
@@ -17591,7 +19005,7 @@
                 <a:ea typeface="Cambria" pitchFamily="34" charset="-122"/>
                 <a:cs typeface="Cambria" pitchFamily="34" charset="-120"/>
               </a:rPr>
-              <a:t>2.15 s → 719 ms</a:t>
+              <a:t>804 ms → 314 ms</a:t>
             </a:r>
             <a:endParaRPr lang="en-US" sz="4000" dirty="0"/>
           </a:p>
@@ -17630,7 +19044,7 @@
                 <a:ea typeface="Calibri" pitchFamily="34" charset="-122"/>
                 <a:cs typeface="Calibri" pitchFamily="34" charset="-120"/>
               </a:rPr>
-              <a:t>pyperf, ±1 % std dev</a:t>
+              <a:t>release python3 · pyperf ±1 %</a:t>
             </a:r>
             <a:endParaRPr lang="en-US" sz="1200" dirty="0"/>
           </a:p>
@@ -17669,7 +19083,7 @@
                 <a:ea typeface="Cambria" pitchFamily="34" charset="-122"/>
                 <a:cs typeface="Cambria" pitchFamily="34" charset="-120"/>
               </a:rPr>
-              <a:t>2.98×</a:t>
+              <a:t>2.56×</a:t>
             </a:r>
             <a:endParaRPr lang="en-US" sz="5200" dirty="0"/>
           </a:p>
@@ -17684,7 +19098,7 @@
         <p:spPr>
           <a:xfrm>
             <a:off x="3703320" y="2194560"/>
-            <a:ext cx="2377440" cy="548640"/>
+            <a:ext cx="2377440" cy="822960"/>
           </a:xfrm>
           <a:prstGeom prst="rect">
             <a:avLst/>
@@ -17708,7 +19122,24 @@
                 <a:ea typeface="Calibri" pitchFamily="34" charset="-122"/>
                 <a:cs typeface="Calibri" pitchFamily="34" charset="-120"/>
               </a:rPr>
-              <a:t>66.6 % faster</a:t>
+              <a:t>60.9 % less time</a:t>
+            </a:r>
+            <a:endParaRPr lang="en-US" sz="1200" dirty="0"/>
+          </a:p>
+          <a:p>
+            <a:pPr indent="0" marL="0">
+              <a:buNone/>
+            </a:pPr>
+            <a:r>
+              <a:rPr lang="en-US" sz="1200" dirty="0">
+                <a:solidFill>
+                  <a:srgbClr val="6B7280"/>
+                </a:solidFill>
+                <a:latin typeface="Calibri" pitchFamily="34" charset="0"/>
+                <a:ea typeface="Calibri" pitchFamily="34" charset="-122"/>
+                <a:cs typeface="Calibri" pitchFamily="34" charset="-120"/>
+              </a:rPr>
+              <a:t>debug build said 2.98×</a:t>
             </a:r>
             <a:endParaRPr lang="en-US" sz="1200" dirty="0"/>
           </a:p>
@@ -17777,7 +19208,7 @@
                           <a:ea typeface="Calibri" pitchFamily="34" charset="-122"/>
                           <a:cs typeface="Calibri" pitchFamily="34" charset="-120"/>
                         </a:rPr>
-                        <a:t>metric</a:t>
+                        <a:t>perf counter · dbg</a:t>
                       </a:r>
                       <a:endParaRPr lang="en-US" sz="1150" dirty="0">
                         <a:latin typeface="Calibri" charset="0"/>
